--- a/docs/ADAFSA_Platform_Tour_EN_AZ.pptx
+++ b/docs/ADAFSA_Platform_Tour_EN_AZ.pptx
@@ -602,16 +602,16 @@
               <a:rPr lang="en-US" dirty="0"/>
               <a:t>All your farms on one page
 The first page. It shows what is grown in the whole region, and where.
-1. Choose what to count — A region, and the crop groups: cereals, fodder, vegetables, palms, fruit trees.
-2. The big numbers — Farms, land, and land in use. 10 dunums = 1 hectare.
-3. Where the farms are — Each circle is a number of farms. Zoom in, and it splits.
-4. What is grown — Each crop group, by land and by number of farms.
-Bütün təsərrüfatlarınız bir səhifədə
+1. The menu — Every part of the website. Point at an icon to see its pages.
+2. Choose what to count — A region, and the crop groups.
+3. The big numbers — Farms, land, and land in use. 10 dunums = 1 hectare.
+4. Where the farms are — Each circle is a group of farms. Zoom in to split it.
+Bütün təsərrüfatlar bir səhifədə
 İlk səhifə. Bütün bölgədə nəyin və harada becərildiyini göstərir.
-1. Nəyi sayacağınızı seçin — Bölgə və bitki qrupları: dənli, yem, tərəvəz, xurma, meyvə ağacları.
-2. Əsas rəqəmlər — Təsərrüfatlar, torpaq və istifadə olunan torpaq. 10 dönüm = 1 hektar.
-3. Təsərrüfatlar haradadır — Hər dairə bir neçə təsərrüfatdır. Yaxınlaşdırın, dairə bölünür.
-4. Nə becərilir — Hər bitki qrupu: torpağa və təsərrüfat sayına görə.</a:t>
+1. Menyu — Saytın bütün bölmələri. Səhifələri görmək üçün ikonun üzərinə gəlin.
+2. Nəyi sayacağınızı seçin — Bölgə və bitki qrupları.
+3. Əsas rəqəmlər — Təsərrüfatlar, torpaq və istifadə olunan torpaq. 10 dönüm = 1 hektar.
+4. Təsərrüfatlar haradadır — Hər dairə bir qrup təsərrüfatdır. Bölmək üçün yaxınlaşdırın.</a:t>
             </a:r>
             <a:endParaRPr lang="en-US" dirty="0"/>
           </a:p>
@@ -701,13 +701,13 @@
               <a:rPr lang="en-US" dirty="0"/>
               <a:t>What grows where
 The field crops on every farm: which crop, on how much land, and on which farm.
-1. Open a crop group — Tick a group, or open it and pick one crop, like alfalfa or tomato.
-2. Coloured by crop — Each dot is a farm. The colour is its main crop group.
+1. Open a crop group — Tick a group, or open it to pick one crop.
+2. Coloured by crop — Each dot is a farm, in the colour of its main crop.
 3. Land for each crop — Dunums and share. Click a group to see its crops.
 Harada nə becərilir
 Hər təsərrüfatda tarla bitkiləri: hansı bitki, nə qədər torpaqda və hansı təsərrüfatda.
-1. Bitki qrupunu açın — Qrupu seçin və ya açıb bir bitki seçin, məsələn, yonca və ya pomidor.
-2. Bitkiyə görə rəng — Hər nöqtə bir təsərrüfatdır. Rəng onun əsas bitki qrupudur.
+1. Bitki qrupunu açın — Qrupu seçin və ya açıb bir bitki seçin.
+2. Bitkiyə görə rəng — Hər nöqtə bir təsərrüfatdır, əsas bitkisinin rəngində.
 3. Hər bitkinin torpağı — Dönüm və pay. Bitkiləri görmək üçün qrupa klikləyin.</a:t>
             </a:r>
             <a:endParaRPr lang="en-US" dirty="0"/>
@@ -799,12 +799,12 @@
               <a:t>Every tree, in every orchard
 The satellite finds each tree, counts it, and tells its kind.
 1. All trees, counted — Date palms, fruit trees and forest trees.
-2. One dot, one tree — Zoom in to a farm. The colour of the dot is the variety.
+2. One dot, one tree — Zoom in to a farm. The colour of a dot is its variety.
 3. Which variety — Each colour is one variety of palm or fruit tree.
 4. Land under trees — Dunums of palms, fruit trees and forest trees.
 Hər bağda hər ağac
 Peyk hər ağacı tapır, sayır və onun növünü deyir.
-1. Bütün ağaclar sayılır — Xurma palmaları, meyvə ağacları və meşə ağacları.
+1. Bütün ağaclar sayılır — Xurma palmaları, meyvə və meşə ağacları.
 2. Bir nöqtə, bir ağac — Təsərrüfata yaxınlaşın. Nöqtənin rəngi sortu göstərir.
 3. Hansı sort — Hər rəng bir xurma və ya meyvə ağacı sortudur.
 4. Ağacların torpağı — Xurma, meyvə və meşə ağaclarının dönümü.</a:t>
@@ -897,15 +897,15 @@
               <a:rPr lang="en-US" dirty="0"/>
               <a:t>Plant health, farm by farm
 The satellite measures how green and strong the trees are. A low score is an early warning.
-1. A score from 0 to 100 — For palms and for fruit trees. 80 or more is healthy.
+1. A score from 0 to 100 — For palms and fruit trees. 80 or more is healthy.
 2. Who to visit first — Here: 6 farms have very stressed trees.
-3. Four levels — Healthy, fair, stressed, very stressed. Green is good, red is bad.
+3. Four levels — Healthy, fair, stressed, very stressed.
 4. Health on the map — The score of each area. Zoom in to see each farm.
-Bitki sağlamlığı, təsərrüfat-təsərrüfat
+Hər təsərrüfatda bitki sağlamlığı
 Peyk ağacların nə qədər yaşıl və güclü olduğunu ölçür. Aşağı bal erkən xəbərdarlıqdır.
 1. 0-dan 100-ə qədər bal — Xurma və meyvə ağacları üçün. 80 və yuxarı sağlamdır.
 2. Əvvəlcə kimə baş çəkmək — Burada: 6 təsərrüfatda ağaclar çox zəifdir.
-3. Dörd səviyyə — Sağlam, orta, zəif, çox zəif. Yaşıl yaxşıdır, qırmızı pisdir.
+3. Dörd səviyyə — Sağlam, orta, zəif, çox zəif.
 4. Xəritədə sağlamlıq — Hər ərazinin balı. Hər təsərrüfatı görmək üçün yaxınlaşdırın.</a:t>
             </a:r>
             <a:endParaRPr lang="en-US" dirty="0"/>
@@ -998,14 +998,14 @@
 Open any farm. You see its land, crops, trees and water, and what needs attention.
 1. The farm in numbers — Size, land in use, trees, and how many problems.
 2. What is wrong — Here: the trees look very stressed.
-3. Where it is — The farm’s real boundary, on the satellite picture.
-4. What it grows now — Each crop, and how much land it takes.
+3. What it grows now — Each crop, and how much land it takes.
+4. Its trees — Here: 59 palms, with a health score of 46.
 Bir təsərrüfat, hər şey bir yerdə
 İstənilən təsərrüfatı açın. Torpağını, bitkilərini, ağaclarını, suyunu və problemlərini görürsünüz.
 1. Rəqəmlərlə təsərrüfat — Ölçü, istifadə olunan torpaq, ağaclar və problemlərin sayı.
 2. Nə problem var — Burada: ağaclar çox zəif görünür.
-3. Harada yerləşir — Təsərrüfatın həqiqi sərhədi, peyk şəklində.
-4. İndi nə becərir — Hər bitki və onun tutduğu torpaq.</a:t>
+3. İndi nə becərir — Hər bitki və onun tutduğu torpaq.
+4. Ağacları — Burada: 59 xurma palması, sağlamlıq balı 46.</a:t>
             </a:r>
             <a:endParaRPr lang="en-US" dirty="0"/>
           </a:p>
@@ -1095,16 +1095,16 @@
               <a:rPr lang="en-US" dirty="0"/>
               <a:t>From a score to a farm visit
 What to check on this farm. The website does not name the disease. It shows where to look.
-1. Most urgent first — Each problem, with a short reason in plain words.
-2. What to do — Here: look for lack of water, salt in the soil, or pests.
+1. Most urgent first — Each problem, with a short reason.
+2. What to do — Look for lack of water, salt in the soil, or pests.
 3. Take it to the farm — Print one page for the visit.
-4. A possible cause — Here the farm used only 70% of the water it is allowed.
+4. A possible cause — The farm used only 70% of the water it is allowed.
 Baldan təsərrüfat ziyarətinə
 Bu təsərrüfatda nəyi yoxlamaq lazımdır. Sayt xəstəliyin adını demir. Harada baxmağı göstərir.
-1. Ən təcili birinci — Hər problem və sadə sözlərlə qısa səbəbi.
-2. Nə etməli — Burada: su çatışmazlığını, torpaqda duzu və ya zərərvericiləri axtarın.
+1. Ən təcili birinci — Hər problem və qısa səbəbi.
+2. Nə etməli — Su çatışmazlığını, torpaqda duzu və ya zərərvericiləri axtarın.
 3. Təsərrüfata aparın — Ziyarət üçün bir səhifə çap edin.
-4. Mümkün səbəb — Burada təsərrüfat ona ayrılan suyun yalnız 70 faizini istifadə edib.</a:t>
+4. Mümkün səbəb — Təsərrüfat ona ayrılan suyun yalnız 70 faizini istifadə edib.</a:t>
             </a:r>
             <a:endParaRPr lang="en-US" dirty="0"/>
           </a:p>
@@ -1574,8 +1574,8 @@
         </p:nvSpPr>
         <p:spPr>
           <a:xfrm>
-            <a:off x="7406640" y="0"/>
-            <a:ext cx="4785055" cy="6858000"/>
+            <a:off x="6675120" y="0"/>
+            <a:ext cx="5516575" cy="6858000"/>
           </a:xfrm>
           <a:prstGeom prst="rect">
             <a:avLst/>
@@ -1607,8 +1607,8 @@
         </p:blipFill>
         <p:spPr>
           <a:xfrm>
-            <a:off x="7821284" y="640080"/>
-            <a:ext cx="3955766" cy="5577840"/>
+            <a:off x="6903720" y="1887804"/>
+            <a:ext cx="5059375" cy="3082392"/>
           </a:xfrm>
           <a:prstGeom prst="rect">
             <a:avLst/>
@@ -1648,7 +1648,7 @@
         <p:spPr>
           <a:xfrm>
             <a:off x="685800" y="1783080"/>
-            <a:ext cx="6400800" cy="256032"/>
+            <a:ext cx="5669280" cy="256032"/>
           </a:xfrm>
           <a:prstGeom prst="rect">
             <a:avLst/>
@@ -1687,7 +1687,7 @@
         <p:spPr>
           <a:xfrm>
             <a:off x="685800" y="2093976"/>
-            <a:ext cx="6400800" cy="502920"/>
+            <a:ext cx="5669280" cy="502920"/>
           </a:xfrm>
           <a:prstGeom prst="rect">
             <a:avLst/>
@@ -1726,7 +1726,7 @@
         <p:spPr>
           <a:xfrm>
             <a:off x="685800" y="2679192"/>
-            <a:ext cx="6400800" cy="329184"/>
+            <a:ext cx="5669280" cy="329184"/>
           </a:xfrm>
           <a:prstGeom prst="rect">
             <a:avLst/>
@@ -1765,7 +1765,7 @@
         <p:spPr>
           <a:xfrm>
             <a:off x="685800" y="3044952"/>
-            <a:ext cx="6400800" cy="329184"/>
+            <a:ext cx="5669280" cy="329184"/>
           </a:xfrm>
           <a:prstGeom prst="rect">
             <a:avLst/>
@@ -1804,7 +1804,7 @@
         <p:spPr>
           <a:xfrm>
             <a:off x="685800" y="3794760"/>
-            <a:ext cx="6400800" cy="256032"/>
+            <a:ext cx="5669280" cy="256032"/>
           </a:xfrm>
           <a:prstGeom prst="rect">
             <a:avLst/>
@@ -1843,7 +1843,7 @@
         <p:spPr>
           <a:xfrm>
             <a:off x="685800" y="4105656"/>
-            <a:ext cx="6400800" cy="502920"/>
+            <a:ext cx="5669280" cy="502920"/>
           </a:xfrm>
           <a:prstGeom prst="rect">
             <a:avLst/>
@@ -1882,7 +1882,7 @@
         <p:spPr>
           <a:xfrm>
             <a:off x="685800" y="4690872"/>
-            <a:ext cx="6400800" cy="329184"/>
+            <a:ext cx="5669280" cy="329184"/>
           </a:xfrm>
           <a:prstGeom prst="rect">
             <a:avLst/>
@@ -1921,7 +1921,7 @@
         <p:spPr>
           <a:xfrm>
             <a:off x="685800" y="5056632"/>
-            <a:ext cx="6400800" cy="329184"/>
+            <a:ext cx="5669280" cy="329184"/>
           </a:xfrm>
           <a:prstGeom prst="rect">
             <a:avLst/>
@@ -1960,7 +1960,7 @@
         <p:spPr>
           <a:xfrm>
             <a:off x="685800" y="6126480"/>
-            <a:ext cx="6400800" cy="384048"/>
+            <a:ext cx="5669280" cy="384048"/>
           </a:xfrm>
           <a:prstGeom prst="rect">
             <a:avLst/>
@@ -2055,8 +2055,8 @@
         </p:blipFill>
         <p:spPr>
           <a:xfrm>
-            <a:off x="3955843" y="411480"/>
-            <a:ext cx="4280010" cy="6035040"/>
+            <a:off x="2788920" y="2168655"/>
+            <a:ext cx="6613855" cy="4029450"/>
           </a:xfrm>
           <a:prstGeom prst="rect">
             <a:avLst/>
@@ -2071,8 +2071,8 @@
         </p:nvSpPr>
         <p:spPr>
           <a:xfrm>
-            <a:off x="3968272" y="807468"/>
-            <a:ext cx="246888" cy="246888"/>
+            <a:off x="3327669" y="3771677"/>
+            <a:ext cx="228600" cy="228600"/>
           </a:xfrm>
           <a:prstGeom prst="ellipse">
             <a:avLst/>
@@ -2094,7 +2094,7 @@
               <a:buNone/>
             </a:pPr>
             <a:r>
-              <a:rPr lang="en-US" sz="1050" b="1" dirty="0">
+              <a:rPr lang="en-US" sz="1000" b="1" dirty="0">
                 <a:solidFill>
                   <a:srgbClr val="FFFFFF"/>
                 </a:solidFill>
@@ -2104,7 +2104,7 @@
               </a:rPr>
               <a:t>1</a:t>
             </a:r>
-            <a:endParaRPr lang="en-US" sz="1050" dirty="0"/>
+            <a:endParaRPr lang="en-US" sz="1000" dirty="0"/>
           </a:p>
         </p:txBody>
       </p:sp>
@@ -2116,8 +2116,8 @@
         </p:nvSpPr>
         <p:spPr>
           <a:xfrm>
-            <a:off x="3968272" y="1473212"/>
-            <a:ext cx="246888" cy="246888"/>
+            <a:off x="8656558" y="2485089"/>
+            <a:ext cx="228600" cy="228600"/>
           </a:xfrm>
           <a:prstGeom prst="ellipse">
             <a:avLst/>
@@ -2139,7 +2139,7 @@
               <a:buNone/>
             </a:pPr>
             <a:r>
-              <a:rPr lang="en-US" sz="1050" b="1" dirty="0">
+              <a:rPr lang="en-US" sz="1000" b="1" dirty="0">
                 <a:solidFill>
                   <a:srgbClr val="FFFFFF"/>
                 </a:solidFill>
@@ -2149,7 +2149,7 @@
               </a:rPr>
               <a:t>2</a:t>
             </a:r>
-            <a:endParaRPr lang="en-US" sz="1050" dirty="0"/>
+            <a:endParaRPr lang="en-US" sz="1000" dirty="0"/>
           </a:p>
         </p:txBody>
       </p:sp>
@@ -2161,8 +2161,8 @@
         </p:nvSpPr>
         <p:spPr>
           <a:xfrm>
-            <a:off x="4070177" y="2732836"/>
-            <a:ext cx="246888" cy="246888"/>
+            <a:off x="3841264" y="2979508"/>
+            <a:ext cx="228600" cy="228600"/>
           </a:xfrm>
           <a:prstGeom prst="ellipse">
             <a:avLst/>
@@ -2184,7 +2184,7 @@
               <a:buNone/>
             </a:pPr>
             <a:r>
-              <a:rPr lang="en-US" sz="1050" b="1" dirty="0">
+              <a:rPr lang="en-US" sz="1000" b="1" dirty="0">
                 <a:solidFill>
                   <a:srgbClr val="FFFFFF"/>
                 </a:solidFill>
@@ -2194,7 +2194,7 @@
               </a:rPr>
               <a:t>3</a:t>
             </a:r>
-            <a:endParaRPr lang="en-US" sz="1050" dirty="0"/>
+            <a:endParaRPr lang="en-US" sz="1000" dirty="0"/>
           </a:p>
         </p:txBody>
       </p:sp>
@@ -2206,8 +2206,8 @@
         </p:nvSpPr>
         <p:spPr>
           <a:xfrm>
-            <a:off x="3968272" y="4717719"/>
-            <a:ext cx="246888" cy="246888"/>
+            <a:off x="4032591" y="4414073"/>
+            <a:ext cx="228600" cy="228600"/>
           </a:xfrm>
           <a:prstGeom prst="ellipse">
             <a:avLst/>
@@ -2229,7 +2229,7 @@
               <a:buNone/>
             </a:pPr>
             <a:r>
-              <a:rPr lang="en-US" sz="1050" b="1" dirty="0">
+              <a:rPr lang="en-US" sz="1000" b="1" dirty="0">
                 <a:solidFill>
                   <a:srgbClr val="FFFFFF"/>
                 </a:solidFill>
@@ -2239,7 +2239,7 @@
               </a:rPr>
               <a:t>4</a:t>
             </a:r>
-            <a:endParaRPr lang="en-US" sz="1050" dirty="0"/>
+            <a:endParaRPr lang="en-US" sz="1000" dirty="0"/>
           </a:p>
         </p:txBody>
       </p:sp>
@@ -2251,8 +2251,8 @@
         </p:nvSpPr>
         <p:spPr>
           <a:xfrm>
-            <a:off x="502920" y="502920"/>
-            <a:ext cx="3132883" cy="237744"/>
+            <a:off x="502920" y="457200"/>
+            <a:ext cx="5410048" cy="237744"/>
           </a:xfrm>
           <a:prstGeom prst="rect">
             <a:avLst/>
@@ -2290,8 +2290,8 @@
         </p:nvSpPr>
         <p:spPr>
           <a:xfrm>
-            <a:off x="502920" y="786384"/>
-            <a:ext cx="3132883" cy="822960"/>
+            <a:off x="502920" y="731520"/>
+            <a:ext cx="5410048" cy="457200"/>
           </a:xfrm>
           <a:prstGeom prst="rect">
             <a:avLst/>
@@ -2329,8 +2329,8 @@
         </p:nvSpPr>
         <p:spPr>
           <a:xfrm>
-            <a:off x="502920" y="1664208"/>
-            <a:ext cx="3132883" cy="960120"/>
+            <a:off x="502920" y="1225296"/>
+            <a:ext cx="5410048" cy="585216"/>
           </a:xfrm>
           <a:prstGeom prst="rect">
             <a:avLst/>
@@ -2368,8 +2368,8 @@
         </p:nvSpPr>
         <p:spPr>
           <a:xfrm>
-            <a:off x="507492" y="2802636"/>
-            <a:ext cx="246888" cy="246888"/>
+            <a:off x="502920" y="2261286"/>
+            <a:ext cx="228600" cy="228600"/>
           </a:xfrm>
           <a:prstGeom prst="ellipse">
             <a:avLst/>
@@ -2391,7 +2391,7 @@
               <a:buNone/>
             </a:pPr>
             <a:r>
-              <a:rPr lang="en-US" sz="1050" b="1" dirty="0">
+              <a:rPr lang="en-US" sz="1000" b="1" dirty="0">
                 <a:solidFill>
                   <a:srgbClr val="FFFFFF"/>
                 </a:solidFill>
@@ -2401,7 +2401,7 @@
               </a:rPr>
               <a:t>1</a:t>
             </a:r>
-            <a:endParaRPr lang="en-US" sz="1050" dirty="0"/>
+            <a:endParaRPr lang="en-US" sz="1000" dirty="0"/>
           </a:p>
         </p:txBody>
       </p:sp>
@@ -2413,8 +2413,8 @@
         </p:nvSpPr>
         <p:spPr>
           <a:xfrm>
-            <a:off x="886968" y="2807208"/>
-            <a:ext cx="2748835" cy="818388"/>
+            <a:off x="832104" y="2265858"/>
+            <a:ext cx="1728216" cy="961726"/>
           </a:xfrm>
           <a:prstGeom prst="rect">
             <a:avLst/>
@@ -2433,7 +2433,7 @@
               <a:buNone/>
             </a:pPr>
             <a:r>
-              <a:rPr lang="en-US" sz="1350" b="1" dirty="0">
+              <a:rPr lang="en-US" sz="1300" b="1" dirty="0">
                 <a:solidFill>
                   <a:srgbClr val="0D1411"/>
                 </a:solidFill>
@@ -2441,19 +2441,16 @@
                 <a:ea typeface="Calibri" pitchFamily="34" charset="-122"/>
                 <a:cs typeface="Calibri" pitchFamily="34" charset="-120"/>
               </a:rPr>
-              <a:t>Choose what to count</a:t>
-            </a:r>
-            <a:endParaRPr lang="en-US" sz="1350" dirty="0"/>
-          </a:p>
-          <a:p>
-            <a:pPr indent="0" marL="0">
-              <a:spcAft>
-                <a:spcPts val="200"/>
-              </a:spcAft>
-              <a:buNone/>
-            </a:pPr>
-            <a:r>
-              <a:rPr lang="en-US" sz="1200" dirty="0">
+              <a:t>The menu</a:t>
+            </a:r>
+            <a:endParaRPr lang="en-US" sz="1300" dirty="0"/>
+          </a:p>
+          <a:p>
+            <a:pPr indent="0" marL="0">
+              <a:buNone/>
+            </a:pPr>
+            <a:r>
+              <a:rPr lang="en-US" sz="1150" dirty="0">
                 <a:solidFill>
                   <a:srgbClr val="4A5852"/>
                 </a:solidFill>
@@ -2461,9 +2458,9 @@
                 <a:ea typeface="Calibri" pitchFamily="34" charset="-122"/>
                 <a:cs typeface="Calibri" pitchFamily="34" charset="-120"/>
               </a:rPr>
-              <a:t>A region, and the crop groups: cereals, fodder, vegetables, palms, fruit trees.</a:t>
-            </a:r>
-            <a:endParaRPr lang="en-US" sz="1350" dirty="0"/>
+              <a:t>Every part of the website. Point at an icon to see its pages.</a:t>
+            </a:r>
+            <a:endParaRPr lang="en-US" sz="1300" dirty="0"/>
           </a:p>
         </p:txBody>
       </p:sp>
@@ -2475,8 +2472,8 @@
         </p:nvSpPr>
         <p:spPr>
           <a:xfrm>
-            <a:off x="507492" y="3694176"/>
-            <a:ext cx="246888" cy="246888"/>
+            <a:off x="502920" y="3296165"/>
+            <a:ext cx="228600" cy="228600"/>
           </a:xfrm>
           <a:prstGeom prst="ellipse">
             <a:avLst/>
@@ -2498,7 +2495,7 @@
               <a:buNone/>
             </a:pPr>
             <a:r>
-              <a:rPr lang="en-US" sz="1050" b="1" dirty="0">
+              <a:rPr lang="en-US" sz="1000" b="1" dirty="0">
                 <a:solidFill>
                   <a:srgbClr val="FFFFFF"/>
                 </a:solidFill>
@@ -2508,7 +2505,7 @@
               </a:rPr>
               <a:t>2</a:t>
             </a:r>
-            <a:endParaRPr lang="en-US" sz="1050" dirty="0"/>
+            <a:endParaRPr lang="en-US" sz="1000" dirty="0"/>
           </a:p>
         </p:txBody>
       </p:sp>
@@ -2520,8 +2517,8 @@
         </p:nvSpPr>
         <p:spPr>
           <a:xfrm>
-            <a:off x="886968" y="3698748"/>
-            <a:ext cx="2748835" cy="818388"/>
+            <a:off x="832104" y="3300737"/>
+            <a:ext cx="1728216" cy="961726"/>
           </a:xfrm>
           <a:prstGeom prst="rect">
             <a:avLst/>
@@ -2540,7 +2537,7 @@
               <a:buNone/>
             </a:pPr>
             <a:r>
-              <a:rPr lang="en-US" sz="1350" b="1" dirty="0">
+              <a:rPr lang="en-US" sz="1300" b="1" dirty="0">
                 <a:solidFill>
                   <a:srgbClr val="0D1411"/>
                 </a:solidFill>
@@ -2548,19 +2545,16 @@
                 <a:ea typeface="Calibri" pitchFamily="34" charset="-122"/>
                 <a:cs typeface="Calibri" pitchFamily="34" charset="-120"/>
               </a:rPr>
-              <a:t>The big numbers</a:t>
-            </a:r>
-            <a:endParaRPr lang="en-US" sz="1350" dirty="0"/>
-          </a:p>
-          <a:p>
-            <a:pPr indent="0" marL="0">
-              <a:spcAft>
-                <a:spcPts val="200"/>
-              </a:spcAft>
-              <a:buNone/>
-            </a:pPr>
-            <a:r>
-              <a:rPr lang="en-US" sz="1200" dirty="0">
+              <a:t>Choose what to count</a:t>
+            </a:r>
+            <a:endParaRPr lang="en-US" sz="1300" dirty="0"/>
+          </a:p>
+          <a:p>
+            <a:pPr indent="0" marL="0">
+              <a:buNone/>
+            </a:pPr>
+            <a:r>
+              <a:rPr lang="en-US" sz="1150" dirty="0">
                 <a:solidFill>
                   <a:srgbClr val="4A5852"/>
                 </a:solidFill>
@@ -2568,9 +2562,9 @@
                 <a:ea typeface="Calibri" pitchFamily="34" charset="-122"/>
                 <a:cs typeface="Calibri" pitchFamily="34" charset="-120"/>
               </a:rPr>
-              <a:t>Farms, land, and land in use. 10 dunums = 1 hectare.</a:t>
-            </a:r>
-            <a:endParaRPr lang="en-US" sz="1350" dirty="0"/>
+              <a:t>A region, and the crop groups.</a:t>
+            </a:r>
+            <a:endParaRPr lang="en-US" sz="1300" dirty="0"/>
           </a:p>
         </p:txBody>
       </p:sp>
@@ -2582,8 +2576,8 @@
         </p:nvSpPr>
         <p:spPr>
           <a:xfrm>
-            <a:off x="507492" y="4585716"/>
-            <a:ext cx="246888" cy="246888"/>
+            <a:off x="502920" y="4331043"/>
+            <a:ext cx="228600" cy="228600"/>
           </a:xfrm>
           <a:prstGeom prst="ellipse">
             <a:avLst/>
@@ -2605,7 +2599,7 @@
               <a:buNone/>
             </a:pPr>
             <a:r>
-              <a:rPr lang="en-US" sz="1050" b="1" dirty="0">
+              <a:rPr lang="en-US" sz="1000" b="1" dirty="0">
                 <a:solidFill>
                   <a:srgbClr val="FFFFFF"/>
                 </a:solidFill>
@@ -2615,7 +2609,7 @@
               </a:rPr>
               <a:t>3</a:t>
             </a:r>
-            <a:endParaRPr lang="en-US" sz="1050" dirty="0"/>
+            <a:endParaRPr lang="en-US" sz="1000" dirty="0"/>
           </a:p>
         </p:txBody>
       </p:sp>
@@ -2627,8 +2621,8 @@
         </p:nvSpPr>
         <p:spPr>
           <a:xfrm>
-            <a:off x="886968" y="4590288"/>
-            <a:ext cx="2748835" cy="818388"/>
+            <a:off x="832104" y="4335615"/>
+            <a:ext cx="1728216" cy="961726"/>
           </a:xfrm>
           <a:prstGeom prst="rect">
             <a:avLst/>
@@ -2647,7 +2641,7 @@
               <a:buNone/>
             </a:pPr>
             <a:r>
-              <a:rPr lang="en-US" sz="1350" b="1" dirty="0">
+              <a:rPr lang="en-US" sz="1300" b="1" dirty="0">
                 <a:solidFill>
                   <a:srgbClr val="0D1411"/>
                 </a:solidFill>
@@ -2655,19 +2649,16 @@
                 <a:ea typeface="Calibri" pitchFamily="34" charset="-122"/>
                 <a:cs typeface="Calibri" pitchFamily="34" charset="-120"/>
               </a:rPr>
-              <a:t>Where the farms are</a:t>
-            </a:r>
-            <a:endParaRPr lang="en-US" sz="1350" dirty="0"/>
-          </a:p>
-          <a:p>
-            <a:pPr indent="0" marL="0">
-              <a:spcAft>
-                <a:spcPts val="200"/>
-              </a:spcAft>
-              <a:buNone/>
-            </a:pPr>
-            <a:r>
-              <a:rPr lang="en-US" sz="1200" dirty="0">
+              <a:t>The big numbers</a:t>
+            </a:r>
+            <a:endParaRPr lang="en-US" sz="1300" dirty="0"/>
+          </a:p>
+          <a:p>
+            <a:pPr indent="0" marL="0">
+              <a:buNone/>
+            </a:pPr>
+            <a:r>
+              <a:rPr lang="en-US" sz="1150" dirty="0">
                 <a:solidFill>
                   <a:srgbClr val="4A5852"/>
                 </a:solidFill>
@@ -2675,9 +2666,9 @@
                 <a:ea typeface="Calibri" pitchFamily="34" charset="-122"/>
                 <a:cs typeface="Calibri" pitchFamily="34" charset="-120"/>
               </a:rPr>
-              <a:t>Each circle is a number of farms. Zoom in, and it splits.</a:t>
-            </a:r>
-            <a:endParaRPr lang="en-US" sz="1350" dirty="0"/>
+              <a:t>Farms, land, and land in use. 10 dunums = 1 hectare.</a:t>
+            </a:r>
+            <a:endParaRPr lang="en-US" sz="1300" dirty="0"/>
           </a:p>
         </p:txBody>
       </p:sp>
@@ -2689,8 +2680,8 @@
         </p:nvSpPr>
         <p:spPr>
           <a:xfrm>
-            <a:off x="507492" y="5477256"/>
-            <a:ext cx="246888" cy="246888"/>
+            <a:off x="502920" y="5365922"/>
+            <a:ext cx="228600" cy="228600"/>
           </a:xfrm>
           <a:prstGeom prst="ellipse">
             <a:avLst/>
@@ -2712,7 +2703,7 @@
               <a:buNone/>
             </a:pPr>
             <a:r>
-              <a:rPr lang="en-US" sz="1050" b="1" dirty="0">
+              <a:rPr lang="en-US" sz="1000" b="1" dirty="0">
                 <a:solidFill>
                   <a:srgbClr val="FFFFFF"/>
                 </a:solidFill>
@@ -2722,7 +2713,7 @@
               </a:rPr>
               <a:t>4</a:t>
             </a:r>
-            <a:endParaRPr lang="en-US" sz="1050" dirty="0"/>
+            <a:endParaRPr lang="en-US" sz="1000" dirty="0"/>
           </a:p>
         </p:txBody>
       </p:sp>
@@ -2734,8 +2725,8 @@
         </p:nvSpPr>
         <p:spPr>
           <a:xfrm>
-            <a:off x="886968" y="5481828"/>
-            <a:ext cx="2748835" cy="818388"/>
+            <a:off x="832104" y="5370494"/>
+            <a:ext cx="1728216" cy="961726"/>
           </a:xfrm>
           <a:prstGeom prst="rect">
             <a:avLst/>
@@ -2754,7 +2745,7 @@
               <a:buNone/>
             </a:pPr>
             <a:r>
-              <a:rPr lang="en-US" sz="1350" b="1" dirty="0">
+              <a:rPr lang="en-US" sz="1300" b="1" dirty="0">
                 <a:solidFill>
                   <a:srgbClr val="0D1411"/>
                 </a:solidFill>
@@ -2762,19 +2753,16 @@
                 <a:ea typeface="Calibri" pitchFamily="34" charset="-122"/>
                 <a:cs typeface="Calibri" pitchFamily="34" charset="-120"/>
               </a:rPr>
-              <a:t>What is grown</a:t>
-            </a:r>
-            <a:endParaRPr lang="en-US" sz="1350" dirty="0"/>
-          </a:p>
-          <a:p>
-            <a:pPr indent="0" marL="0">
-              <a:spcAft>
-                <a:spcPts val="200"/>
-              </a:spcAft>
-              <a:buNone/>
-            </a:pPr>
-            <a:r>
-              <a:rPr lang="en-US" sz="1200" dirty="0">
+              <a:t>Where the farms are</a:t>
+            </a:r>
+            <a:endParaRPr lang="en-US" sz="1300" dirty="0"/>
+          </a:p>
+          <a:p>
+            <a:pPr indent="0" marL="0">
+              <a:buNone/>
+            </a:pPr>
+            <a:r>
+              <a:rPr lang="en-US" sz="1150" dirty="0">
                 <a:solidFill>
                   <a:srgbClr val="4A5852"/>
                 </a:solidFill>
@@ -2782,9 +2770,9 @@
                 <a:ea typeface="Calibri" pitchFamily="34" charset="-122"/>
                 <a:cs typeface="Calibri" pitchFamily="34" charset="-120"/>
               </a:rPr>
-              <a:t>Each crop group, by land and by number of farms.</a:t>
-            </a:r>
-            <a:endParaRPr lang="en-US" sz="1350" dirty="0"/>
+              <a:t>Each circle is a group of farms. Zoom in to split it.</a:t>
+            </a:r>
+            <a:endParaRPr lang="en-US" sz="1300" dirty="0"/>
           </a:p>
         </p:txBody>
       </p:sp>
@@ -2796,8 +2784,8 @@
         </p:nvSpPr>
         <p:spPr>
           <a:xfrm>
-            <a:off x="8555892" y="502920"/>
-            <a:ext cx="3132883" cy="237744"/>
+            <a:off x="6278728" y="457200"/>
+            <a:ext cx="5410048" cy="237744"/>
           </a:xfrm>
           <a:prstGeom prst="rect">
             <a:avLst/>
@@ -2835,8 +2823,8 @@
         </p:nvSpPr>
         <p:spPr>
           <a:xfrm>
-            <a:off x="8555892" y="786384"/>
-            <a:ext cx="3132883" cy="822960"/>
+            <a:off x="6278728" y="731520"/>
+            <a:ext cx="5410048" cy="457200"/>
           </a:xfrm>
           <a:prstGeom prst="rect">
             <a:avLst/>
@@ -2860,7 +2848,7 @@
                 <a:ea typeface="Calibri" pitchFamily="34" charset="-122"/>
                 <a:cs typeface="Calibri" pitchFamily="34" charset="-120"/>
               </a:rPr>
-              <a:t>Bütün təsərrüfatlarınız bir səhifədə</a:t>
+              <a:t>Bütün təsərrüfatlar bir səhifədə</a:t>
             </a:r>
             <a:endParaRPr lang="en-US" sz="2400" dirty="0"/>
           </a:p>
@@ -2874,8 +2862,8 @@
         </p:nvSpPr>
         <p:spPr>
           <a:xfrm>
-            <a:off x="8555892" y="1664208"/>
-            <a:ext cx="3132883" cy="960120"/>
+            <a:off x="6278728" y="1225296"/>
+            <a:ext cx="5410048" cy="585216"/>
           </a:xfrm>
           <a:prstGeom prst="rect">
             <a:avLst/>
@@ -2913,8 +2901,8 @@
         </p:nvSpPr>
         <p:spPr>
           <a:xfrm>
-            <a:off x="8560464" y="2802636"/>
-            <a:ext cx="246888" cy="246888"/>
+            <a:off x="9631375" y="2261286"/>
+            <a:ext cx="228600" cy="228600"/>
           </a:xfrm>
           <a:prstGeom prst="ellipse">
             <a:avLst/>
@@ -2936,7 +2924,7 @@
               <a:buNone/>
             </a:pPr>
             <a:r>
-              <a:rPr lang="en-US" sz="1050" b="1" dirty="0">
+              <a:rPr lang="en-US" sz="1000" b="1" dirty="0">
                 <a:solidFill>
                   <a:srgbClr val="FFFFFF"/>
                 </a:solidFill>
@@ -2946,7 +2934,7 @@
               </a:rPr>
               <a:t>1</a:t>
             </a:r>
-            <a:endParaRPr lang="en-US" sz="1050" dirty="0"/>
+            <a:endParaRPr lang="en-US" sz="1000" dirty="0"/>
           </a:p>
         </p:txBody>
       </p:sp>
@@ -2958,8 +2946,8 @@
         </p:nvSpPr>
         <p:spPr>
           <a:xfrm>
-            <a:off x="8939940" y="2807208"/>
-            <a:ext cx="2748835" cy="818388"/>
+            <a:off x="9960559" y="2265858"/>
+            <a:ext cx="1728216" cy="961726"/>
           </a:xfrm>
           <a:prstGeom prst="rect">
             <a:avLst/>
@@ -2978,7 +2966,7 @@
               <a:buNone/>
             </a:pPr>
             <a:r>
-              <a:rPr lang="en-US" sz="1350" b="1" dirty="0">
+              <a:rPr lang="en-US" sz="1300" b="1" dirty="0">
                 <a:solidFill>
                   <a:srgbClr val="0D1411"/>
                 </a:solidFill>
@@ -2986,19 +2974,16 @@
                 <a:ea typeface="Calibri" pitchFamily="34" charset="-122"/>
                 <a:cs typeface="Calibri" pitchFamily="34" charset="-120"/>
               </a:rPr>
-              <a:t>Nəyi sayacağınızı seçin</a:t>
-            </a:r>
-            <a:endParaRPr lang="en-US" sz="1350" dirty="0"/>
-          </a:p>
-          <a:p>
-            <a:pPr indent="0" marL="0">
-              <a:spcAft>
-                <a:spcPts val="200"/>
-              </a:spcAft>
-              <a:buNone/>
-            </a:pPr>
-            <a:r>
-              <a:rPr lang="en-US" sz="1200" dirty="0">
+              <a:t>Menyu</a:t>
+            </a:r>
+            <a:endParaRPr lang="en-US" sz="1300" dirty="0"/>
+          </a:p>
+          <a:p>
+            <a:pPr indent="0" marL="0">
+              <a:buNone/>
+            </a:pPr>
+            <a:r>
+              <a:rPr lang="en-US" sz="1150" dirty="0">
                 <a:solidFill>
                   <a:srgbClr val="4A5852"/>
                 </a:solidFill>
@@ -3006,9 +2991,9 @@
                 <a:ea typeface="Calibri" pitchFamily="34" charset="-122"/>
                 <a:cs typeface="Calibri" pitchFamily="34" charset="-120"/>
               </a:rPr>
-              <a:t>Bölgə və bitki qrupları: dənli, yem, tərəvəz, xurma, meyvə ağacları.</a:t>
-            </a:r>
-            <a:endParaRPr lang="en-US" sz="1350" dirty="0"/>
+              <a:t>Saytın bütün bölmələri. Səhifələri görmək üçün ikonun üzərinə gəlin.</a:t>
+            </a:r>
+            <a:endParaRPr lang="en-US" sz="1300" dirty="0"/>
           </a:p>
         </p:txBody>
       </p:sp>
@@ -3020,8 +3005,8 @@
         </p:nvSpPr>
         <p:spPr>
           <a:xfrm>
-            <a:off x="8560464" y="3694176"/>
-            <a:ext cx="246888" cy="246888"/>
+            <a:off x="9631375" y="3296165"/>
+            <a:ext cx="228600" cy="228600"/>
           </a:xfrm>
           <a:prstGeom prst="ellipse">
             <a:avLst/>
@@ -3043,7 +3028,7 @@
               <a:buNone/>
             </a:pPr>
             <a:r>
-              <a:rPr lang="en-US" sz="1050" b="1" dirty="0">
+              <a:rPr lang="en-US" sz="1000" b="1" dirty="0">
                 <a:solidFill>
                   <a:srgbClr val="FFFFFF"/>
                 </a:solidFill>
@@ -3053,7 +3038,7 @@
               </a:rPr>
               <a:t>2</a:t>
             </a:r>
-            <a:endParaRPr lang="en-US" sz="1050" dirty="0"/>
+            <a:endParaRPr lang="en-US" sz="1000" dirty="0"/>
           </a:p>
         </p:txBody>
       </p:sp>
@@ -3065,8 +3050,8 @@
         </p:nvSpPr>
         <p:spPr>
           <a:xfrm>
-            <a:off x="8939940" y="3698748"/>
-            <a:ext cx="2748835" cy="818388"/>
+            <a:off x="9960559" y="3300737"/>
+            <a:ext cx="1728216" cy="961726"/>
           </a:xfrm>
           <a:prstGeom prst="rect">
             <a:avLst/>
@@ -3085,7 +3070,7 @@
               <a:buNone/>
             </a:pPr>
             <a:r>
-              <a:rPr lang="en-US" sz="1350" b="1" dirty="0">
+              <a:rPr lang="en-US" sz="1300" b="1" dirty="0">
                 <a:solidFill>
                   <a:srgbClr val="0D1411"/>
                 </a:solidFill>
@@ -3093,19 +3078,16 @@
                 <a:ea typeface="Calibri" pitchFamily="34" charset="-122"/>
                 <a:cs typeface="Calibri" pitchFamily="34" charset="-120"/>
               </a:rPr>
-              <a:t>Əsas rəqəmlər</a:t>
-            </a:r>
-            <a:endParaRPr lang="en-US" sz="1350" dirty="0"/>
-          </a:p>
-          <a:p>
-            <a:pPr indent="0" marL="0">
-              <a:spcAft>
-                <a:spcPts val="200"/>
-              </a:spcAft>
-              <a:buNone/>
-            </a:pPr>
-            <a:r>
-              <a:rPr lang="en-US" sz="1200" dirty="0">
+              <a:t>Nəyi sayacağınızı seçin</a:t>
+            </a:r>
+            <a:endParaRPr lang="en-US" sz="1300" dirty="0"/>
+          </a:p>
+          <a:p>
+            <a:pPr indent="0" marL="0">
+              <a:buNone/>
+            </a:pPr>
+            <a:r>
+              <a:rPr lang="en-US" sz="1150" dirty="0">
                 <a:solidFill>
                   <a:srgbClr val="4A5852"/>
                 </a:solidFill>
@@ -3113,9 +3095,9 @@
                 <a:ea typeface="Calibri" pitchFamily="34" charset="-122"/>
                 <a:cs typeface="Calibri" pitchFamily="34" charset="-120"/>
               </a:rPr>
-              <a:t>Təsərrüfatlar, torpaq və istifadə olunan torpaq. 10 dönüm = 1 hektar.</a:t>
-            </a:r>
-            <a:endParaRPr lang="en-US" sz="1350" dirty="0"/>
+              <a:t>Bölgə və bitki qrupları.</a:t>
+            </a:r>
+            <a:endParaRPr lang="en-US" sz="1300" dirty="0"/>
           </a:p>
         </p:txBody>
       </p:sp>
@@ -3127,8 +3109,8 @@
         </p:nvSpPr>
         <p:spPr>
           <a:xfrm>
-            <a:off x="8560464" y="4585716"/>
-            <a:ext cx="246888" cy="246888"/>
+            <a:off x="9631375" y="4331043"/>
+            <a:ext cx="228600" cy="228600"/>
           </a:xfrm>
           <a:prstGeom prst="ellipse">
             <a:avLst/>
@@ -3150,7 +3132,7 @@
               <a:buNone/>
             </a:pPr>
             <a:r>
-              <a:rPr lang="en-US" sz="1050" b="1" dirty="0">
+              <a:rPr lang="en-US" sz="1000" b="1" dirty="0">
                 <a:solidFill>
                   <a:srgbClr val="FFFFFF"/>
                 </a:solidFill>
@@ -3160,7 +3142,7 @@
               </a:rPr>
               <a:t>3</a:t>
             </a:r>
-            <a:endParaRPr lang="en-US" sz="1050" dirty="0"/>
+            <a:endParaRPr lang="en-US" sz="1000" dirty="0"/>
           </a:p>
         </p:txBody>
       </p:sp>
@@ -3172,8 +3154,8 @@
         </p:nvSpPr>
         <p:spPr>
           <a:xfrm>
-            <a:off x="8939940" y="4590288"/>
-            <a:ext cx="2748835" cy="818388"/>
+            <a:off x="9960559" y="4335615"/>
+            <a:ext cx="1728216" cy="961726"/>
           </a:xfrm>
           <a:prstGeom prst="rect">
             <a:avLst/>
@@ -3192,7 +3174,7 @@
               <a:buNone/>
             </a:pPr>
             <a:r>
-              <a:rPr lang="en-US" sz="1350" b="1" dirty="0">
+              <a:rPr lang="en-US" sz="1300" b="1" dirty="0">
                 <a:solidFill>
                   <a:srgbClr val="0D1411"/>
                 </a:solidFill>
@@ -3200,19 +3182,16 @@
                 <a:ea typeface="Calibri" pitchFamily="34" charset="-122"/>
                 <a:cs typeface="Calibri" pitchFamily="34" charset="-120"/>
               </a:rPr>
-              <a:t>Təsərrüfatlar haradadır</a:t>
-            </a:r>
-            <a:endParaRPr lang="en-US" sz="1350" dirty="0"/>
-          </a:p>
-          <a:p>
-            <a:pPr indent="0" marL="0">
-              <a:spcAft>
-                <a:spcPts val="200"/>
-              </a:spcAft>
-              <a:buNone/>
-            </a:pPr>
-            <a:r>
-              <a:rPr lang="en-US" sz="1200" dirty="0">
+              <a:t>Əsas rəqəmlər</a:t>
+            </a:r>
+            <a:endParaRPr lang="en-US" sz="1300" dirty="0"/>
+          </a:p>
+          <a:p>
+            <a:pPr indent="0" marL="0">
+              <a:buNone/>
+            </a:pPr>
+            <a:r>
+              <a:rPr lang="en-US" sz="1150" dirty="0">
                 <a:solidFill>
                   <a:srgbClr val="4A5852"/>
                 </a:solidFill>
@@ -3220,9 +3199,9 @@
                 <a:ea typeface="Calibri" pitchFamily="34" charset="-122"/>
                 <a:cs typeface="Calibri" pitchFamily="34" charset="-120"/>
               </a:rPr>
-              <a:t>Hər dairə bir neçə təsərrüfatdır. Yaxınlaşdırın, dairə bölünür.</a:t>
-            </a:r>
-            <a:endParaRPr lang="en-US" sz="1350" dirty="0"/>
+              <a:t>Təsərrüfatlar, torpaq və istifadə olunan torpaq. 10 dönüm = 1 hektar.</a:t>
+            </a:r>
+            <a:endParaRPr lang="en-US" sz="1300" dirty="0"/>
           </a:p>
         </p:txBody>
       </p:sp>
@@ -3234,8 +3213,8 @@
         </p:nvSpPr>
         <p:spPr>
           <a:xfrm>
-            <a:off x="8560464" y="5477256"/>
-            <a:ext cx="246888" cy="246888"/>
+            <a:off x="9631375" y="5365922"/>
+            <a:ext cx="228600" cy="228600"/>
           </a:xfrm>
           <a:prstGeom prst="ellipse">
             <a:avLst/>
@@ -3257,7 +3236,7 @@
               <a:buNone/>
             </a:pPr>
             <a:r>
-              <a:rPr lang="en-US" sz="1050" b="1" dirty="0">
+              <a:rPr lang="en-US" sz="1000" b="1" dirty="0">
                 <a:solidFill>
                   <a:srgbClr val="FFFFFF"/>
                 </a:solidFill>
@@ -3267,7 +3246,7 @@
               </a:rPr>
               <a:t>4</a:t>
             </a:r>
-            <a:endParaRPr lang="en-US" sz="1050" dirty="0"/>
+            <a:endParaRPr lang="en-US" sz="1000" dirty="0"/>
           </a:p>
         </p:txBody>
       </p:sp>
@@ -3279,8 +3258,8 @@
         </p:nvSpPr>
         <p:spPr>
           <a:xfrm>
-            <a:off x="8939940" y="5481828"/>
-            <a:ext cx="2748835" cy="818388"/>
+            <a:off x="9960559" y="5370494"/>
+            <a:ext cx="1728216" cy="961726"/>
           </a:xfrm>
           <a:prstGeom prst="rect">
             <a:avLst/>
@@ -3299,7 +3278,7 @@
               <a:buNone/>
             </a:pPr>
             <a:r>
-              <a:rPr lang="en-US" sz="1350" b="1" dirty="0">
+              <a:rPr lang="en-US" sz="1300" b="1" dirty="0">
                 <a:solidFill>
                   <a:srgbClr val="0D1411"/>
                 </a:solidFill>
@@ -3307,19 +3286,16 @@
                 <a:ea typeface="Calibri" pitchFamily="34" charset="-122"/>
                 <a:cs typeface="Calibri" pitchFamily="34" charset="-120"/>
               </a:rPr>
-              <a:t>Nə becərilir</a:t>
-            </a:r>
-            <a:endParaRPr lang="en-US" sz="1350" dirty="0"/>
-          </a:p>
-          <a:p>
-            <a:pPr indent="0" marL="0">
-              <a:spcAft>
-                <a:spcPts val="200"/>
-              </a:spcAft>
-              <a:buNone/>
-            </a:pPr>
-            <a:r>
-              <a:rPr lang="en-US" sz="1200" dirty="0">
+              <a:t>Təsərrüfatlar haradadır</a:t>
+            </a:r>
+            <a:endParaRPr lang="en-US" sz="1300" dirty="0"/>
+          </a:p>
+          <a:p>
+            <a:pPr indent="0" marL="0">
+              <a:buNone/>
+            </a:pPr>
+            <a:r>
+              <a:rPr lang="en-US" sz="1150" dirty="0">
                 <a:solidFill>
                   <a:srgbClr val="4A5852"/>
                 </a:solidFill>
@@ -3327,9 +3303,9 @@
                 <a:ea typeface="Calibri" pitchFamily="34" charset="-122"/>
                 <a:cs typeface="Calibri" pitchFamily="34" charset="-120"/>
               </a:rPr>
-              <a:t>Hər bitki qrupu: torpağa və təsərrüfat sayına görə.</a:t>
-            </a:r>
-            <a:endParaRPr lang="en-US" sz="1350" dirty="0"/>
+              <a:t>Hər dairə bir qrup təsərrüfatdır. Bölmək üçün yaxınlaşdırın.</a:t>
+            </a:r>
+            <a:endParaRPr lang="en-US" sz="1300" dirty="0"/>
           </a:p>
         </p:txBody>
       </p:sp>
@@ -3420,8 +3396,8 @@
         </p:blipFill>
         <p:spPr>
           <a:xfrm>
-            <a:off x="3955843" y="411480"/>
-            <a:ext cx="4280010" cy="6035040"/>
+            <a:off x="2788920" y="2168655"/>
+            <a:ext cx="6613855" cy="4029450"/>
           </a:xfrm>
           <a:prstGeom prst="rect">
             <a:avLst/>
@@ -3436,8 +3412,8 @@
         </p:nvSpPr>
         <p:spPr>
           <a:xfrm>
-            <a:off x="7266827" y="873990"/>
-            <a:ext cx="246888" cy="246888"/>
+            <a:off x="6842944" y="2561510"/>
+            <a:ext cx="228600" cy="228600"/>
           </a:xfrm>
           <a:prstGeom prst="ellipse">
             <a:avLst/>
@@ -3459,7 +3435,7 @@
               <a:buNone/>
             </a:pPr>
             <a:r>
-              <a:rPr lang="en-US" sz="1050" b="1" dirty="0">
+              <a:rPr lang="en-US" sz="1000" b="1" dirty="0">
                 <a:solidFill>
                   <a:srgbClr val="FFFFFF"/>
                 </a:solidFill>
@@ -3469,7 +3445,7 @@
               </a:rPr>
               <a:t>1</a:t>
             </a:r>
-            <a:endParaRPr lang="en-US" sz="1050" dirty="0"/>
+            <a:endParaRPr lang="en-US" sz="1000" dirty="0"/>
           </a:p>
         </p:txBody>
       </p:sp>
@@ -3481,8 +3457,8 @@
         </p:nvSpPr>
         <p:spPr>
           <a:xfrm>
-            <a:off x="5135137" y="2455994"/>
-            <a:ext cx="246888" cy="246888"/>
+            <a:off x="4361011" y="3628793"/>
+            <a:ext cx="228600" cy="228600"/>
           </a:xfrm>
           <a:prstGeom prst="ellipse">
             <a:avLst/>
@@ -3504,7 +3480,7 @@
               <a:buNone/>
             </a:pPr>
             <a:r>
-              <a:rPr lang="en-US" sz="1050" b="1" dirty="0">
+              <a:rPr lang="en-US" sz="1000" b="1" dirty="0">
                 <a:solidFill>
                   <a:srgbClr val="FFFFFF"/>
                 </a:solidFill>
@@ -3514,7 +3490,7 @@
               </a:rPr>
               <a:t>2</a:t>
             </a:r>
-            <a:endParaRPr lang="en-US" sz="1050" dirty="0"/>
+            <a:endParaRPr lang="en-US" sz="1000" dirty="0"/>
           </a:p>
         </p:txBody>
       </p:sp>
@@ -3526,8 +3502,8 @@
         </p:nvSpPr>
         <p:spPr>
           <a:xfrm>
-            <a:off x="3968272" y="4784240"/>
-            <a:ext cx="246888" cy="246888"/>
+            <a:off x="3369353" y="5533519"/>
+            <a:ext cx="228600" cy="228600"/>
           </a:xfrm>
           <a:prstGeom prst="ellipse">
             <a:avLst/>
@@ -3549,7 +3525,7 @@
               <a:buNone/>
             </a:pPr>
             <a:r>
-              <a:rPr lang="en-US" sz="1050" b="1" dirty="0">
+              <a:rPr lang="en-US" sz="1000" b="1" dirty="0">
                 <a:solidFill>
                   <a:srgbClr val="FFFFFF"/>
                 </a:solidFill>
@@ -3559,7 +3535,7 @@
               </a:rPr>
               <a:t>3</a:t>
             </a:r>
-            <a:endParaRPr lang="en-US" sz="1050" dirty="0"/>
+            <a:endParaRPr lang="en-US" sz="1000" dirty="0"/>
           </a:p>
         </p:txBody>
       </p:sp>
@@ -3571,8 +3547,8 @@
         </p:nvSpPr>
         <p:spPr>
           <a:xfrm>
-            <a:off x="502920" y="502920"/>
-            <a:ext cx="3132883" cy="237744"/>
+            <a:off x="502920" y="457200"/>
+            <a:ext cx="5410048" cy="237744"/>
           </a:xfrm>
           <a:prstGeom prst="rect">
             <a:avLst/>
@@ -3610,8 +3586,8 @@
         </p:nvSpPr>
         <p:spPr>
           <a:xfrm>
-            <a:off x="502920" y="786384"/>
-            <a:ext cx="3132883" cy="822960"/>
+            <a:off x="502920" y="731520"/>
+            <a:ext cx="5410048" cy="457200"/>
           </a:xfrm>
           <a:prstGeom prst="rect">
             <a:avLst/>
@@ -3649,8 +3625,8 @@
         </p:nvSpPr>
         <p:spPr>
           <a:xfrm>
-            <a:off x="502920" y="1664208"/>
-            <a:ext cx="3132883" cy="960120"/>
+            <a:off x="502920" y="1225296"/>
+            <a:ext cx="5410048" cy="585216"/>
           </a:xfrm>
           <a:prstGeom prst="rect">
             <a:avLst/>
@@ -3688,8 +3664,8 @@
         </p:nvSpPr>
         <p:spPr>
           <a:xfrm>
-            <a:off x="507492" y="2802636"/>
-            <a:ext cx="246888" cy="246888"/>
+            <a:off x="502920" y="2261286"/>
+            <a:ext cx="228600" cy="228600"/>
           </a:xfrm>
           <a:prstGeom prst="ellipse">
             <a:avLst/>
@@ -3711,7 +3687,7 @@
               <a:buNone/>
             </a:pPr>
             <a:r>
-              <a:rPr lang="en-US" sz="1050" b="1" dirty="0">
+              <a:rPr lang="en-US" sz="1000" b="1" dirty="0">
                 <a:solidFill>
                   <a:srgbClr val="FFFFFF"/>
                 </a:solidFill>
@@ -3721,7 +3697,7 @@
               </a:rPr>
               <a:t>1</a:t>
             </a:r>
-            <a:endParaRPr lang="en-US" sz="1050" dirty="0"/>
+            <a:endParaRPr lang="en-US" sz="1000" dirty="0"/>
           </a:p>
         </p:txBody>
       </p:sp>
@@ -3733,8 +3709,8 @@
         </p:nvSpPr>
         <p:spPr>
           <a:xfrm>
-            <a:off x="886968" y="2807208"/>
-            <a:ext cx="2748835" cy="950976"/>
+            <a:off x="832104" y="2265858"/>
+            <a:ext cx="1728216" cy="1024128"/>
           </a:xfrm>
           <a:prstGeom prst="rect">
             <a:avLst/>
@@ -3753,7 +3729,7 @@
               <a:buNone/>
             </a:pPr>
             <a:r>
-              <a:rPr lang="en-US" sz="1350" b="1" dirty="0">
+              <a:rPr lang="en-US" sz="1300" b="1" dirty="0">
                 <a:solidFill>
                   <a:srgbClr val="0D1411"/>
                 </a:solidFill>
@@ -3763,17 +3739,14 @@
               </a:rPr>
               <a:t>Open a crop group</a:t>
             </a:r>
-            <a:endParaRPr lang="en-US" sz="1350" dirty="0"/>
-          </a:p>
-          <a:p>
-            <a:pPr indent="0" marL="0">
-              <a:spcAft>
-                <a:spcPts val="200"/>
-              </a:spcAft>
-              <a:buNone/>
-            </a:pPr>
-            <a:r>
-              <a:rPr lang="en-US" sz="1200" dirty="0">
+            <a:endParaRPr lang="en-US" sz="1300" dirty="0"/>
+          </a:p>
+          <a:p>
+            <a:pPr indent="0" marL="0">
+              <a:buNone/>
+            </a:pPr>
+            <a:r>
+              <a:rPr lang="en-US" sz="1150" dirty="0">
                 <a:solidFill>
                   <a:srgbClr val="4A5852"/>
                 </a:solidFill>
@@ -3781,9 +3754,9 @@
                 <a:ea typeface="Calibri" pitchFamily="34" charset="-122"/>
                 <a:cs typeface="Calibri" pitchFamily="34" charset="-120"/>
               </a:rPr>
-              <a:t>Tick a group, or open it and pick one crop, like alfalfa or tomato.</a:t>
-            </a:r>
-            <a:endParaRPr lang="en-US" sz="1350" dirty="0"/>
+              <a:t>Tick a group, or open it to pick one crop.</a:t>
+            </a:r>
+            <a:endParaRPr lang="en-US" sz="1300" dirty="0"/>
           </a:p>
         </p:txBody>
       </p:sp>
@@ -3795,8 +3768,8 @@
         </p:nvSpPr>
         <p:spPr>
           <a:xfrm>
-            <a:off x="507492" y="3826764"/>
-            <a:ext cx="246888" cy="246888"/>
+            <a:off x="502920" y="3358566"/>
+            <a:ext cx="228600" cy="228600"/>
           </a:xfrm>
           <a:prstGeom prst="ellipse">
             <a:avLst/>
@@ -3818,7 +3791,7 @@
               <a:buNone/>
             </a:pPr>
             <a:r>
-              <a:rPr lang="en-US" sz="1050" b="1" dirty="0">
+              <a:rPr lang="en-US" sz="1000" b="1" dirty="0">
                 <a:solidFill>
                   <a:srgbClr val="FFFFFF"/>
                 </a:solidFill>
@@ -3828,7 +3801,7 @@
               </a:rPr>
               <a:t>2</a:t>
             </a:r>
-            <a:endParaRPr lang="en-US" sz="1050" dirty="0"/>
+            <a:endParaRPr lang="en-US" sz="1000" dirty="0"/>
           </a:p>
         </p:txBody>
       </p:sp>
@@ -3840,8 +3813,8 @@
         </p:nvSpPr>
         <p:spPr>
           <a:xfrm>
-            <a:off x="886968" y="3831336"/>
-            <a:ext cx="2748835" cy="950976"/>
+            <a:off x="832104" y="3363138"/>
+            <a:ext cx="1728216" cy="1024128"/>
           </a:xfrm>
           <a:prstGeom prst="rect">
             <a:avLst/>
@@ -3860,7 +3833,7 @@
               <a:buNone/>
             </a:pPr>
             <a:r>
-              <a:rPr lang="en-US" sz="1350" b="1" dirty="0">
+              <a:rPr lang="en-US" sz="1300" b="1" dirty="0">
                 <a:solidFill>
                   <a:srgbClr val="0D1411"/>
                 </a:solidFill>
@@ -3870,17 +3843,14 @@
               </a:rPr>
               <a:t>Coloured by crop</a:t>
             </a:r>
-            <a:endParaRPr lang="en-US" sz="1350" dirty="0"/>
-          </a:p>
-          <a:p>
-            <a:pPr indent="0" marL="0">
-              <a:spcAft>
-                <a:spcPts val="200"/>
-              </a:spcAft>
-              <a:buNone/>
-            </a:pPr>
-            <a:r>
-              <a:rPr lang="en-US" sz="1200" dirty="0">
+            <a:endParaRPr lang="en-US" sz="1300" dirty="0"/>
+          </a:p>
+          <a:p>
+            <a:pPr indent="0" marL="0">
+              <a:buNone/>
+            </a:pPr>
+            <a:r>
+              <a:rPr lang="en-US" sz="1150" dirty="0">
                 <a:solidFill>
                   <a:srgbClr val="4A5852"/>
                 </a:solidFill>
@@ -3888,9 +3858,9 @@
                 <a:ea typeface="Calibri" pitchFamily="34" charset="-122"/>
                 <a:cs typeface="Calibri" pitchFamily="34" charset="-120"/>
               </a:rPr>
-              <a:t>Each dot is a farm. The colour is its main crop group.</a:t>
-            </a:r>
-            <a:endParaRPr lang="en-US" sz="1350" dirty="0"/>
+              <a:t>Each dot is a farm, in the colour of its main crop.</a:t>
+            </a:r>
+            <a:endParaRPr lang="en-US" sz="1300" dirty="0"/>
           </a:p>
         </p:txBody>
       </p:sp>
@@ -3902,8 +3872,8 @@
         </p:nvSpPr>
         <p:spPr>
           <a:xfrm>
-            <a:off x="507492" y="4850892"/>
-            <a:ext cx="246888" cy="246888"/>
+            <a:off x="502920" y="4455846"/>
+            <a:ext cx="228600" cy="228600"/>
           </a:xfrm>
           <a:prstGeom prst="ellipse">
             <a:avLst/>
@@ -3925,7 +3895,7 @@
               <a:buNone/>
             </a:pPr>
             <a:r>
-              <a:rPr lang="en-US" sz="1050" b="1" dirty="0">
+              <a:rPr lang="en-US" sz="1000" b="1" dirty="0">
                 <a:solidFill>
                   <a:srgbClr val="FFFFFF"/>
                 </a:solidFill>
@@ -3935,7 +3905,7 @@
               </a:rPr>
               <a:t>3</a:t>
             </a:r>
-            <a:endParaRPr lang="en-US" sz="1050" dirty="0"/>
+            <a:endParaRPr lang="en-US" sz="1000" dirty="0"/>
           </a:p>
         </p:txBody>
       </p:sp>
@@ -3947,8 +3917,8 @@
         </p:nvSpPr>
         <p:spPr>
           <a:xfrm>
-            <a:off x="886968" y="4855464"/>
-            <a:ext cx="2748835" cy="950976"/>
+            <a:off x="832104" y="4460418"/>
+            <a:ext cx="1728216" cy="1024128"/>
           </a:xfrm>
           <a:prstGeom prst="rect">
             <a:avLst/>
@@ -3967,7 +3937,7 @@
               <a:buNone/>
             </a:pPr>
             <a:r>
-              <a:rPr lang="en-US" sz="1350" b="1" dirty="0">
+              <a:rPr lang="en-US" sz="1300" b="1" dirty="0">
                 <a:solidFill>
                   <a:srgbClr val="0D1411"/>
                 </a:solidFill>
@@ -3977,17 +3947,14 @@
               </a:rPr>
               <a:t>Land for each crop</a:t>
             </a:r>
-            <a:endParaRPr lang="en-US" sz="1350" dirty="0"/>
-          </a:p>
-          <a:p>
-            <a:pPr indent="0" marL="0">
-              <a:spcAft>
-                <a:spcPts val="200"/>
-              </a:spcAft>
-              <a:buNone/>
-            </a:pPr>
-            <a:r>
-              <a:rPr lang="en-US" sz="1200" dirty="0">
+            <a:endParaRPr lang="en-US" sz="1300" dirty="0"/>
+          </a:p>
+          <a:p>
+            <a:pPr indent="0" marL="0">
+              <a:buNone/>
+            </a:pPr>
+            <a:r>
+              <a:rPr lang="en-US" sz="1150" dirty="0">
                 <a:solidFill>
                   <a:srgbClr val="4A5852"/>
                 </a:solidFill>
@@ -3997,7 +3964,7 @@
               </a:rPr>
               <a:t>Dunums and share. Click a group to see its crops.</a:t>
             </a:r>
-            <a:endParaRPr lang="en-US" sz="1350" dirty="0"/>
+            <a:endParaRPr lang="en-US" sz="1300" dirty="0"/>
           </a:p>
         </p:txBody>
       </p:sp>
@@ -4009,8 +3976,8 @@
         </p:nvSpPr>
         <p:spPr>
           <a:xfrm>
-            <a:off x="8555892" y="502920"/>
-            <a:ext cx="3132883" cy="237744"/>
+            <a:off x="6278728" y="457200"/>
+            <a:ext cx="5410048" cy="237744"/>
           </a:xfrm>
           <a:prstGeom prst="rect">
             <a:avLst/>
@@ -4048,8 +4015,8 @@
         </p:nvSpPr>
         <p:spPr>
           <a:xfrm>
-            <a:off x="8555892" y="786384"/>
-            <a:ext cx="3132883" cy="822960"/>
+            <a:off x="6278728" y="731520"/>
+            <a:ext cx="5410048" cy="457200"/>
           </a:xfrm>
           <a:prstGeom prst="rect">
             <a:avLst/>
@@ -4087,8 +4054,8 @@
         </p:nvSpPr>
         <p:spPr>
           <a:xfrm>
-            <a:off x="8555892" y="1664208"/>
-            <a:ext cx="3132883" cy="960120"/>
+            <a:off x="6278728" y="1225296"/>
+            <a:ext cx="5410048" cy="585216"/>
           </a:xfrm>
           <a:prstGeom prst="rect">
             <a:avLst/>
@@ -4126,8 +4093,8 @@
         </p:nvSpPr>
         <p:spPr>
           <a:xfrm>
-            <a:off x="8560464" y="2802636"/>
-            <a:ext cx="246888" cy="246888"/>
+            <a:off x="9631375" y="2261286"/>
+            <a:ext cx="228600" cy="228600"/>
           </a:xfrm>
           <a:prstGeom prst="ellipse">
             <a:avLst/>
@@ -4149,7 +4116,7 @@
               <a:buNone/>
             </a:pPr>
             <a:r>
-              <a:rPr lang="en-US" sz="1050" b="1" dirty="0">
+              <a:rPr lang="en-US" sz="1000" b="1" dirty="0">
                 <a:solidFill>
                   <a:srgbClr val="FFFFFF"/>
                 </a:solidFill>
@@ -4159,7 +4126,7 @@
               </a:rPr>
               <a:t>1</a:t>
             </a:r>
-            <a:endParaRPr lang="en-US" sz="1050" dirty="0"/>
+            <a:endParaRPr lang="en-US" sz="1000" dirty="0"/>
           </a:p>
         </p:txBody>
       </p:sp>
@@ -4171,8 +4138,8 @@
         </p:nvSpPr>
         <p:spPr>
           <a:xfrm>
-            <a:off x="8939940" y="2807208"/>
-            <a:ext cx="2748835" cy="950976"/>
+            <a:off x="9960559" y="2265858"/>
+            <a:ext cx="1728216" cy="1024128"/>
           </a:xfrm>
           <a:prstGeom prst="rect">
             <a:avLst/>
@@ -4191,7 +4158,7 @@
               <a:buNone/>
             </a:pPr>
             <a:r>
-              <a:rPr lang="en-US" sz="1350" b="1" dirty="0">
+              <a:rPr lang="en-US" sz="1300" b="1" dirty="0">
                 <a:solidFill>
                   <a:srgbClr val="0D1411"/>
                 </a:solidFill>
@@ -4201,17 +4168,14 @@
               </a:rPr>
               <a:t>Bitki qrupunu açın</a:t>
             </a:r>
-            <a:endParaRPr lang="en-US" sz="1350" dirty="0"/>
-          </a:p>
-          <a:p>
-            <a:pPr indent="0" marL="0">
-              <a:spcAft>
-                <a:spcPts val="200"/>
-              </a:spcAft>
-              <a:buNone/>
-            </a:pPr>
-            <a:r>
-              <a:rPr lang="en-US" sz="1200" dirty="0">
+            <a:endParaRPr lang="en-US" sz="1300" dirty="0"/>
+          </a:p>
+          <a:p>
+            <a:pPr indent="0" marL="0">
+              <a:buNone/>
+            </a:pPr>
+            <a:r>
+              <a:rPr lang="en-US" sz="1150" dirty="0">
                 <a:solidFill>
                   <a:srgbClr val="4A5852"/>
                 </a:solidFill>
@@ -4219,9 +4183,9 @@
                 <a:ea typeface="Calibri" pitchFamily="34" charset="-122"/>
                 <a:cs typeface="Calibri" pitchFamily="34" charset="-120"/>
               </a:rPr>
-              <a:t>Qrupu seçin və ya açıb bir bitki seçin, məsələn, yonca və ya pomidor.</a:t>
-            </a:r>
-            <a:endParaRPr lang="en-US" sz="1350" dirty="0"/>
+              <a:t>Qrupu seçin və ya açıb bir bitki seçin.</a:t>
+            </a:r>
+            <a:endParaRPr lang="en-US" sz="1300" dirty="0"/>
           </a:p>
         </p:txBody>
       </p:sp>
@@ -4233,8 +4197,8 @@
         </p:nvSpPr>
         <p:spPr>
           <a:xfrm>
-            <a:off x="8560464" y="3826764"/>
-            <a:ext cx="246888" cy="246888"/>
+            <a:off x="9631375" y="3358566"/>
+            <a:ext cx="228600" cy="228600"/>
           </a:xfrm>
           <a:prstGeom prst="ellipse">
             <a:avLst/>
@@ -4256,7 +4220,7 @@
               <a:buNone/>
             </a:pPr>
             <a:r>
-              <a:rPr lang="en-US" sz="1050" b="1" dirty="0">
+              <a:rPr lang="en-US" sz="1000" b="1" dirty="0">
                 <a:solidFill>
                   <a:srgbClr val="FFFFFF"/>
                 </a:solidFill>
@@ -4266,7 +4230,7 @@
               </a:rPr>
               <a:t>2</a:t>
             </a:r>
-            <a:endParaRPr lang="en-US" sz="1050" dirty="0"/>
+            <a:endParaRPr lang="en-US" sz="1000" dirty="0"/>
           </a:p>
         </p:txBody>
       </p:sp>
@@ -4278,8 +4242,8 @@
         </p:nvSpPr>
         <p:spPr>
           <a:xfrm>
-            <a:off x="8939940" y="3831336"/>
-            <a:ext cx="2748835" cy="950976"/>
+            <a:off x="9960559" y="3363138"/>
+            <a:ext cx="1728216" cy="1024128"/>
           </a:xfrm>
           <a:prstGeom prst="rect">
             <a:avLst/>
@@ -4298,7 +4262,7 @@
               <a:buNone/>
             </a:pPr>
             <a:r>
-              <a:rPr lang="en-US" sz="1350" b="1" dirty="0">
+              <a:rPr lang="en-US" sz="1300" b="1" dirty="0">
                 <a:solidFill>
                   <a:srgbClr val="0D1411"/>
                 </a:solidFill>
@@ -4308,17 +4272,14 @@
               </a:rPr>
               <a:t>Bitkiyə görə rəng</a:t>
             </a:r>
-            <a:endParaRPr lang="en-US" sz="1350" dirty="0"/>
-          </a:p>
-          <a:p>
-            <a:pPr indent="0" marL="0">
-              <a:spcAft>
-                <a:spcPts val="200"/>
-              </a:spcAft>
-              <a:buNone/>
-            </a:pPr>
-            <a:r>
-              <a:rPr lang="en-US" sz="1200" dirty="0">
+            <a:endParaRPr lang="en-US" sz="1300" dirty="0"/>
+          </a:p>
+          <a:p>
+            <a:pPr indent="0" marL="0">
+              <a:buNone/>
+            </a:pPr>
+            <a:r>
+              <a:rPr lang="en-US" sz="1150" dirty="0">
                 <a:solidFill>
                   <a:srgbClr val="4A5852"/>
                 </a:solidFill>
@@ -4326,9 +4287,9 @@
                 <a:ea typeface="Calibri" pitchFamily="34" charset="-122"/>
                 <a:cs typeface="Calibri" pitchFamily="34" charset="-120"/>
               </a:rPr>
-              <a:t>Hər nöqtə bir təsərrüfatdır. Rəng onun əsas bitki qrupudur.</a:t>
-            </a:r>
-            <a:endParaRPr lang="en-US" sz="1350" dirty="0"/>
+              <a:t>Hər nöqtə bir təsərrüfatdır, əsas bitkisinin rəngində.</a:t>
+            </a:r>
+            <a:endParaRPr lang="en-US" sz="1300" dirty="0"/>
           </a:p>
         </p:txBody>
       </p:sp>
@@ -4340,8 +4301,8 @@
         </p:nvSpPr>
         <p:spPr>
           <a:xfrm>
-            <a:off x="8560464" y="4850892"/>
-            <a:ext cx="246888" cy="246888"/>
+            <a:off x="9631375" y="4455846"/>
+            <a:ext cx="228600" cy="228600"/>
           </a:xfrm>
           <a:prstGeom prst="ellipse">
             <a:avLst/>
@@ -4363,7 +4324,7 @@
               <a:buNone/>
             </a:pPr>
             <a:r>
-              <a:rPr lang="en-US" sz="1050" b="1" dirty="0">
+              <a:rPr lang="en-US" sz="1000" b="1" dirty="0">
                 <a:solidFill>
                   <a:srgbClr val="FFFFFF"/>
                 </a:solidFill>
@@ -4373,7 +4334,7 @@
               </a:rPr>
               <a:t>3</a:t>
             </a:r>
-            <a:endParaRPr lang="en-US" sz="1050" dirty="0"/>
+            <a:endParaRPr lang="en-US" sz="1000" dirty="0"/>
           </a:p>
         </p:txBody>
       </p:sp>
@@ -4385,8 +4346,8 @@
         </p:nvSpPr>
         <p:spPr>
           <a:xfrm>
-            <a:off x="8939940" y="4855464"/>
-            <a:ext cx="2748835" cy="950976"/>
+            <a:off x="9960559" y="4460418"/>
+            <a:ext cx="1728216" cy="1024128"/>
           </a:xfrm>
           <a:prstGeom prst="rect">
             <a:avLst/>
@@ -4405,7 +4366,7 @@
               <a:buNone/>
             </a:pPr>
             <a:r>
-              <a:rPr lang="en-US" sz="1350" b="1" dirty="0">
+              <a:rPr lang="en-US" sz="1300" b="1" dirty="0">
                 <a:solidFill>
                   <a:srgbClr val="0D1411"/>
                 </a:solidFill>
@@ -4415,17 +4376,14 @@
               </a:rPr>
               <a:t>Hər bitkinin torpağı</a:t>
             </a:r>
-            <a:endParaRPr lang="en-US" sz="1350" dirty="0"/>
-          </a:p>
-          <a:p>
-            <a:pPr indent="0" marL="0">
-              <a:spcAft>
-                <a:spcPts val="200"/>
-              </a:spcAft>
-              <a:buNone/>
-            </a:pPr>
-            <a:r>
-              <a:rPr lang="en-US" sz="1200" dirty="0">
+            <a:endParaRPr lang="en-US" sz="1300" dirty="0"/>
+          </a:p>
+          <a:p>
+            <a:pPr indent="0" marL="0">
+              <a:buNone/>
+            </a:pPr>
+            <a:r>
+              <a:rPr lang="en-US" sz="1150" dirty="0">
                 <a:solidFill>
                   <a:srgbClr val="4A5852"/>
                 </a:solidFill>
@@ -4435,7 +4393,7 @@
               </a:rPr>
               <a:t>Dönüm və pay. Bitkiləri görmək üçün qrupa klikləyin.</a:t>
             </a:r>
-            <a:endParaRPr lang="en-US" sz="1350" dirty="0"/>
+            <a:endParaRPr lang="en-US" sz="1300" dirty="0"/>
           </a:p>
         </p:txBody>
       </p:sp>
@@ -4526,8 +4484,8 @@
         </p:blipFill>
         <p:spPr>
           <a:xfrm>
-            <a:off x="3955843" y="411480"/>
-            <a:ext cx="4280010" cy="6035040"/>
+            <a:off x="2788920" y="2168655"/>
+            <a:ext cx="6613855" cy="4029450"/>
           </a:xfrm>
           <a:prstGeom prst="rect">
             <a:avLst/>
@@ -4542,8 +4500,8 @@
         </p:nvSpPr>
         <p:spPr>
           <a:xfrm>
-            <a:off x="3968272" y="1490904"/>
-            <a:ext cx="246888" cy="246888"/>
+            <a:off x="4006263" y="3055928"/>
+            <a:ext cx="228600" cy="228600"/>
           </a:xfrm>
           <a:prstGeom prst="ellipse">
             <a:avLst/>
@@ -4565,7 +4523,7 @@
               <a:buNone/>
             </a:pPr>
             <a:r>
-              <a:rPr lang="en-US" sz="1050" b="1" dirty="0">
+              <a:rPr lang="en-US" sz="1000" b="1" dirty="0">
                 <a:solidFill>
                   <a:srgbClr val="FFFFFF"/>
                 </a:solidFill>
@@ -4575,7 +4533,7 @@
               </a:rPr>
               <a:t>1</a:t>
             </a:r>
-            <a:endParaRPr lang="en-US" sz="1050" dirty="0"/>
+            <a:endParaRPr lang="en-US" sz="1000" dirty="0"/>
           </a:p>
         </p:txBody>
       </p:sp>
@@ -4587,8 +4545,8 @@
         </p:nvSpPr>
         <p:spPr>
           <a:xfrm>
-            <a:off x="6418068" y="3731717"/>
-            <a:ext cx="246888" cy="246888"/>
+            <a:off x="6863765" y="4296894"/>
+            <a:ext cx="228600" cy="228600"/>
           </a:xfrm>
           <a:prstGeom prst="ellipse">
             <a:avLst/>
@@ -4610,7 +4568,7 @@
               <a:buNone/>
             </a:pPr>
             <a:r>
-              <a:rPr lang="en-US" sz="1050" b="1" dirty="0">
+              <a:rPr lang="en-US" sz="1000" b="1" dirty="0">
                 <a:solidFill>
                   <a:srgbClr val="FFFFFF"/>
                 </a:solidFill>
@@ -4620,7 +4578,7 @@
               </a:rPr>
               <a:t>2</a:t>
             </a:r>
-            <a:endParaRPr lang="en-US" sz="1050" dirty="0"/>
+            <a:endParaRPr lang="en-US" sz="1000" dirty="0"/>
           </a:p>
         </p:txBody>
       </p:sp>
@@ -4632,8 +4590,8 @@
         </p:nvSpPr>
         <p:spPr>
           <a:xfrm>
-            <a:off x="4691072" y="2577360"/>
-            <a:ext cx="246888" cy="246888"/>
+            <a:off x="4136670" y="3458584"/>
+            <a:ext cx="228600" cy="228600"/>
           </a:xfrm>
           <a:prstGeom prst="ellipse">
             <a:avLst/>
@@ -4655,7 +4613,7 @@
               <a:buNone/>
             </a:pPr>
             <a:r>
-              <a:rPr lang="en-US" sz="1050" b="1" dirty="0">
+              <a:rPr lang="en-US" sz="1000" b="1" dirty="0">
                 <a:solidFill>
                   <a:srgbClr val="FFFFFF"/>
                 </a:solidFill>
@@ -4665,7 +4623,7 @@
               </a:rPr>
               <a:t>3</a:t>
             </a:r>
-            <a:endParaRPr lang="en-US" sz="1050" dirty="0"/>
+            <a:endParaRPr lang="en-US" sz="1000" dirty="0"/>
           </a:p>
         </p:txBody>
       </p:sp>
@@ -4677,8 +4635,8 @@
         </p:nvSpPr>
         <p:spPr>
           <a:xfrm>
-            <a:off x="3968272" y="5124985"/>
-            <a:ext cx="246888" cy="246888"/>
+            <a:off x="3369353" y="5533519"/>
+            <a:ext cx="228600" cy="228600"/>
           </a:xfrm>
           <a:prstGeom prst="ellipse">
             <a:avLst/>
@@ -4700,7 +4658,7 @@
               <a:buNone/>
             </a:pPr>
             <a:r>
-              <a:rPr lang="en-US" sz="1050" b="1" dirty="0">
+              <a:rPr lang="en-US" sz="1000" b="1" dirty="0">
                 <a:solidFill>
                   <a:srgbClr val="FFFFFF"/>
                 </a:solidFill>
@@ -4710,7 +4668,7 @@
               </a:rPr>
               <a:t>4</a:t>
             </a:r>
-            <a:endParaRPr lang="en-US" sz="1050" dirty="0"/>
+            <a:endParaRPr lang="en-US" sz="1000" dirty="0"/>
           </a:p>
         </p:txBody>
       </p:sp>
@@ -4722,8 +4680,8 @@
         </p:nvSpPr>
         <p:spPr>
           <a:xfrm>
-            <a:off x="502920" y="502920"/>
-            <a:ext cx="3132883" cy="237744"/>
+            <a:off x="502920" y="457200"/>
+            <a:ext cx="5410048" cy="237744"/>
           </a:xfrm>
           <a:prstGeom prst="rect">
             <a:avLst/>
@@ -4761,8 +4719,8 @@
         </p:nvSpPr>
         <p:spPr>
           <a:xfrm>
-            <a:off x="502920" y="786384"/>
-            <a:ext cx="3132883" cy="822960"/>
+            <a:off x="502920" y="731520"/>
+            <a:ext cx="5410048" cy="457200"/>
           </a:xfrm>
           <a:prstGeom prst="rect">
             <a:avLst/>
@@ -4800,8 +4758,8 @@
         </p:nvSpPr>
         <p:spPr>
           <a:xfrm>
-            <a:off x="502920" y="1664208"/>
-            <a:ext cx="3132883" cy="960120"/>
+            <a:off x="502920" y="1225296"/>
+            <a:ext cx="5410048" cy="585216"/>
           </a:xfrm>
           <a:prstGeom prst="rect">
             <a:avLst/>
@@ -4839,8 +4797,8 @@
         </p:nvSpPr>
         <p:spPr>
           <a:xfrm>
-            <a:off x="507492" y="2802636"/>
-            <a:ext cx="246888" cy="246888"/>
+            <a:off x="502920" y="2261286"/>
+            <a:ext cx="228600" cy="228600"/>
           </a:xfrm>
           <a:prstGeom prst="ellipse">
             <a:avLst/>
@@ -4862,7 +4820,7 @@
               <a:buNone/>
             </a:pPr>
             <a:r>
-              <a:rPr lang="en-US" sz="1050" b="1" dirty="0">
+              <a:rPr lang="en-US" sz="1000" b="1" dirty="0">
                 <a:solidFill>
                   <a:srgbClr val="FFFFFF"/>
                 </a:solidFill>
@@ -4872,7 +4830,7 @@
               </a:rPr>
               <a:t>1</a:t>
             </a:r>
-            <a:endParaRPr lang="en-US" sz="1050" dirty="0"/>
+            <a:endParaRPr lang="en-US" sz="1000" dirty="0"/>
           </a:p>
         </p:txBody>
       </p:sp>
@@ -4884,8 +4842,8 @@
         </p:nvSpPr>
         <p:spPr>
           <a:xfrm>
-            <a:off x="886968" y="2807208"/>
-            <a:ext cx="2748835" cy="818388"/>
+            <a:off x="832104" y="2265858"/>
+            <a:ext cx="1728216" cy="961726"/>
           </a:xfrm>
           <a:prstGeom prst="rect">
             <a:avLst/>
@@ -4904,7 +4862,7 @@
               <a:buNone/>
             </a:pPr>
             <a:r>
-              <a:rPr lang="en-US" sz="1350" b="1" dirty="0">
+              <a:rPr lang="en-US" sz="1300" b="1" dirty="0">
                 <a:solidFill>
                   <a:srgbClr val="0D1411"/>
                 </a:solidFill>
@@ -4914,17 +4872,14 @@
               </a:rPr>
               <a:t>All trees, counted</a:t>
             </a:r>
-            <a:endParaRPr lang="en-US" sz="1350" dirty="0"/>
-          </a:p>
-          <a:p>
-            <a:pPr indent="0" marL="0">
-              <a:spcAft>
-                <a:spcPts val="200"/>
-              </a:spcAft>
-              <a:buNone/>
-            </a:pPr>
-            <a:r>
-              <a:rPr lang="en-US" sz="1200" dirty="0">
+            <a:endParaRPr lang="en-US" sz="1300" dirty="0"/>
+          </a:p>
+          <a:p>
+            <a:pPr indent="0" marL="0">
+              <a:buNone/>
+            </a:pPr>
+            <a:r>
+              <a:rPr lang="en-US" sz="1150" dirty="0">
                 <a:solidFill>
                   <a:srgbClr val="4A5852"/>
                 </a:solidFill>
@@ -4934,7 +4889,7 @@
               </a:rPr>
               <a:t>Date palms, fruit trees and forest trees.</a:t>
             </a:r>
-            <a:endParaRPr lang="en-US" sz="1350" dirty="0"/>
+            <a:endParaRPr lang="en-US" sz="1300" dirty="0"/>
           </a:p>
         </p:txBody>
       </p:sp>
@@ -4946,8 +4901,8 @@
         </p:nvSpPr>
         <p:spPr>
           <a:xfrm>
-            <a:off x="507492" y="3694176"/>
-            <a:ext cx="246888" cy="246888"/>
+            <a:off x="502920" y="3296165"/>
+            <a:ext cx="228600" cy="228600"/>
           </a:xfrm>
           <a:prstGeom prst="ellipse">
             <a:avLst/>
@@ -4969,7 +4924,7 @@
               <a:buNone/>
             </a:pPr>
             <a:r>
-              <a:rPr lang="en-US" sz="1050" b="1" dirty="0">
+              <a:rPr lang="en-US" sz="1000" b="1" dirty="0">
                 <a:solidFill>
                   <a:srgbClr val="FFFFFF"/>
                 </a:solidFill>
@@ -4979,7 +4934,7 @@
               </a:rPr>
               <a:t>2</a:t>
             </a:r>
-            <a:endParaRPr lang="en-US" sz="1050" dirty="0"/>
+            <a:endParaRPr lang="en-US" sz="1000" dirty="0"/>
           </a:p>
         </p:txBody>
       </p:sp>
@@ -4991,8 +4946,8 @@
         </p:nvSpPr>
         <p:spPr>
           <a:xfrm>
-            <a:off x="886968" y="3698748"/>
-            <a:ext cx="2748835" cy="818388"/>
+            <a:off x="832104" y="3300737"/>
+            <a:ext cx="1728216" cy="961726"/>
           </a:xfrm>
           <a:prstGeom prst="rect">
             <a:avLst/>
@@ -5011,7 +4966,7 @@
               <a:buNone/>
             </a:pPr>
             <a:r>
-              <a:rPr lang="en-US" sz="1350" b="1" dirty="0">
+              <a:rPr lang="en-US" sz="1300" b="1" dirty="0">
                 <a:solidFill>
                   <a:srgbClr val="0D1411"/>
                 </a:solidFill>
@@ -5021,17 +4976,14 @@
               </a:rPr>
               <a:t>One dot, one tree</a:t>
             </a:r>
-            <a:endParaRPr lang="en-US" sz="1350" dirty="0"/>
-          </a:p>
-          <a:p>
-            <a:pPr indent="0" marL="0">
-              <a:spcAft>
-                <a:spcPts val="200"/>
-              </a:spcAft>
-              <a:buNone/>
-            </a:pPr>
-            <a:r>
-              <a:rPr lang="en-US" sz="1200" dirty="0">
+            <a:endParaRPr lang="en-US" sz="1300" dirty="0"/>
+          </a:p>
+          <a:p>
+            <a:pPr indent="0" marL="0">
+              <a:buNone/>
+            </a:pPr>
+            <a:r>
+              <a:rPr lang="en-US" sz="1150" dirty="0">
                 <a:solidFill>
                   <a:srgbClr val="4A5852"/>
                 </a:solidFill>
@@ -5039,9 +4991,9 @@
                 <a:ea typeface="Calibri" pitchFamily="34" charset="-122"/>
                 <a:cs typeface="Calibri" pitchFamily="34" charset="-120"/>
               </a:rPr>
-              <a:t>Zoom in to a farm. The colour of the dot is the variety.</a:t>
-            </a:r>
-            <a:endParaRPr lang="en-US" sz="1350" dirty="0"/>
+              <a:t>Zoom in to a farm. The colour of a dot is its variety.</a:t>
+            </a:r>
+            <a:endParaRPr lang="en-US" sz="1300" dirty="0"/>
           </a:p>
         </p:txBody>
       </p:sp>
@@ -5053,8 +5005,8 @@
         </p:nvSpPr>
         <p:spPr>
           <a:xfrm>
-            <a:off x="507492" y="4585716"/>
-            <a:ext cx="246888" cy="246888"/>
+            <a:off x="502920" y="4331043"/>
+            <a:ext cx="228600" cy="228600"/>
           </a:xfrm>
           <a:prstGeom prst="ellipse">
             <a:avLst/>
@@ -5076,7 +5028,7 @@
               <a:buNone/>
             </a:pPr>
             <a:r>
-              <a:rPr lang="en-US" sz="1050" b="1" dirty="0">
+              <a:rPr lang="en-US" sz="1000" b="1" dirty="0">
                 <a:solidFill>
                   <a:srgbClr val="FFFFFF"/>
                 </a:solidFill>
@@ -5086,7 +5038,7 @@
               </a:rPr>
               <a:t>3</a:t>
             </a:r>
-            <a:endParaRPr lang="en-US" sz="1050" dirty="0"/>
+            <a:endParaRPr lang="en-US" sz="1000" dirty="0"/>
           </a:p>
         </p:txBody>
       </p:sp>
@@ -5098,8 +5050,8 @@
         </p:nvSpPr>
         <p:spPr>
           <a:xfrm>
-            <a:off x="886968" y="4590288"/>
-            <a:ext cx="2748835" cy="818388"/>
+            <a:off x="832104" y="4335615"/>
+            <a:ext cx="1728216" cy="961726"/>
           </a:xfrm>
           <a:prstGeom prst="rect">
             <a:avLst/>
@@ -5118,7 +5070,7 @@
               <a:buNone/>
             </a:pPr>
             <a:r>
-              <a:rPr lang="en-US" sz="1350" b="1" dirty="0">
+              <a:rPr lang="en-US" sz="1300" b="1" dirty="0">
                 <a:solidFill>
                   <a:srgbClr val="0D1411"/>
                 </a:solidFill>
@@ -5128,17 +5080,14 @@
               </a:rPr>
               <a:t>Which variety</a:t>
             </a:r>
-            <a:endParaRPr lang="en-US" sz="1350" dirty="0"/>
-          </a:p>
-          <a:p>
-            <a:pPr indent="0" marL="0">
-              <a:spcAft>
-                <a:spcPts val="200"/>
-              </a:spcAft>
-              <a:buNone/>
-            </a:pPr>
-            <a:r>
-              <a:rPr lang="en-US" sz="1200" dirty="0">
+            <a:endParaRPr lang="en-US" sz="1300" dirty="0"/>
+          </a:p>
+          <a:p>
+            <a:pPr indent="0" marL="0">
+              <a:buNone/>
+            </a:pPr>
+            <a:r>
+              <a:rPr lang="en-US" sz="1150" dirty="0">
                 <a:solidFill>
                   <a:srgbClr val="4A5852"/>
                 </a:solidFill>
@@ -5148,7 +5097,7 @@
               </a:rPr>
               <a:t>Each colour is one variety of palm or fruit tree.</a:t>
             </a:r>
-            <a:endParaRPr lang="en-US" sz="1350" dirty="0"/>
+            <a:endParaRPr lang="en-US" sz="1300" dirty="0"/>
           </a:p>
         </p:txBody>
       </p:sp>
@@ -5160,8 +5109,8 @@
         </p:nvSpPr>
         <p:spPr>
           <a:xfrm>
-            <a:off x="507492" y="5477256"/>
-            <a:ext cx="246888" cy="246888"/>
+            <a:off x="502920" y="5365922"/>
+            <a:ext cx="228600" cy="228600"/>
           </a:xfrm>
           <a:prstGeom prst="ellipse">
             <a:avLst/>
@@ -5183,7 +5132,7 @@
               <a:buNone/>
             </a:pPr>
             <a:r>
-              <a:rPr lang="en-US" sz="1050" b="1" dirty="0">
+              <a:rPr lang="en-US" sz="1000" b="1" dirty="0">
                 <a:solidFill>
                   <a:srgbClr val="FFFFFF"/>
                 </a:solidFill>
@@ -5193,7 +5142,7 @@
               </a:rPr>
               <a:t>4</a:t>
             </a:r>
-            <a:endParaRPr lang="en-US" sz="1050" dirty="0"/>
+            <a:endParaRPr lang="en-US" sz="1000" dirty="0"/>
           </a:p>
         </p:txBody>
       </p:sp>
@@ -5205,8 +5154,8 @@
         </p:nvSpPr>
         <p:spPr>
           <a:xfrm>
-            <a:off x="886968" y="5481828"/>
-            <a:ext cx="2748835" cy="818388"/>
+            <a:off x="832104" y="5370494"/>
+            <a:ext cx="1728216" cy="961726"/>
           </a:xfrm>
           <a:prstGeom prst="rect">
             <a:avLst/>
@@ -5225,7 +5174,7 @@
               <a:buNone/>
             </a:pPr>
             <a:r>
-              <a:rPr lang="en-US" sz="1350" b="1" dirty="0">
+              <a:rPr lang="en-US" sz="1300" b="1" dirty="0">
                 <a:solidFill>
                   <a:srgbClr val="0D1411"/>
                 </a:solidFill>
@@ -5235,17 +5184,14 @@
               </a:rPr>
               <a:t>Land under trees</a:t>
             </a:r>
-            <a:endParaRPr lang="en-US" sz="1350" dirty="0"/>
-          </a:p>
-          <a:p>
-            <a:pPr indent="0" marL="0">
-              <a:spcAft>
-                <a:spcPts val="200"/>
-              </a:spcAft>
-              <a:buNone/>
-            </a:pPr>
-            <a:r>
-              <a:rPr lang="en-US" sz="1200" dirty="0">
+            <a:endParaRPr lang="en-US" sz="1300" dirty="0"/>
+          </a:p>
+          <a:p>
+            <a:pPr indent="0" marL="0">
+              <a:buNone/>
+            </a:pPr>
+            <a:r>
+              <a:rPr lang="en-US" sz="1150" dirty="0">
                 <a:solidFill>
                   <a:srgbClr val="4A5852"/>
                 </a:solidFill>
@@ -5255,7 +5201,7 @@
               </a:rPr>
               <a:t>Dunums of palms, fruit trees and forest trees.</a:t>
             </a:r>
-            <a:endParaRPr lang="en-US" sz="1350" dirty="0"/>
+            <a:endParaRPr lang="en-US" sz="1300" dirty="0"/>
           </a:p>
         </p:txBody>
       </p:sp>
@@ -5267,8 +5213,8 @@
         </p:nvSpPr>
         <p:spPr>
           <a:xfrm>
-            <a:off x="8555892" y="502920"/>
-            <a:ext cx="3132883" cy="237744"/>
+            <a:off x="6278728" y="457200"/>
+            <a:ext cx="5410048" cy="237744"/>
           </a:xfrm>
           <a:prstGeom prst="rect">
             <a:avLst/>
@@ -5306,8 +5252,8 @@
         </p:nvSpPr>
         <p:spPr>
           <a:xfrm>
-            <a:off x="8555892" y="786384"/>
-            <a:ext cx="3132883" cy="822960"/>
+            <a:off x="6278728" y="731520"/>
+            <a:ext cx="5410048" cy="457200"/>
           </a:xfrm>
           <a:prstGeom prst="rect">
             <a:avLst/>
@@ -5345,8 +5291,8 @@
         </p:nvSpPr>
         <p:spPr>
           <a:xfrm>
-            <a:off x="8555892" y="1664208"/>
-            <a:ext cx="3132883" cy="960120"/>
+            <a:off x="6278728" y="1225296"/>
+            <a:ext cx="5410048" cy="585216"/>
           </a:xfrm>
           <a:prstGeom prst="rect">
             <a:avLst/>
@@ -5384,8 +5330,8 @@
         </p:nvSpPr>
         <p:spPr>
           <a:xfrm>
-            <a:off x="8560464" y="2802636"/>
-            <a:ext cx="246888" cy="246888"/>
+            <a:off x="9631375" y="2261286"/>
+            <a:ext cx="228600" cy="228600"/>
           </a:xfrm>
           <a:prstGeom prst="ellipse">
             <a:avLst/>
@@ -5407,7 +5353,7 @@
               <a:buNone/>
             </a:pPr>
             <a:r>
-              <a:rPr lang="en-US" sz="1050" b="1" dirty="0">
+              <a:rPr lang="en-US" sz="1000" b="1" dirty="0">
                 <a:solidFill>
                   <a:srgbClr val="FFFFFF"/>
                 </a:solidFill>
@@ -5417,7 +5363,7 @@
               </a:rPr>
               <a:t>1</a:t>
             </a:r>
-            <a:endParaRPr lang="en-US" sz="1050" dirty="0"/>
+            <a:endParaRPr lang="en-US" sz="1000" dirty="0"/>
           </a:p>
         </p:txBody>
       </p:sp>
@@ -5429,8 +5375,8 @@
         </p:nvSpPr>
         <p:spPr>
           <a:xfrm>
-            <a:off x="8939940" y="2807208"/>
-            <a:ext cx="2748835" cy="818388"/>
+            <a:off x="9960559" y="2265858"/>
+            <a:ext cx="1728216" cy="961726"/>
           </a:xfrm>
           <a:prstGeom prst="rect">
             <a:avLst/>
@@ -5449,7 +5395,7 @@
               <a:buNone/>
             </a:pPr>
             <a:r>
-              <a:rPr lang="en-US" sz="1350" b="1" dirty="0">
+              <a:rPr lang="en-US" sz="1300" b="1" dirty="0">
                 <a:solidFill>
                   <a:srgbClr val="0D1411"/>
                 </a:solidFill>
@@ -5459,17 +5405,14 @@
               </a:rPr>
               <a:t>Bütün ağaclar sayılır</a:t>
             </a:r>
-            <a:endParaRPr lang="en-US" sz="1350" dirty="0"/>
-          </a:p>
-          <a:p>
-            <a:pPr indent="0" marL="0">
-              <a:spcAft>
-                <a:spcPts val="200"/>
-              </a:spcAft>
-              <a:buNone/>
-            </a:pPr>
-            <a:r>
-              <a:rPr lang="en-US" sz="1200" dirty="0">
+            <a:endParaRPr lang="en-US" sz="1300" dirty="0"/>
+          </a:p>
+          <a:p>
+            <a:pPr indent="0" marL="0">
+              <a:buNone/>
+            </a:pPr>
+            <a:r>
+              <a:rPr lang="en-US" sz="1150" dirty="0">
                 <a:solidFill>
                   <a:srgbClr val="4A5852"/>
                 </a:solidFill>
@@ -5477,9 +5420,9 @@
                 <a:ea typeface="Calibri" pitchFamily="34" charset="-122"/>
                 <a:cs typeface="Calibri" pitchFamily="34" charset="-120"/>
               </a:rPr>
-              <a:t>Xurma palmaları, meyvə ağacları və meşə ağacları.</a:t>
-            </a:r>
-            <a:endParaRPr lang="en-US" sz="1350" dirty="0"/>
+              <a:t>Xurma palmaları, meyvə və meşə ağacları.</a:t>
+            </a:r>
+            <a:endParaRPr lang="en-US" sz="1300" dirty="0"/>
           </a:p>
         </p:txBody>
       </p:sp>
@@ -5491,8 +5434,8 @@
         </p:nvSpPr>
         <p:spPr>
           <a:xfrm>
-            <a:off x="8560464" y="3694176"/>
-            <a:ext cx="246888" cy="246888"/>
+            <a:off x="9631375" y="3296165"/>
+            <a:ext cx="228600" cy="228600"/>
           </a:xfrm>
           <a:prstGeom prst="ellipse">
             <a:avLst/>
@@ -5514,7 +5457,7 @@
               <a:buNone/>
             </a:pPr>
             <a:r>
-              <a:rPr lang="en-US" sz="1050" b="1" dirty="0">
+              <a:rPr lang="en-US" sz="1000" b="1" dirty="0">
                 <a:solidFill>
                   <a:srgbClr val="FFFFFF"/>
                 </a:solidFill>
@@ -5524,7 +5467,7 @@
               </a:rPr>
               <a:t>2</a:t>
             </a:r>
-            <a:endParaRPr lang="en-US" sz="1050" dirty="0"/>
+            <a:endParaRPr lang="en-US" sz="1000" dirty="0"/>
           </a:p>
         </p:txBody>
       </p:sp>
@@ -5536,8 +5479,8 @@
         </p:nvSpPr>
         <p:spPr>
           <a:xfrm>
-            <a:off x="8939940" y="3698748"/>
-            <a:ext cx="2748835" cy="818388"/>
+            <a:off x="9960559" y="3300737"/>
+            <a:ext cx="1728216" cy="961726"/>
           </a:xfrm>
           <a:prstGeom prst="rect">
             <a:avLst/>
@@ -5556,7 +5499,7 @@
               <a:buNone/>
             </a:pPr>
             <a:r>
-              <a:rPr lang="en-US" sz="1350" b="1" dirty="0">
+              <a:rPr lang="en-US" sz="1300" b="1" dirty="0">
                 <a:solidFill>
                   <a:srgbClr val="0D1411"/>
                 </a:solidFill>
@@ -5566,17 +5509,14 @@
               </a:rPr>
               <a:t>Bir nöqtə, bir ağac</a:t>
             </a:r>
-            <a:endParaRPr lang="en-US" sz="1350" dirty="0"/>
-          </a:p>
-          <a:p>
-            <a:pPr indent="0" marL="0">
-              <a:spcAft>
-                <a:spcPts val="200"/>
-              </a:spcAft>
-              <a:buNone/>
-            </a:pPr>
-            <a:r>
-              <a:rPr lang="en-US" sz="1200" dirty="0">
+            <a:endParaRPr lang="en-US" sz="1300" dirty="0"/>
+          </a:p>
+          <a:p>
+            <a:pPr indent="0" marL="0">
+              <a:buNone/>
+            </a:pPr>
+            <a:r>
+              <a:rPr lang="en-US" sz="1150" dirty="0">
                 <a:solidFill>
                   <a:srgbClr val="4A5852"/>
                 </a:solidFill>
@@ -5586,7 +5526,7 @@
               </a:rPr>
               <a:t>Təsərrüfata yaxınlaşın. Nöqtənin rəngi sortu göstərir.</a:t>
             </a:r>
-            <a:endParaRPr lang="en-US" sz="1350" dirty="0"/>
+            <a:endParaRPr lang="en-US" sz="1300" dirty="0"/>
           </a:p>
         </p:txBody>
       </p:sp>
@@ -5598,8 +5538,8 @@
         </p:nvSpPr>
         <p:spPr>
           <a:xfrm>
-            <a:off x="8560464" y="4585716"/>
-            <a:ext cx="246888" cy="246888"/>
+            <a:off x="9631375" y="4331043"/>
+            <a:ext cx="228600" cy="228600"/>
           </a:xfrm>
           <a:prstGeom prst="ellipse">
             <a:avLst/>
@@ -5621,7 +5561,7 @@
               <a:buNone/>
             </a:pPr>
             <a:r>
-              <a:rPr lang="en-US" sz="1050" b="1" dirty="0">
+              <a:rPr lang="en-US" sz="1000" b="1" dirty="0">
                 <a:solidFill>
                   <a:srgbClr val="FFFFFF"/>
                 </a:solidFill>
@@ -5631,7 +5571,7 @@
               </a:rPr>
               <a:t>3</a:t>
             </a:r>
-            <a:endParaRPr lang="en-US" sz="1050" dirty="0"/>
+            <a:endParaRPr lang="en-US" sz="1000" dirty="0"/>
           </a:p>
         </p:txBody>
       </p:sp>
@@ -5643,8 +5583,8 @@
         </p:nvSpPr>
         <p:spPr>
           <a:xfrm>
-            <a:off x="8939940" y="4590288"/>
-            <a:ext cx="2748835" cy="818388"/>
+            <a:off x="9960559" y="4335615"/>
+            <a:ext cx="1728216" cy="961726"/>
           </a:xfrm>
           <a:prstGeom prst="rect">
             <a:avLst/>
@@ -5663,7 +5603,7 @@
               <a:buNone/>
             </a:pPr>
             <a:r>
-              <a:rPr lang="en-US" sz="1350" b="1" dirty="0">
+              <a:rPr lang="en-US" sz="1300" b="1" dirty="0">
                 <a:solidFill>
                   <a:srgbClr val="0D1411"/>
                 </a:solidFill>
@@ -5673,17 +5613,14 @@
               </a:rPr>
               <a:t>Hansı sort</a:t>
             </a:r>
-            <a:endParaRPr lang="en-US" sz="1350" dirty="0"/>
-          </a:p>
-          <a:p>
-            <a:pPr indent="0" marL="0">
-              <a:spcAft>
-                <a:spcPts val="200"/>
-              </a:spcAft>
-              <a:buNone/>
-            </a:pPr>
-            <a:r>
-              <a:rPr lang="en-US" sz="1200" dirty="0">
+            <a:endParaRPr lang="en-US" sz="1300" dirty="0"/>
+          </a:p>
+          <a:p>
+            <a:pPr indent="0" marL="0">
+              <a:buNone/>
+            </a:pPr>
+            <a:r>
+              <a:rPr lang="en-US" sz="1150" dirty="0">
                 <a:solidFill>
                   <a:srgbClr val="4A5852"/>
                 </a:solidFill>
@@ -5693,7 +5630,7 @@
               </a:rPr>
               <a:t>Hər rəng bir xurma və ya meyvə ağacı sortudur.</a:t>
             </a:r>
-            <a:endParaRPr lang="en-US" sz="1350" dirty="0"/>
+            <a:endParaRPr lang="en-US" sz="1300" dirty="0"/>
           </a:p>
         </p:txBody>
       </p:sp>
@@ -5705,8 +5642,8 @@
         </p:nvSpPr>
         <p:spPr>
           <a:xfrm>
-            <a:off x="8560464" y="5477256"/>
-            <a:ext cx="246888" cy="246888"/>
+            <a:off x="9631375" y="5365922"/>
+            <a:ext cx="228600" cy="228600"/>
           </a:xfrm>
           <a:prstGeom prst="ellipse">
             <a:avLst/>
@@ -5728,7 +5665,7 @@
               <a:buNone/>
             </a:pPr>
             <a:r>
-              <a:rPr lang="en-US" sz="1050" b="1" dirty="0">
+              <a:rPr lang="en-US" sz="1000" b="1" dirty="0">
                 <a:solidFill>
                   <a:srgbClr val="FFFFFF"/>
                 </a:solidFill>
@@ -5738,7 +5675,7 @@
               </a:rPr>
               <a:t>4</a:t>
             </a:r>
-            <a:endParaRPr lang="en-US" sz="1050" dirty="0"/>
+            <a:endParaRPr lang="en-US" sz="1000" dirty="0"/>
           </a:p>
         </p:txBody>
       </p:sp>
@@ -5750,8 +5687,8 @@
         </p:nvSpPr>
         <p:spPr>
           <a:xfrm>
-            <a:off x="8939940" y="5481828"/>
-            <a:ext cx="2748835" cy="818388"/>
+            <a:off x="9960559" y="5370494"/>
+            <a:ext cx="1728216" cy="961726"/>
           </a:xfrm>
           <a:prstGeom prst="rect">
             <a:avLst/>
@@ -5770,7 +5707,7 @@
               <a:buNone/>
             </a:pPr>
             <a:r>
-              <a:rPr lang="en-US" sz="1350" b="1" dirty="0">
+              <a:rPr lang="en-US" sz="1300" b="1" dirty="0">
                 <a:solidFill>
                   <a:srgbClr val="0D1411"/>
                 </a:solidFill>
@@ -5780,17 +5717,14 @@
               </a:rPr>
               <a:t>Ağacların torpağı</a:t>
             </a:r>
-            <a:endParaRPr lang="en-US" sz="1350" dirty="0"/>
-          </a:p>
-          <a:p>
-            <a:pPr indent="0" marL="0">
-              <a:spcAft>
-                <a:spcPts val="200"/>
-              </a:spcAft>
-              <a:buNone/>
-            </a:pPr>
-            <a:r>
-              <a:rPr lang="en-US" sz="1200" dirty="0">
+            <a:endParaRPr lang="en-US" sz="1300" dirty="0"/>
+          </a:p>
+          <a:p>
+            <a:pPr indent="0" marL="0">
+              <a:buNone/>
+            </a:pPr>
+            <a:r>
+              <a:rPr lang="en-US" sz="1150" dirty="0">
                 <a:solidFill>
                   <a:srgbClr val="4A5852"/>
                 </a:solidFill>
@@ -5800,7 +5734,7 @@
               </a:rPr>
               <a:t>Xurma, meyvə və meşə ağaclarının dönümü.</a:t>
             </a:r>
-            <a:endParaRPr lang="en-US" sz="1350" dirty="0"/>
+            <a:endParaRPr lang="en-US" sz="1300" dirty="0"/>
           </a:p>
         </p:txBody>
       </p:sp>
@@ -5891,8 +5825,8 @@
         </p:blipFill>
         <p:spPr>
           <a:xfrm>
-            <a:off x="3955843" y="411480"/>
-            <a:ext cx="4280010" cy="6035040"/>
+            <a:off x="2788920" y="2168655"/>
+            <a:ext cx="6613855" cy="4029450"/>
           </a:xfrm>
           <a:prstGeom prst="rect">
             <a:avLst/>
@@ -5907,8 +5841,8 @@
         </p:nvSpPr>
         <p:spPr>
           <a:xfrm>
-            <a:off x="3968272" y="1539734"/>
-            <a:ext cx="246888" cy="246888"/>
+            <a:off x="3775048" y="3055928"/>
+            <a:ext cx="228600" cy="228600"/>
           </a:xfrm>
           <a:prstGeom prst="ellipse">
             <a:avLst/>
@@ -5930,7 +5864,7 @@
               <a:buNone/>
             </a:pPr>
             <a:r>
-              <a:rPr lang="en-US" sz="1050" b="1" dirty="0">
+              <a:rPr lang="en-US" sz="1000" b="1" dirty="0">
                 <a:solidFill>
                   <a:srgbClr val="FFFFFF"/>
                 </a:solidFill>
@@ -5940,7 +5874,7 @@
               </a:rPr>
               <a:t>1</a:t>
             </a:r>
-            <a:endParaRPr lang="en-US" sz="1050" dirty="0"/>
+            <a:endParaRPr lang="en-US" sz="1000" dirty="0"/>
           </a:p>
         </p:txBody>
       </p:sp>
@@ -5952,8 +5886,8 @@
         </p:nvSpPr>
         <p:spPr>
           <a:xfrm>
-            <a:off x="3968272" y="2010160"/>
-            <a:ext cx="246888" cy="246888"/>
+            <a:off x="5859275" y="3264058"/>
+            <a:ext cx="228600" cy="228600"/>
           </a:xfrm>
           <a:prstGeom prst="ellipse">
             <a:avLst/>
@@ -5975,7 +5909,7 @@
               <a:buNone/>
             </a:pPr>
             <a:r>
-              <a:rPr lang="en-US" sz="1050" b="1" dirty="0">
+              <a:rPr lang="en-US" sz="1000" b="1" dirty="0">
                 <a:solidFill>
                   <a:srgbClr val="FFFFFF"/>
                 </a:solidFill>
@@ -5985,7 +5919,7 @@
               </a:rPr>
               <a:t>2</a:t>
             </a:r>
-            <a:endParaRPr lang="en-US" sz="1050" dirty="0"/>
+            <a:endParaRPr lang="en-US" sz="1000" dirty="0"/>
           </a:p>
         </p:txBody>
       </p:sp>
@@ -5997,8 +5931,8 @@
         </p:nvSpPr>
         <p:spPr>
           <a:xfrm>
-            <a:off x="3968272" y="2523931"/>
-            <a:ext cx="246888" cy="246888"/>
+            <a:off x="3369353" y="3716793"/>
+            <a:ext cx="228600" cy="228600"/>
           </a:xfrm>
           <a:prstGeom prst="ellipse">
             <a:avLst/>
@@ -6020,7 +5954,7 @@
               <a:buNone/>
             </a:pPr>
             <a:r>
-              <a:rPr lang="en-US" sz="1050" b="1" dirty="0">
+              <a:rPr lang="en-US" sz="1000" b="1" dirty="0">
                 <a:solidFill>
                   <a:srgbClr val="FFFFFF"/>
                 </a:solidFill>
@@ -6030,7 +5964,7 @@
               </a:rPr>
               <a:t>3</a:t>
             </a:r>
-            <a:endParaRPr lang="en-US" sz="1050" dirty="0"/>
+            <a:endParaRPr lang="en-US" sz="1000" dirty="0"/>
           </a:p>
         </p:txBody>
       </p:sp>
@@ -6042,8 +5976,8 @@
         </p:nvSpPr>
         <p:spPr>
           <a:xfrm>
-            <a:off x="4070177" y="5267722"/>
-            <a:ext cx="246888" cy="246888"/>
+            <a:off x="3471247" y="4920533"/>
+            <a:ext cx="228600" cy="228600"/>
           </a:xfrm>
           <a:prstGeom prst="ellipse">
             <a:avLst/>
@@ -6065,7 +5999,7 @@
               <a:buNone/>
             </a:pPr>
             <a:r>
-              <a:rPr lang="en-US" sz="1050" b="1" dirty="0">
+              <a:rPr lang="en-US" sz="1000" b="1" dirty="0">
                 <a:solidFill>
                   <a:srgbClr val="FFFFFF"/>
                 </a:solidFill>
@@ -6075,7 +6009,7 @@
               </a:rPr>
               <a:t>4</a:t>
             </a:r>
-            <a:endParaRPr lang="en-US" sz="1050" dirty="0"/>
+            <a:endParaRPr lang="en-US" sz="1000" dirty="0"/>
           </a:p>
         </p:txBody>
       </p:sp>
@@ -6087,8 +6021,8 @@
         </p:nvSpPr>
         <p:spPr>
           <a:xfrm>
-            <a:off x="502920" y="502920"/>
-            <a:ext cx="3132883" cy="237744"/>
+            <a:off x="502920" y="457200"/>
+            <a:ext cx="5410048" cy="237744"/>
           </a:xfrm>
           <a:prstGeom prst="rect">
             <a:avLst/>
@@ -6126,8 +6060,8 @@
         </p:nvSpPr>
         <p:spPr>
           <a:xfrm>
-            <a:off x="502920" y="786384"/>
-            <a:ext cx="3132883" cy="822960"/>
+            <a:off x="502920" y="731520"/>
+            <a:ext cx="5410048" cy="457200"/>
           </a:xfrm>
           <a:prstGeom prst="rect">
             <a:avLst/>
@@ -6165,8 +6099,8 @@
         </p:nvSpPr>
         <p:spPr>
           <a:xfrm>
-            <a:off x="502920" y="1664208"/>
-            <a:ext cx="3132883" cy="960120"/>
+            <a:off x="502920" y="1225296"/>
+            <a:ext cx="5410048" cy="585216"/>
           </a:xfrm>
           <a:prstGeom prst="rect">
             <a:avLst/>
@@ -6204,8 +6138,8 @@
         </p:nvSpPr>
         <p:spPr>
           <a:xfrm>
-            <a:off x="507492" y="2802636"/>
-            <a:ext cx="246888" cy="246888"/>
+            <a:off x="502920" y="2261286"/>
+            <a:ext cx="228600" cy="228600"/>
           </a:xfrm>
           <a:prstGeom prst="ellipse">
             <a:avLst/>
@@ -6227,7 +6161,7 @@
               <a:buNone/>
             </a:pPr>
             <a:r>
-              <a:rPr lang="en-US" sz="1050" b="1" dirty="0">
+              <a:rPr lang="en-US" sz="1000" b="1" dirty="0">
                 <a:solidFill>
                   <a:srgbClr val="FFFFFF"/>
                 </a:solidFill>
@@ -6237,7 +6171,7 @@
               </a:rPr>
               <a:t>1</a:t>
             </a:r>
-            <a:endParaRPr lang="en-US" sz="1050" dirty="0"/>
+            <a:endParaRPr lang="en-US" sz="1000" dirty="0"/>
           </a:p>
         </p:txBody>
       </p:sp>
@@ -6249,8 +6183,8 @@
         </p:nvSpPr>
         <p:spPr>
           <a:xfrm>
-            <a:off x="886968" y="2807208"/>
-            <a:ext cx="2748835" cy="818388"/>
+            <a:off x="832104" y="2265858"/>
+            <a:ext cx="1728216" cy="961726"/>
           </a:xfrm>
           <a:prstGeom prst="rect">
             <a:avLst/>
@@ -6269,7 +6203,7 @@
               <a:buNone/>
             </a:pPr>
             <a:r>
-              <a:rPr lang="en-US" sz="1350" b="1" dirty="0">
+              <a:rPr lang="en-US" sz="1300" b="1" dirty="0">
                 <a:solidFill>
                   <a:srgbClr val="0D1411"/>
                 </a:solidFill>
@@ -6279,17 +6213,14 @@
               </a:rPr>
               <a:t>A score from 0 to 100</a:t>
             </a:r>
-            <a:endParaRPr lang="en-US" sz="1350" dirty="0"/>
-          </a:p>
-          <a:p>
-            <a:pPr indent="0" marL="0">
-              <a:spcAft>
-                <a:spcPts val="200"/>
-              </a:spcAft>
-              <a:buNone/>
-            </a:pPr>
-            <a:r>
-              <a:rPr lang="en-US" sz="1200" dirty="0">
+            <a:endParaRPr lang="en-US" sz="1300" dirty="0"/>
+          </a:p>
+          <a:p>
+            <a:pPr indent="0" marL="0">
+              <a:buNone/>
+            </a:pPr>
+            <a:r>
+              <a:rPr lang="en-US" sz="1150" dirty="0">
                 <a:solidFill>
                   <a:srgbClr val="4A5852"/>
                 </a:solidFill>
@@ -6297,9 +6228,9 @@
                 <a:ea typeface="Calibri" pitchFamily="34" charset="-122"/>
                 <a:cs typeface="Calibri" pitchFamily="34" charset="-120"/>
               </a:rPr>
-              <a:t>For palms and for fruit trees. 80 or more is healthy.</a:t>
-            </a:r>
-            <a:endParaRPr lang="en-US" sz="1350" dirty="0"/>
+              <a:t>For palms and fruit trees. 80 or more is healthy.</a:t>
+            </a:r>
+            <a:endParaRPr lang="en-US" sz="1300" dirty="0"/>
           </a:p>
         </p:txBody>
       </p:sp>
@@ -6311,8 +6242,8 @@
         </p:nvSpPr>
         <p:spPr>
           <a:xfrm>
-            <a:off x="507492" y="3694176"/>
-            <a:ext cx="246888" cy="246888"/>
+            <a:off x="502920" y="3296165"/>
+            <a:ext cx="228600" cy="228600"/>
           </a:xfrm>
           <a:prstGeom prst="ellipse">
             <a:avLst/>
@@ -6334,7 +6265,7 @@
               <a:buNone/>
             </a:pPr>
             <a:r>
-              <a:rPr lang="en-US" sz="1050" b="1" dirty="0">
+              <a:rPr lang="en-US" sz="1000" b="1" dirty="0">
                 <a:solidFill>
                   <a:srgbClr val="FFFFFF"/>
                 </a:solidFill>
@@ -6344,7 +6275,7 @@
               </a:rPr>
               <a:t>2</a:t>
             </a:r>
-            <a:endParaRPr lang="en-US" sz="1050" dirty="0"/>
+            <a:endParaRPr lang="en-US" sz="1000" dirty="0"/>
           </a:p>
         </p:txBody>
       </p:sp>
@@ -6356,8 +6287,8 @@
         </p:nvSpPr>
         <p:spPr>
           <a:xfrm>
-            <a:off x="886968" y="3698748"/>
-            <a:ext cx="2748835" cy="818388"/>
+            <a:off x="832104" y="3300737"/>
+            <a:ext cx="1728216" cy="961726"/>
           </a:xfrm>
           <a:prstGeom prst="rect">
             <a:avLst/>
@@ -6376,7 +6307,7 @@
               <a:buNone/>
             </a:pPr>
             <a:r>
-              <a:rPr lang="en-US" sz="1350" b="1" dirty="0">
+              <a:rPr lang="en-US" sz="1300" b="1" dirty="0">
                 <a:solidFill>
                   <a:srgbClr val="0D1411"/>
                 </a:solidFill>
@@ -6386,17 +6317,14 @@
               </a:rPr>
               <a:t>Who to visit first</a:t>
             </a:r>
-            <a:endParaRPr lang="en-US" sz="1350" dirty="0"/>
-          </a:p>
-          <a:p>
-            <a:pPr indent="0" marL="0">
-              <a:spcAft>
-                <a:spcPts val="200"/>
-              </a:spcAft>
-              <a:buNone/>
-            </a:pPr>
-            <a:r>
-              <a:rPr lang="en-US" sz="1200" dirty="0">
+            <a:endParaRPr lang="en-US" sz="1300" dirty="0"/>
+          </a:p>
+          <a:p>
+            <a:pPr indent="0" marL="0">
+              <a:buNone/>
+            </a:pPr>
+            <a:r>
+              <a:rPr lang="en-US" sz="1150" dirty="0">
                 <a:solidFill>
                   <a:srgbClr val="4A5852"/>
                 </a:solidFill>
@@ -6406,7 +6334,7 @@
               </a:rPr>
               <a:t>Here: 6 farms have very stressed trees.</a:t>
             </a:r>
-            <a:endParaRPr lang="en-US" sz="1350" dirty="0"/>
+            <a:endParaRPr lang="en-US" sz="1300" dirty="0"/>
           </a:p>
         </p:txBody>
       </p:sp>
@@ -6418,8 +6346,8 @@
         </p:nvSpPr>
         <p:spPr>
           <a:xfrm>
-            <a:off x="507492" y="4585716"/>
-            <a:ext cx="246888" cy="246888"/>
+            <a:off x="502920" y="4331043"/>
+            <a:ext cx="228600" cy="228600"/>
           </a:xfrm>
           <a:prstGeom prst="ellipse">
             <a:avLst/>
@@ -6441,7 +6369,7 @@
               <a:buNone/>
             </a:pPr>
             <a:r>
-              <a:rPr lang="en-US" sz="1050" b="1" dirty="0">
+              <a:rPr lang="en-US" sz="1000" b="1" dirty="0">
                 <a:solidFill>
                   <a:srgbClr val="FFFFFF"/>
                 </a:solidFill>
@@ -6451,7 +6379,7 @@
               </a:rPr>
               <a:t>3</a:t>
             </a:r>
-            <a:endParaRPr lang="en-US" sz="1050" dirty="0"/>
+            <a:endParaRPr lang="en-US" sz="1000" dirty="0"/>
           </a:p>
         </p:txBody>
       </p:sp>
@@ -6463,8 +6391,8 @@
         </p:nvSpPr>
         <p:spPr>
           <a:xfrm>
-            <a:off x="886968" y="4590288"/>
-            <a:ext cx="2748835" cy="818388"/>
+            <a:off x="832104" y="4335615"/>
+            <a:ext cx="1728216" cy="961726"/>
           </a:xfrm>
           <a:prstGeom prst="rect">
             <a:avLst/>
@@ -6483,7 +6411,7 @@
               <a:buNone/>
             </a:pPr>
             <a:r>
-              <a:rPr lang="en-US" sz="1350" b="1" dirty="0">
+              <a:rPr lang="en-US" sz="1300" b="1" dirty="0">
                 <a:solidFill>
                   <a:srgbClr val="0D1411"/>
                 </a:solidFill>
@@ -6493,17 +6421,14 @@
               </a:rPr>
               <a:t>Four levels</a:t>
             </a:r>
-            <a:endParaRPr lang="en-US" sz="1350" dirty="0"/>
-          </a:p>
-          <a:p>
-            <a:pPr indent="0" marL="0">
-              <a:spcAft>
-                <a:spcPts val="200"/>
-              </a:spcAft>
-              <a:buNone/>
-            </a:pPr>
-            <a:r>
-              <a:rPr lang="en-US" sz="1200" dirty="0">
+            <a:endParaRPr lang="en-US" sz="1300" dirty="0"/>
+          </a:p>
+          <a:p>
+            <a:pPr indent="0" marL="0">
+              <a:buNone/>
+            </a:pPr>
+            <a:r>
+              <a:rPr lang="en-US" sz="1150" dirty="0">
                 <a:solidFill>
                   <a:srgbClr val="4A5852"/>
                 </a:solidFill>
@@ -6511,9 +6436,9 @@
                 <a:ea typeface="Calibri" pitchFamily="34" charset="-122"/>
                 <a:cs typeface="Calibri" pitchFamily="34" charset="-120"/>
               </a:rPr>
-              <a:t>Healthy, fair, stressed, very stressed. Green is good, red is bad.</a:t>
-            </a:r>
-            <a:endParaRPr lang="en-US" sz="1350" dirty="0"/>
+              <a:t>Healthy, fair, stressed, very stressed.</a:t>
+            </a:r>
+            <a:endParaRPr lang="en-US" sz="1300" dirty="0"/>
           </a:p>
         </p:txBody>
       </p:sp>
@@ -6525,8 +6450,8 @@
         </p:nvSpPr>
         <p:spPr>
           <a:xfrm>
-            <a:off x="507492" y="5477256"/>
-            <a:ext cx="246888" cy="246888"/>
+            <a:off x="502920" y="5365922"/>
+            <a:ext cx="228600" cy="228600"/>
           </a:xfrm>
           <a:prstGeom prst="ellipse">
             <a:avLst/>
@@ -6548,7 +6473,7 @@
               <a:buNone/>
             </a:pPr>
             <a:r>
-              <a:rPr lang="en-US" sz="1050" b="1" dirty="0">
+              <a:rPr lang="en-US" sz="1000" b="1" dirty="0">
                 <a:solidFill>
                   <a:srgbClr val="FFFFFF"/>
                 </a:solidFill>
@@ -6558,7 +6483,7 @@
               </a:rPr>
               <a:t>4</a:t>
             </a:r>
-            <a:endParaRPr lang="en-US" sz="1050" dirty="0"/>
+            <a:endParaRPr lang="en-US" sz="1000" dirty="0"/>
           </a:p>
         </p:txBody>
       </p:sp>
@@ -6570,8 +6495,8 @@
         </p:nvSpPr>
         <p:spPr>
           <a:xfrm>
-            <a:off x="886968" y="5481828"/>
-            <a:ext cx="2748835" cy="818388"/>
+            <a:off x="832104" y="5370494"/>
+            <a:ext cx="1728216" cy="961726"/>
           </a:xfrm>
           <a:prstGeom prst="rect">
             <a:avLst/>
@@ -6590,7 +6515,7 @@
               <a:buNone/>
             </a:pPr>
             <a:r>
-              <a:rPr lang="en-US" sz="1350" b="1" dirty="0">
+              <a:rPr lang="en-US" sz="1300" b="1" dirty="0">
                 <a:solidFill>
                   <a:srgbClr val="0D1411"/>
                 </a:solidFill>
@@ -6600,17 +6525,14 @@
               </a:rPr>
               <a:t>Health on the map</a:t>
             </a:r>
-            <a:endParaRPr lang="en-US" sz="1350" dirty="0"/>
-          </a:p>
-          <a:p>
-            <a:pPr indent="0" marL="0">
-              <a:spcAft>
-                <a:spcPts val="200"/>
-              </a:spcAft>
-              <a:buNone/>
-            </a:pPr>
-            <a:r>
-              <a:rPr lang="en-US" sz="1200" dirty="0">
+            <a:endParaRPr lang="en-US" sz="1300" dirty="0"/>
+          </a:p>
+          <a:p>
+            <a:pPr indent="0" marL="0">
+              <a:buNone/>
+            </a:pPr>
+            <a:r>
+              <a:rPr lang="en-US" sz="1150" dirty="0">
                 <a:solidFill>
                   <a:srgbClr val="4A5852"/>
                 </a:solidFill>
@@ -6620,7 +6542,7 @@
               </a:rPr>
               <a:t>The score of each area. Zoom in to see each farm.</a:t>
             </a:r>
-            <a:endParaRPr lang="en-US" sz="1350" dirty="0"/>
+            <a:endParaRPr lang="en-US" sz="1300" dirty="0"/>
           </a:p>
         </p:txBody>
       </p:sp>
@@ -6632,8 +6554,8 @@
         </p:nvSpPr>
         <p:spPr>
           <a:xfrm>
-            <a:off x="8555892" y="502920"/>
-            <a:ext cx="3132883" cy="237744"/>
+            <a:off x="6278728" y="457200"/>
+            <a:ext cx="5410048" cy="237744"/>
           </a:xfrm>
           <a:prstGeom prst="rect">
             <a:avLst/>
@@ -6671,8 +6593,8 @@
         </p:nvSpPr>
         <p:spPr>
           <a:xfrm>
-            <a:off x="8555892" y="786384"/>
-            <a:ext cx="3132883" cy="822960"/>
+            <a:off x="6278728" y="731520"/>
+            <a:ext cx="5410048" cy="457200"/>
           </a:xfrm>
           <a:prstGeom prst="rect">
             <a:avLst/>
@@ -6696,7 +6618,7 @@
                 <a:ea typeface="Calibri" pitchFamily="34" charset="-122"/>
                 <a:cs typeface="Calibri" pitchFamily="34" charset="-120"/>
               </a:rPr>
-              <a:t>Bitki sağlamlığı, təsərrüfat-təsərrüfat</a:t>
+              <a:t>Hər təsərrüfatda bitki sağlamlığı</a:t>
             </a:r>
             <a:endParaRPr lang="en-US" sz="2400" dirty="0"/>
           </a:p>
@@ -6710,8 +6632,8 @@
         </p:nvSpPr>
         <p:spPr>
           <a:xfrm>
-            <a:off x="8555892" y="1664208"/>
-            <a:ext cx="3132883" cy="960120"/>
+            <a:off x="6278728" y="1225296"/>
+            <a:ext cx="5410048" cy="585216"/>
           </a:xfrm>
           <a:prstGeom prst="rect">
             <a:avLst/>
@@ -6749,8 +6671,8 @@
         </p:nvSpPr>
         <p:spPr>
           <a:xfrm>
-            <a:off x="8560464" y="2802636"/>
-            <a:ext cx="246888" cy="246888"/>
+            <a:off x="9631375" y="2261286"/>
+            <a:ext cx="228600" cy="228600"/>
           </a:xfrm>
           <a:prstGeom prst="ellipse">
             <a:avLst/>
@@ -6772,7 +6694,7 @@
               <a:buNone/>
             </a:pPr>
             <a:r>
-              <a:rPr lang="en-US" sz="1050" b="1" dirty="0">
+              <a:rPr lang="en-US" sz="1000" b="1" dirty="0">
                 <a:solidFill>
                   <a:srgbClr val="FFFFFF"/>
                 </a:solidFill>
@@ -6782,7 +6704,7 @@
               </a:rPr>
               <a:t>1</a:t>
             </a:r>
-            <a:endParaRPr lang="en-US" sz="1050" dirty="0"/>
+            <a:endParaRPr lang="en-US" sz="1000" dirty="0"/>
           </a:p>
         </p:txBody>
       </p:sp>
@@ -6794,8 +6716,8 @@
         </p:nvSpPr>
         <p:spPr>
           <a:xfrm>
-            <a:off x="8939940" y="2807208"/>
-            <a:ext cx="2748835" cy="818388"/>
+            <a:off x="9960559" y="2265858"/>
+            <a:ext cx="1728216" cy="961726"/>
           </a:xfrm>
           <a:prstGeom prst="rect">
             <a:avLst/>
@@ -6814,7 +6736,7 @@
               <a:buNone/>
             </a:pPr>
             <a:r>
-              <a:rPr lang="en-US" sz="1350" b="1" dirty="0">
+              <a:rPr lang="en-US" sz="1300" b="1" dirty="0">
                 <a:solidFill>
                   <a:srgbClr val="0D1411"/>
                 </a:solidFill>
@@ -6824,17 +6746,14 @@
               </a:rPr>
               <a:t>0-dan 100-ə qədər bal</a:t>
             </a:r>
-            <a:endParaRPr lang="en-US" sz="1350" dirty="0"/>
-          </a:p>
-          <a:p>
-            <a:pPr indent="0" marL="0">
-              <a:spcAft>
-                <a:spcPts val="200"/>
-              </a:spcAft>
-              <a:buNone/>
-            </a:pPr>
-            <a:r>
-              <a:rPr lang="en-US" sz="1200" dirty="0">
+            <a:endParaRPr lang="en-US" sz="1300" dirty="0"/>
+          </a:p>
+          <a:p>
+            <a:pPr indent="0" marL="0">
+              <a:buNone/>
+            </a:pPr>
+            <a:r>
+              <a:rPr lang="en-US" sz="1150" dirty="0">
                 <a:solidFill>
                   <a:srgbClr val="4A5852"/>
                 </a:solidFill>
@@ -6844,7 +6763,7 @@
               </a:rPr>
               <a:t>Xurma və meyvə ağacları üçün. 80 və yuxarı sağlamdır.</a:t>
             </a:r>
-            <a:endParaRPr lang="en-US" sz="1350" dirty="0"/>
+            <a:endParaRPr lang="en-US" sz="1300" dirty="0"/>
           </a:p>
         </p:txBody>
       </p:sp>
@@ -6856,8 +6775,8 @@
         </p:nvSpPr>
         <p:spPr>
           <a:xfrm>
-            <a:off x="8560464" y="3694176"/>
-            <a:ext cx="246888" cy="246888"/>
+            <a:off x="9631375" y="3296165"/>
+            <a:ext cx="228600" cy="228600"/>
           </a:xfrm>
           <a:prstGeom prst="ellipse">
             <a:avLst/>
@@ -6879,7 +6798,7 @@
               <a:buNone/>
             </a:pPr>
             <a:r>
-              <a:rPr lang="en-US" sz="1050" b="1" dirty="0">
+              <a:rPr lang="en-US" sz="1000" b="1" dirty="0">
                 <a:solidFill>
                   <a:srgbClr val="FFFFFF"/>
                 </a:solidFill>
@@ -6889,7 +6808,7 @@
               </a:rPr>
               <a:t>2</a:t>
             </a:r>
-            <a:endParaRPr lang="en-US" sz="1050" dirty="0"/>
+            <a:endParaRPr lang="en-US" sz="1000" dirty="0"/>
           </a:p>
         </p:txBody>
       </p:sp>
@@ -6901,8 +6820,8 @@
         </p:nvSpPr>
         <p:spPr>
           <a:xfrm>
-            <a:off x="8939940" y="3698748"/>
-            <a:ext cx="2748835" cy="818388"/>
+            <a:off x="9960559" y="3300737"/>
+            <a:ext cx="1728216" cy="961726"/>
           </a:xfrm>
           <a:prstGeom prst="rect">
             <a:avLst/>
@@ -6921,7 +6840,7 @@
               <a:buNone/>
             </a:pPr>
             <a:r>
-              <a:rPr lang="en-US" sz="1350" b="1" dirty="0">
+              <a:rPr lang="en-US" sz="1300" b="1" dirty="0">
                 <a:solidFill>
                   <a:srgbClr val="0D1411"/>
                 </a:solidFill>
@@ -6931,17 +6850,14 @@
               </a:rPr>
               <a:t>Əvvəlcə kimə baş çəkmək</a:t>
             </a:r>
-            <a:endParaRPr lang="en-US" sz="1350" dirty="0"/>
-          </a:p>
-          <a:p>
-            <a:pPr indent="0" marL="0">
-              <a:spcAft>
-                <a:spcPts val="200"/>
-              </a:spcAft>
-              <a:buNone/>
-            </a:pPr>
-            <a:r>
-              <a:rPr lang="en-US" sz="1200" dirty="0">
+            <a:endParaRPr lang="en-US" sz="1300" dirty="0"/>
+          </a:p>
+          <a:p>
+            <a:pPr indent="0" marL="0">
+              <a:buNone/>
+            </a:pPr>
+            <a:r>
+              <a:rPr lang="en-US" sz="1150" dirty="0">
                 <a:solidFill>
                   <a:srgbClr val="4A5852"/>
                 </a:solidFill>
@@ -6951,7 +6867,7 @@
               </a:rPr>
               <a:t>Burada: 6 təsərrüfatda ağaclar çox zəifdir.</a:t>
             </a:r>
-            <a:endParaRPr lang="en-US" sz="1350" dirty="0"/>
+            <a:endParaRPr lang="en-US" sz="1300" dirty="0"/>
           </a:p>
         </p:txBody>
       </p:sp>
@@ -6963,8 +6879,8 @@
         </p:nvSpPr>
         <p:spPr>
           <a:xfrm>
-            <a:off x="8560464" y="4585716"/>
-            <a:ext cx="246888" cy="246888"/>
+            <a:off x="9631375" y="4331043"/>
+            <a:ext cx="228600" cy="228600"/>
           </a:xfrm>
           <a:prstGeom prst="ellipse">
             <a:avLst/>
@@ -6986,7 +6902,7 @@
               <a:buNone/>
             </a:pPr>
             <a:r>
-              <a:rPr lang="en-US" sz="1050" b="1" dirty="0">
+              <a:rPr lang="en-US" sz="1000" b="1" dirty="0">
                 <a:solidFill>
                   <a:srgbClr val="FFFFFF"/>
                 </a:solidFill>
@@ -6996,7 +6912,7 @@
               </a:rPr>
               <a:t>3</a:t>
             </a:r>
-            <a:endParaRPr lang="en-US" sz="1050" dirty="0"/>
+            <a:endParaRPr lang="en-US" sz="1000" dirty="0"/>
           </a:p>
         </p:txBody>
       </p:sp>
@@ -7008,8 +6924,8 @@
         </p:nvSpPr>
         <p:spPr>
           <a:xfrm>
-            <a:off x="8939940" y="4590288"/>
-            <a:ext cx="2748835" cy="818388"/>
+            <a:off x="9960559" y="4335615"/>
+            <a:ext cx="1728216" cy="961726"/>
           </a:xfrm>
           <a:prstGeom prst="rect">
             <a:avLst/>
@@ -7028,7 +6944,7 @@
               <a:buNone/>
             </a:pPr>
             <a:r>
-              <a:rPr lang="en-US" sz="1350" b="1" dirty="0">
+              <a:rPr lang="en-US" sz="1300" b="1" dirty="0">
                 <a:solidFill>
                   <a:srgbClr val="0D1411"/>
                 </a:solidFill>
@@ -7038,17 +6954,14 @@
               </a:rPr>
               <a:t>Dörd səviyyə</a:t>
             </a:r>
-            <a:endParaRPr lang="en-US" sz="1350" dirty="0"/>
-          </a:p>
-          <a:p>
-            <a:pPr indent="0" marL="0">
-              <a:spcAft>
-                <a:spcPts val="200"/>
-              </a:spcAft>
-              <a:buNone/>
-            </a:pPr>
-            <a:r>
-              <a:rPr lang="en-US" sz="1200" dirty="0">
+            <a:endParaRPr lang="en-US" sz="1300" dirty="0"/>
+          </a:p>
+          <a:p>
+            <a:pPr indent="0" marL="0">
+              <a:buNone/>
+            </a:pPr>
+            <a:r>
+              <a:rPr lang="en-US" sz="1150" dirty="0">
                 <a:solidFill>
                   <a:srgbClr val="4A5852"/>
                 </a:solidFill>
@@ -7056,9 +6969,9 @@
                 <a:ea typeface="Calibri" pitchFamily="34" charset="-122"/>
                 <a:cs typeface="Calibri" pitchFamily="34" charset="-120"/>
               </a:rPr>
-              <a:t>Sağlam, orta, zəif, çox zəif. Yaşıl yaxşıdır, qırmızı pisdir.</a:t>
-            </a:r>
-            <a:endParaRPr lang="en-US" sz="1350" dirty="0"/>
+              <a:t>Sağlam, orta, zəif, çox zəif.</a:t>
+            </a:r>
+            <a:endParaRPr lang="en-US" sz="1300" dirty="0"/>
           </a:p>
         </p:txBody>
       </p:sp>
@@ -7070,8 +6983,8 @@
         </p:nvSpPr>
         <p:spPr>
           <a:xfrm>
-            <a:off x="8560464" y="5477256"/>
-            <a:ext cx="246888" cy="246888"/>
+            <a:off x="9631375" y="5365922"/>
+            <a:ext cx="228600" cy="228600"/>
           </a:xfrm>
           <a:prstGeom prst="ellipse">
             <a:avLst/>
@@ -7093,7 +7006,7 @@
               <a:buNone/>
             </a:pPr>
             <a:r>
-              <a:rPr lang="en-US" sz="1050" b="1" dirty="0">
+              <a:rPr lang="en-US" sz="1000" b="1" dirty="0">
                 <a:solidFill>
                   <a:srgbClr val="FFFFFF"/>
                 </a:solidFill>
@@ -7103,7 +7016,7 @@
               </a:rPr>
               <a:t>4</a:t>
             </a:r>
-            <a:endParaRPr lang="en-US" sz="1050" dirty="0"/>
+            <a:endParaRPr lang="en-US" sz="1000" dirty="0"/>
           </a:p>
         </p:txBody>
       </p:sp>
@@ -7115,8 +7028,8 @@
         </p:nvSpPr>
         <p:spPr>
           <a:xfrm>
-            <a:off x="8939940" y="5481828"/>
-            <a:ext cx="2748835" cy="818388"/>
+            <a:off x="9960559" y="5370494"/>
+            <a:ext cx="1728216" cy="961726"/>
           </a:xfrm>
           <a:prstGeom prst="rect">
             <a:avLst/>
@@ -7135,7 +7048,7 @@
               <a:buNone/>
             </a:pPr>
             <a:r>
-              <a:rPr lang="en-US" sz="1350" b="1" dirty="0">
+              <a:rPr lang="en-US" sz="1300" b="1" dirty="0">
                 <a:solidFill>
                   <a:srgbClr val="0D1411"/>
                 </a:solidFill>
@@ -7145,17 +7058,14 @@
               </a:rPr>
               <a:t>Xəritədə sağlamlıq</a:t>
             </a:r>
-            <a:endParaRPr lang="en-US" sz="1350" dirty="0"/>
-          </a:p>
-          <a:p>
-            <a:pPr indent="0" marL="0">
-              <a:spcAft>
-                <a:spcPts val="200"/>
-              </a:spcAft>
-              <a:buNone/>
-            </a:pPr>
-            <a:r>
-              <a:rPr lang="en-US" sz="1200" dirty="0">
+            <a:endParaRPr lang="en-US" sz="1300" dirty="0"/>
+          </a:p>
+          <a:p>
+            <a:pPr indent="0" marL="0">
+              <a:buNone/>
+            </a:pPr>
+            <a:r>
+              <a:rPr lang="en-US" sz="1150" dirty="0">
                 <a:solidFill>
                   <a:srgbClr val="4A5852"/>
                 </a:solidFill>
@@ -7165,7 +7075,7 @@
               </a:rPr>
               <a:t>Hər ərazinin balı. Hər təsərrüfatı görmək üçün yaxınlaşdırın.</a:t>
             </a:r>
-            <a:endParaRPr lang="en-US" sz="1350" dirty="0"/>
+            <a:endParaRPr lang="en-US" sz="1300" dirty="0"/>
           </a:p>
         </p:txBody>
       </p:sp>
@@ -7256,8 +7166,8 @@
         </p:blipFill>
         <p:spPr>
           <a:xfrm>
-            <a:off x="3955843" y="411480"/>
-            <a:ext cx="4280010" cy="6035040"/>
+            <a:off x="2788920" y="2168655"/>
+            <a:ext cx="6613855" cy="4029450"/>
           </a:xfrm>
           <a:prstGeom prst="rect">
             <a:avLst/>
@@ -7272,8 +7182,8 @@
         </p:nvSpPr>
         <p:spPr>
           <a:xfrm>
-            <a:off x="3968272" y="1028086"/>
-            <a:ext cx="246888" cy="246888"/>
+            <a:off x="3921303" y="2842877"/>
+            <a:ext cx="228600" cy="228600"/>
           </a:xfrm>
           <a:prstGeom prst="ellipse">
             <a:avLst/>
@@ -7295,7 +7205,7 @@
               <a:buNone/>
             </a:pPr>
             <a:r>
-              <a:rPr lang="en-US" sz="1050" b="1" dirty="0">
+              <a:rPr lang="en-US" sz="1000" b="1" dirty="0">
                 <a:solidFill>
                   <a:srgbClr val="FFFFFF"/>
                 </a:solidFill>
@@ -7305,7 +7215,7 @@
               </a:rPr>
               <a:t>1</a:t>
             </a:r>
-            <a:endParaRPr lang="en-US" sz="1050" dirty="0"/>
+            <a:endParaRPr lang="en-US" sz="1000" dirty="0"/>
           </a:p>
         </p:txBody>
       </p:sp>
@@ -7317,8 +7227,8 @@
         </p:nvSpPr>
         <p:spPr>
           <a:xfrm>
-            <a:off x="3968272" y="1943284"/>
-            <a:ext cx="246888" cy="246888"/>
+            <a:off x="6670722" y="3096165"/>
+            <a:ext cx="228600" cy="228600"/>
           </a:xfrm>
           <a:prstGeom prst="ellipse">
             <a:avLst/>
@@ -7340,7 +7250,7 @@
               <a:buNone/>
             </a:pPr>
             <a:r>
-              <a:rPr lang="en-US" sz="1050" b="1" dirty="0">
+              <a:rPr lang="en-US" sz="1000" b="1" dirty="0">
                 <a:solidFill>
                   <a:srgbClr val="FFFFFF"/>
                 </a:solidFill>
@@ -7350,7 +7260,7 @@
               </a:rPr>
               <a:t>2</a:t>
             </a:r>
-            <a:endParaRPr lang="en-US" sz="1050" dirty="0"/>
+            <a:endParaRPr lang="en-US" sz="1000" dirty="0"/>
           </a:p>
         </p:txBody>
       </p:sp>
@@ -7362,8 +7272,8 @@
         </p:nvSpPr>
         <p:spPr>
           <a:xfrm>
-            <a:off x="3968272" y="2353735"/>
-            <a:ext cx="246888" cy="246888"/>
+            <a:off x="6125126" y="3431952"/>
+            <a:ext cx="228600" cy="228600"/>
           </a:xfrm>
           <a:prstGeom prst="ellipse">
             <a:avLst/>
@@ -7385,7 +7295,7 @@
               <a:buNone/>
             </a:pPr>
             <a:r>
-              <a:rPr lang="en-US" sz="1050" b="1" dirty="0">
+              <a:rPr lang="en-US" sz="1000" b="1" dirty="0">
                 <a:solidFill>
                   <a:srgbClr val="FFFFFF"/>
                 </a:solidFill>
@@ -7395,7 +7305,7 @@
               </a:rPr>
               <a:t>3</a:t>
             </a:r>
-            <a:endParaRPr lang="en-US" sz="1050" dirty="0"/>
+            <a:endParaRPr lang="en-US" sz="1000" dirty="0"/>
           </a:p>
         </p:txBody>
       </p:sp>
@@ -7407,8 +7317,8 @@
         </p:nvSpPr>
         <p:spPr>
           <a:xfrm>
-            <a:off x="3968272" y="4452695"/>
-            <a:ext cx="246888" cy="246888"/>
+            <a:off x="3369353" y="5149100"/>
+            <a:ext cx="228600" cy="228600"/>
           </a:xfrm>
           <a:prstGeom prst="ellipse">
             <a:avLst/>
@@ -7430,7 +7340,7 @@
               <a:buNone/>
             </a:pPr>
             <a:r>
-              <a:rPr lang="en-US" sz="1050" b="1" dirty="0">
+              <a:rPr lang="en-US" sz="1000" b="1" dirty="0">
                 <a:solidFill>
                   <a:srgbClr val="FFFFFF"/>
                 </a:solidFill>
@@ -7440,7 +7350,7 @@
               </a:rPr>
               <a:t>4</a:t>
             </a:r>
-            <a:endParaRPr lang="en-US" sz="1050" dirty="0"/>
+            <a:endParaRPr lang="en-US" sz="1000" dirty="0"/>
           </a:p>
         </p:txBody>
       </p:sp>
@@ -7452,8 +7362,8 @@
         </p:nvSpPr>
         <p:spPr>
           <a:xfrm>
-            <a:off x="502920" y="502920"/>
-            <a:ext cx="3132883" cy="237744"/>
+            <a:off x="502920" y="457200"/>
+            <a:ext cx="5410048" cy="237744"/>
           </a:xfrm>
           <a:prstGeom prst="rect">
             <a:avLst/>
@@ -7491,8 +7401,8 @@
         </p:nvSpPr>
         <p:spPr>
           <a:xfrm>
-            <a:off x="502920" y="786384"/>
-            <a:ext cx="3132883" cy="822960"/>
+            <a:off x="502920" y="731520"/>
+            <a:ext cx="5410048" cy="457200"/>
           </a:xfrm>
           <a:prstGeom prst="rect">
             <a:avLst/>
@@ -7530,8 +7440,8 @@
         </p:nvSpPr>
         <p:spPr>
           <a:xfrm>
-            <a:off x="502920" y="1664208"/>
-            <a:ext cx="3132883" cy="960120"/>
+            <a:off x="502920" y="1225296"/>
+            <a:ext cx="5410048" cy="585216"/>
           </a:xfrm>
           <a:prstGeom prst="rect">
             <a:avLst/>
@@ -7569,8 +7479,8 @@
         </p:nvSpPr>
         <p:spPr>
           <a:xfrm>
-            <a:off x="507492" y="2802636"/>
-            <a:ext cx="246888" cy="246888"/>
+            <a:off x="502920" y="2261286"/>
+            <a:ext cx="228600" cy="228600"/>
           </a:xfrm>
           <a:prstGeom prst="ellipse">
             <a:avLst/>
@@ -7592,7 +7502,7 @@
               <a:buNone/>
             </a:pPr>
             <a:r>
-              <a:rPr lang="en-US" sz="1050" b="1" dirty="0">
+              <a:rPr lang="en-US" sz="1000" b="1" dirty="0">
                 <a:solidFill>
                   <a:srgbClr val="FFFFFF"/>
                 </a:solidFill>
@@ -7602,7 +7512,7 @@
               </a:rPr>
               <a:t>1</a:t>
             </a:r>
-            <a:endParaRPr lang="en-US" sz="1050" dirty="0"/>
+            <a:endParaRPr lang="en-US" sz="1000" dirty="0"/>
           </a:p>
         </p:txBody>
       </p:sp>
@@ -7614,8 +7524,8 @@
         </p:nvSpPr>
         <p:spPr>
           <a:xfrm>
-            <a:off x="886968" y="2807208"/>
-            <a:ext cx="2748835" cy="818388"/>
+            <a:off x="832104" y="2265858"/>
+            <a:ext cx="1728216" cy="961726"/>
           </a:xfrm>
           <a:prstGeom prst="rect">
             <a:avLst/>
@@ -7634,7 +7544,7 @@
               <a:buNone/>
             </a:pPr>
             <a:r>
-              <a:rPr lang="en-US" sz="1350" b="1" dirty="0">
+              <a:rPr lang="en-US" sz="1300" b="1" dirty="0">
                 <a:solidFill>
                   <a:srgbClr val="0D1411"/>
                 </a:solidFill>
@@ -7644,17 +7554,14 @@
               </a:rPr>
               <a:t>The farm in numbers</a:t>
             </a:r>
-            <a:endParaRPr lang="en-US" sz="1350" dirty="0"/>
-          </a:p>
-          <a:p>
-            <a:pPr indent="0" marL="0">
-              <a:spcAft>
-                <a:spcPts val="200"/>
-              </a:spcAft>
-              <a:buNone/>
-            </a:pPr>
-            <a:r>
-              <a:rPr lang="en-US" sz="1200" dirty="0">
+            <a:endParaRPr lang="en-US" sz="1300" dirty="0"/>
+          </a:p>
+          <a:p>
+            <a:pPr indent="0" marL="0">
+              <a:buNone/>
+            </a:pPr>
+            <a:r>
+              <a:rPr lang="en-US" sz="1150" dirty="0">
                 <a:solidFill>
                   <a:srgbClr val="4A5852"/>
                 </a:solidFill>
@@ -7664,7 +7571,7 @@
               </a:rPr>
               <a:t>Size, land in use, trees, and how many problems.</a:t>
             </a:r>
-            <a:endParaRPr lang="en-US" sz="1350" dirty="0"/>
+            <a:endParaRPr lang="en-US" sz="1300" dirty="0"/>
           </a:p>
         </p:txBody>
       </p:sp>
@@ -7676,8 +7583,8 @@
         </p:nvSpPr>
         <p:spPr>
           <a:xfrm>
-            <a:off x="507492" y="3694176"/>
-            <a:ext cx="246888" cy="246888"/>
+            <a:off x="502920" y="3296165"/>
+            <a:ext cx="228600" cy="228600"/>
           </a:xfrm>
           <a:prstGeom prst="ellipse">
             <a:avLst/>
@@ -7699,7 +7606,7 @@
               <a:buNone/>
             </a:pPr>
             <a:r>
-              <a:rPr lang="en-US" sz="1050" b="1" dirty="0">
+              <a:rPr lang="en-US" sz="1000" b="1" dirty="0">
                 <a:solidFill>
                   <a:srgbClr val="FFFFFF"/>
                 </a:solidFill>
@@ -7709,7 +7616,7 @@
               </a:rPr>
               <a:t>2</a:t>
             </a:r>
-            <a:endParaRPr lang="en-US" sz="1050" dirty="0"/>
+            <a:endParaRPr lang="en-US" sz="1000" dirty="0"/>
           </a:p>
         </p:txBody>
       </p:sp>
@@ -7721,8 +7628,8 @@
         </p:nvSpPr>
         <p:spPr>
           <a:xfrm>
-            <a:off x="886968" y="3698748"/>
-            <a:ext cx="2748835" cy="818388"/>
+            <a:off x="832104" y="3300737"/>
+            <a:ext cx="1728216" cy="961726"/>
           </a:xfrm>
           <a:prstGeom prst="rect">
             <a:avLst/>
@@ -7741,7 +7648,7 @@
               <a:buNone/>
             </a:pPr>
             <a:r>
-              <a:rPr lang="en-US" sz="1350" b="1" dirty="0">
+              <a:rPr lang="en-US" sz="1300" b="1" dirty="0">
                 <a:solidFill>
                   <a:srgbClr val="0D1411"/>
                 </a:solidFill>
@@ -7751,17 +7658,14 @@
               </a:rPr>
               <a:t>What is wrong</a:t>
             </a:r>
-            <a:endParaRPr lang="en-US" sz="1350" dirty="0"/>
-          </a:p>
-          <a:p>
-            <a:pPr indent="0" marL="0">
-              <a:spcAft>
-                <a:spcPts val="200"/>
-              </a:spcAft>
-              <a:buNone/>
-            </a:pPr>
-            <a:r>
-              <a:rPr lang="en-US" sz="1200" dirty="0">
+            <a:endParaRPr lang="en-US" sz="1300" dirty="0"/>
+          </a:p>
+          <a:p>
+            <a:pPr indent="0" marL="0">
+              <a:buNone/>
+            </a:pPr>
+            <a:r>
+              <a:rPr lang="en-US" sz="1150" dirty="0">
                 <a:solidFill>
                   <a:srgbClr val="4A5852"/>
                 </a:solidFill>
@@ -7771,7 +7675,7 @@
               </a:rPr>
               <a:t>Here: the trees look very stressed.</a:t>
             </a:r>
-            <a:endParaRPr lang="en-US" sz="1350" dirty="0"/>
+            <a:endParaRPr lang="en-US" sz="1300" dirty="0"/>
           </a:p>
         </p:txBody>
       </p:sp>
@@ -7783,8 +7687,8 @@
         </p:nvSpPr>
         <p:spPr>
           <a:xfrm>
-            <a:off x="507492" y="4585716"/>
-            <a:ext cx="246888" cy="246888"/>
+            <a:off x="502920" y="4331043"/>
+            <a:ext cx="228600" cy="228600"/>
           </a:xfrm>
           <a:prstGeom prst="ellipse">
             <a:avLst/>
@@ -7806,7 +7710,7 @@
               <a:buNone/>
             </a:pPr>
             <a:r>
-              <a:rPr lang="en-US" sz="1050" b="1" dirty="0">
+              <a:rPr lang="en-US" sz="1000" b="1" dirty="0">
                 <a:solidFill>
                   <a:srgbClr val="FFFFFF"/>
                 </a:solidFill>
@@ -7816,7 +7720,7 @@
               </a:rPr>
               <a:t>3</a:t>
             </a:r>
-            <a:endParaRPr lang="en-US" sz="1050" dirty="0"/>
+            <a:endParaRPr lang="en-US" sz="1000" dirty="0"/>
           </a:p>
         </p:txBody>
       </p:sp>
@@ -7828,8 +7732,8 @@
         </p:nvSpPr>
         <p:spPr>
           <a:xfrm>
-            <a:off x="886968" y="4590288"/>
-            <a:ext cx="2748835" cy="818388"/>
+            <a:off x="832104" y="4335615"/>
+            <a:ext cx="1728216" cy="961726"/>
           </a:xfrm>
           <a:prstGeom prst="rect">
             <a:avLst/>
@@ -7848,7 +7752,7 @@
               <a:buNone/>
             </a:pPr>
             <a:r>
-              <a:rPr lang="en-US" sz="1350" b="1" dirty="0">
+              <a:rPr lang="en-US" sz="1300" b="1" dirty="0">
                 <a:solidFill>
                   <a:srgbClr val="0D1411"/>
                 </a:solidFill>
@@ -7856,19 +7760,16 @@
                 <a:ea typeface="Calibri" pitchFamily="34" charset="-122"/>
                 <a:cs typeface="Calibri" pitchFamily="34" charset="-120"/>
               </a:rPr>
-              <a:t>Where it is</a:t>
-            </a:r>
-            <a:endParaRPr lang="en-US" sz="1350" dirty="0"/>
-          </a:p>
-          <a:p>
-            <a:pPr indent="0" marL="0">
-              <a:spcAft>
-                <a:spcPts val="200"/>
-              </a:spcAft>
-              <a:buNone/>
-            </a:pPr>
-            <a:r>
-              <a:rPr lang="en-US" sz="1200" dirty="0">
+              <a:t>What it grows now</a:t>
+            </a:r>
+            <a:endParaRPr lang="en-US" sz="1300" dirty="0"/>
+          </a:p>
+          <a:p>
+            <a:pPr indent="0" marL="0">
+              <a:buNone/>
+            </a:pPr>
+            <a:r>
+              <a:rPr lang="en-US" sz="1150" dirty="0">
                 <a:solidFill>
                   <a:srgbClr val="4A5852"/>
                 </a:solidFill>
@@ -7876,9 +7777,9 @@
                 <a:ea typeface="Calibri" pitchFamily="34" charset="-122"/>
                 <a:cs typeface="Calibri" pitchFamily="34" charset="-120"/>
               </a:rPr>
-              <a:t>The farm’s real boundary, on the satellite picture.</a:t>
-            </a:r>
-            <a:endParaRPr lang="en-US" sz="1350" dirty="0"/>
+              <a:t>Each crop, and how much land it takes.</a:t>
+            </a:r>
+            <a:endParaRPr lang="en-US" sz="1300" dirty="0"/>
           </a:p>
         </p:txBody>
       </p:sp>
@@ -7890,8 +7791,8 @@
         </p:nvSpPr>
         <p:spPr>
           <a:xfrm>
-            <a:off x="507492" y="5477256"/>
-            <a:ext cx="246888" cy="246888"/>
+            <a:off x="502920" y="5365922"/>
+            <a:ext cx="228600" cy="228600"/>
           </a:xfrm>
           <a:prstGeom prst="ellipse">
             <a:avLst/>
@@ -7913,7 +7814,7 @@
               <a:buNone/>
             </a:pPr>
             <a:r>
-              <a:rPr lang="en-US" sz="1050" b="1" dirty="0">
+              <a:rPr lang="en-US" sz="1000" b="1" dirty="0">
                 <a:solidFill>
                   <a:srgbClr val="FFFFFF"/>
                 </a:solidFill>
@@ -7923,7 +7824,7 @@
               </a:rPr>
               <a:t>4</a:t>
             </a:r>
-            <a:endParaRPr lang="en-US" sz="1050" dirty="0"/>
+            <a:endParaRPr lang="en-US" sz="1000" dirty="0"/>
           </a:p>
         </p:txBody>
       </p:sp>
@@ -7935,8 +7836,8 @@
         </p:nvSpPr>
         <p:spPr>
           <a:xfrm>
-            <a:off x="886968" y="5481828"/>
-            <a:ext cx="2748835" cy="818388"/>
+            <a:off x="832104" y="5370494"/>
+            <a:ext cx="1728216" cy="961726"/>
           </a:xfrm>
           <a:prstGeom prst="rect">
             <a:avLst/>
@@ -7955,7 +7856,7 @@
               <a:buNone/>
             </a:pPr>
             <a:r>
-              <a:rPr lang="en-US" sz="1350" b="1" dirty="0">
+              <a:rPr lang="en-US" sz="1300" b="1" dirty="0">
                 <a:solidFill>
                   <a:srgbClr val="0D1411"/>
                 </a:solidFill>
@@ -7963,19 +7864,16 @@
                 <a:ea typeface="Calibri" pitchFamily="34" charset="-122"/>
                 <a:cs typeface="Calibri" pitchFamily="34" charset="-120"/>
               </a:rPr>
-              <a:t>What it grows now</a:t>
-            </a:r>
-            <a:endParaRPr lang="en-US" sz="1350" dirty="0"/>
-          </a:p>
-          <a:p>
-            <a:pPr indent="0" marL="0">
-              <a:spcAft>
-                <a:spcPts val="200"/>
-              </a:spcAft>
-              <a:buNone/>
-            </a:pPr>
-            <a:r>
-              <a:rPr lang="en-US" sz="1200" dirty="0">
+              <a:t>Its trees</a:t>
+            </a:r>
+            <a:endParaRPr lang="en-US" sz="1300" dirty="0"/>
+          </a:p>
+          <a:p>
+            <a:pPr indent="0" marL="0">
+              <a:buNone/>
+            </a:pPr>
+            <a:r>
+              <a:rPr lang="en-US" sz="1150" dirty="0">
                 <a:solidFill>
                   <a:srgbClr val="4A5852"/>
                 </a:solidFill>
@@ -7983,9 +7881,9 @@
                 <a:ea typeface="Calibri" pitchFamily="34" charset="-122"/>
                 <a:cs typeface="Calibri" pitchFamily="34" charset="-120"/>
               </a:rPr>
-              <a:t>Each crop, and how much land it takes.</a:t>
-            </a:r>
-            <a:endParaRPr lang="en-US" sz="1350" dirty="0"/>
+              <a:t>Here: 59 palms, with a health score of 46.</a:t>
+            </a:r>
+            <a:endParaRPr lang="en-US" sz="1300" dirty="0"/>
           </a:p>
         </p:txBody>
       </p:sp>
@@ -7997,8 +7895,8 @@
         </p:nvSpPr>
         <p:spPr>
           <a:xfrm>
-            <a:off x="8555892" y="502920"/>
-            <a:ext cx="3132883" cy="237744"/>
+            <a:off x="6278728" y="457200"/>
+            <a:ext cx="5410048" cy="237744"/>
           </a:xfrm>
           <a:prstGeom prst="rect">
             <a:avLst/>
@@ -8036,8 +7934,8 @@
         </p:nvSpPr>
         <p:spPr>
           <a:xfrm>
-            <a:off x="8555892" y="786384"/>
-            <a:ext cx="3132883" cy="822960"/>
+            <a:off x="6278728" y="731520"/>
+            <a:ext cx="5410048" cy="457200"/>
           </a:xfrm>
           <a:prstGeom prst="rect">
             <a:avLst/>
@@ -8075,8 +7973,8 @@
         </p:nvSpPr>
         <p:spPr>
           <a:xfrm>
-            <a:off x="8555892" y="1664208"/>
-            <a:ext cx="3132883" cy="960120"/>
+            <a:off x="6278728" y="1225296"/>
+            <a:ext cx="5410048" cy="585216"/>
           </a:xfrm>
           <a:prstGeom prst="rect">
             <a:avLst/>
@@ -8114,8 +8012,8 @@
         </p:nvSpPr>
         <p:spPr>
           <a:xfrm>
-            <a:off x="8560464" y="2802636"/>
-            <a:ext cx="246888" cy="246888"/>
+            <a:off x="9631375" y="2261286"/>
+            <a:ext cx="228600" cy="228600"/>
           </a:xfrm>
           <a:prstGeom prst="ellipse">
             <a:avLst/>
@@ -8137,7 +8035,7 @@
               <a:buNone/>
             </a:pPr>
             <a:r>
-              <a:rPr lang="en-US" sz="1050" b="1" dirty="0">
+              <a:rPr lang="en-US" sz="1000" b="1" dirty="0">
                 <a:solidFill>
                   <a:srgbClr val="FFFFFF"/>
                 </a:solidFill>
@@ -8147,7 +8045,7 @@
               </a:rPr>
               <a:t>1</a:t>
             </a:r>
-            <a:endParaRPr lang="en-US" sz="1050" dirty="0"/>
+            <a:endParaRPr lang="en-US" sz="1000" dirty="0"/>
           </a:p>
         </p:txBody>
       </p:sp>
@@ -8159,8 +8057,8 @@
         </p:nvSpPr>
         <p:spPr>
           <a:xfrm>
-            <a:off x="8939940" y="2807208"/>
-            <a:ext cx="2748835" cy="818388"/>
+            <a:off x="9960559" y="2265858"/>
+            <a:ext cx="1728216" cy="961726"/>
           </a:xfrm>
           <a:prstGeom prst="rect">
             <a:avLst/>
@@ -8179,7 +8077,7 @@
               <a:buNone/>
             </a:pPr>
             <a:r>
-              <a:rPr lang="en-US" sz="1350" b="1" dirty="0">
+              <a:rPr lang="en-US" sz="1300" b="1" dirty="0">
                 <a:solidFill>
                   <a:srgbClr val="0D1411"/>
                 </a:solidFill>
@@ -8189,17 +8087,14 @@
               </a:rPr>
               <a:t>Rəqəmlərlə təsərrüfat</a:t>
             </a:r>
-            <a:endParaRPr lang="en-US" sz="1350" dirty="0"/>
-          </a:p>
-          <a:p>
-            <a:pPr indent="0" marL="0">
-              <a:spcAft>
-                <a:spcPts val="200"/>
-              </a:spcAft>
-              <a:buNone/>
-            </a:pPr>
-            <a:r>
-              <a:rPr lang="en-US" sz="1200" dirty="0">
+            <a:endParaRPr lang="en-US" sz="1300" dirty="0"/>
+          </a:p>
+          <a:p>
+            <a:pPr indent="0" marL="0">
+              <a:buNone/>
+            </a:pPr>
+            <a:r>
+              <a:rPr lang="en-US" sz="1150" dirty="0">
                 <a:solidFill>
                   <a:srgbClr val="4A5852"/>
                 </a:solidFill>
@@ -8209,7 +8104,7 @@
               </a:rPr>
               <a:t>Ölçü, istifadə olunan torpaq, ağaclar və problemlərin sayı.</a:t>
             </a:r>
-            <a:endParaRPr lang="en-US" sz="1350" dirty="0"/>
+            <a:endParaRPr lang="en-US" sz="1300" dirty="0"/>
           </a:p>
         </p:txBody>
       </p:sp>
@@ -8221,8 +8116,8 @@
         </p:nvSpPr>
         <p:spPr>
           <a:xfrm>
-            <a:off x="8560464" y="3694176"/>
-            <a:ext cx="246888" cy="246888"/>
+            <a:off x="9631375" y="3296165"/>
+            <a:ext cx="228600" cy="228600"/>
           </a:xfrm>
           <a:prstGeom prst="ellipse">
             <a:avLst/>
@@ -8244,7 +8139,7 @@
               <a:buNone/>
             </a:pPr>
             <a:r>
-              <a:rPr lang="en-US" sz="1050" b="1" dirty="0">
+              <a:rPr lang="en-US" sz="1000" b="1" dirty="0">
                 <a:solidFill>
                   <a:srgbClr val="FFFFFF"/>
                 </a:solidFill>
@@ -8254,7 +8149,7 @@
               </a:rPr>
               <a:t>2</a:t>
             </a:r>
-            <a:endParaRPr lang="en-US" sz="1050" dirty="0"/>
+            <a:endParaRPr lang="en-US" sz="1000" dirty="0"/>
           </a:p>
         </p:txBody>
       </p:sp>
@@ -8266,8 +8161,8 @@
         </p:nvSpPr>
         <p:spPr>
           <a:xfrm>
-            <a:off x="8939940" y="3698748"/>
-            <a:ext cx="2748835" cy="818388"/>
+            <a:off x="9960559" y="3300737"/>
+            <a:ext cx="1728216" cy="961726"/>
           </a:xfrm>
           <a:prstGeom prst="rect">
             <a:avLst/>
@@ -8286,7 +8181,7 @@
               <a:buNone/>
             </a:pPr>
             <a:r>
-              <a:rPr lang="en-US" sz="1350" b="1" dirty="0">
+              <a:rPr lang="en-US" sz="1300" b="1" dirty="0">
                 <a:solidFill>
                   <a:srgbClr val="0D1411"/>
                 </a:solidFill>
@@ -8296,17 +8191,14 @@
               </a:rPr>
               <a:t>Nə problem var</a:t>
             </a:r>
-            <a:endParaRPr lang="en-US" sz="1350" dirty="0"/>
-          </a:p>
-          <a:p>
-            <a:pPr indent="0" marL="0">
-              <a:spcAft>
-                <a:spcPts val="200"/>
-              </a:spcAft>
-              <a:buNone/>
-            </a:pPr>
-            <a:r>
-              <a:rPr lang="en-US" sz="1200" dirty="0">
+            <a:endParaRPr lang="en-US" sz="1300" dirty="0"/>
+          </a:p>
+          <a:p>
+            <a:pPr indent="0" marL="0">
+              <a:buNone/>
+            </a:pPr>
+            <a:r>
+              <a:rPr lang="en-US" sz="1150" dirty="0">
                 <a:solidFill>
                   <a:srgbClr val="4A5852"/>
                 </a:solidFill>
@@ -8316,7 +8208,7 @@
               </a:rPr>
               <a:t>Burada: ağaclar çox zəif görünür.</a:t>
             </a:r>
-            <a:endParaRPr lang="en-US" sz="1350" dirty="0"/>
+            <a:endParaRPr lang="en-US" sz="1300" dirty="0"/>
           </a:p>
         </p:txBody>
       </p:sp>
@@ -8328,8 +8220,8 @@
         </p:nvSpPr>
         <p:spPr>
           <a:xfrm>
-            <a:off x="8560464" y="4585716"/>
-            <a:ext cx="246888" cy="246888"/>
+            <a:off x="9631375" y="4331043"/>
+            <a:ext cx="228600" cy="228600"/>
           </a:xfrm>
           <a:prstGeom prst="ellipse">
             <a:avLst/>
@@ -8351,7 +8243,7 @@
               <a:buNone/>
             </a:pPr>
             <a:r>
-              <a:rPr lang="en-US" sz="1050" b="1" dirty="0">
+              <a:rPr lang="en-US" sz="1000" b="1" dirty="0">
                 <a:solidFill>
                   <a:srgbClr val="FFFFFF"/>
                 </a:solidFill>
@@ -8361,7 +8253,7 @@
               </a:rPr>
               <a:t>3</a:t>
             </a:r>
-            <a:endParaRPr lang="en-US" sz="1050" dirty="0"/>
+            <a:endParaRPr lang="en-US" sz="1000" dirty="0"/>
           </a:p>
         </p:txBody>
       </p:sp>
@@ -8373,8 +8265,8 @@
         </p:nvSpPr>
         <p:spPr>
           <a:xfrm>
-            <a:off x="8939940" y="4590288"/>
-            <a:ext cx="2748835" cy="818388"/>
+            <a:off x="9960559" y="4335615"/>
+            <a:ext cx="1728216" cy="961726"/>
           </a:xfrm>
           <a:prstGeom prst="rect">
             <a:avLst/>
@@ -8393,7 +8285,7 @@
               <a:buNone/>
             </a:pPr>
             <a:r>
-              <a:rPr lang="en-US" sz="1350" b="1" dirty="0">
+              <a:rPr lang="en-US" sz="1300" b="1" dirty="0">
                 <a:solidFill>
                   <a:srgbClr val="0D1411"/>
                 </a:solidFill>
@@ -8401,19 +8293,16 @@
                 <a:ea typeface="Calibri" pitchFamily="34" charset="-122"/>
                 <a:cs typeface="Calibri" pitchFamily="34" charset="-120"/>
               </a:rPr>
-              <a:t>Harada yerləşir</a:t>
-            </a:r>
-            <a:endParaRPr lang="en-US" sz="1350" dirty="0"/>
-          </a:p>
-          <a:p>
-            <a:pPr indent="0" marL="0">
-              <a:spcAft>
-                <a:spcPts val="200"/>
-              </a:spcAft>
-              <a:buNone/>
-            </a:pPr>
-            <a:r>
-              <a:rPr lang="en-US" sz="1200" dirty="0">
+              <a:t>İndi nə becərir</a:t>
+            </a:r>
+            <a:endParaRPr lang="en-US" sz="1300" dirty="0"/>
+          </a:p>
+          <a:p>
+            <a:pPr indent="0" marL="0">
+              <a:buNone/>
+            </a:pPr>
+            <a:r>
+              <a:rPr lang="en-US" sz="1150" dirty="0">
                 <a:solidFill>
                   <a:srgbClr val="4A5852"/>
                 </a:solidFill>
@@ -8421,9 +8310,9 @@
                 <a:ea typeface="Calibri" pitchFamily="34" charset="-122"/>
                 <a:cs typeface="Calibri" pitchFamily="34" charset="-120"/>
               </a:rPr>
-              <a:t>Təsərrüfatın həqiqi sərhədi, peyk şəklində.</a:t>
-            </a:r>
-            <a:endParaRPr lang="en-US" sz="1350" dirty="0"/>
+              <a:t>Hər bitki və onun tutduğu torpaq.</a:t>
+            </a:r>
+            <a:endParaRPr lang="en-US" sz="1300" dirty="0"/>
           </a:p>
         </p:txBody>
       </p:sp>
@@ -8435,8 +8324,8 @@
         </p:nvSpPr>
         <p:spPr>
           <a:xfrm>
-            <a:off x="8560464" y="5477256"/>
-            <a:ext cx="246888" cy="246888"/>
+            <a:off x="9631375" y="5365922"/>
+            <a:ext cx="228600" cy="228600"/>
           </a:xfrm>
           <a:prstGeom prst="ellipse">
             <a:avLst/>
@@ -8458,7 +8347,7 @@
               <a:buNone/>
             </a:pPr>
             <a:r>
-              <a:rPr lang="en-US" sz="1050" b="1" dirty="0">
+              <a:rPr lang="en-US" sz="1000" b="1" dirty="0">
                 <a:solidFill>
                   <a:srgbClr val="FFFFFF"/>
                 </a:solidFill>
@@ -8468,7 +8357,7 @@
               </a:rPr>
               <a:t>4</a:t>
             </a:r>
-            <a:endParaRPr lang="en-US" sz="1050" dirty="0"/>
+            <a:endParaRPr lang="en-US" sz="1000" dirty="0"/>
           </a:p>
         </p:txBody>
       </p:sp>
@@ -8480,8 +8369,8 @@
         </p:nvSpPr>
         <p:spPr>
           <a:xfrm>
-            <a:off x="8939940" y="5481828"/>
-            <a:ext cx="2748835" cy="818388"/>
+            <a:off x="9960559" y="5370494"/>
+            <a:ext cx="1728216" cy="961726"/>
           </a:xfrm>
           <a:prstGeom prst="rect">
             <a:avLst/>
@@ -8500,7 +8389,7 @@
               <a:buNone/>
             </a:pPr>
             <a:r>
-              <a:rPr lang="en-US" sz="1350" b="1" dirty="0">
+              <a:rPr lang="en-US" sz="1300" b="1" dirty="0">
                 <a:solidFill>
                   <a:srgbClr val="0D1411"/>
                 </a:solidFill>
@@ -8508,19 +8397,16 @@
                 <a:ea typeface="Calibri" pitchFamily="34" charset="-122"/>
                 <a:cs typeface="Calibri" pitchFamily="34" charset="-120"/>
               </a:rPr>
-              <a:t>İndi nə becərir</a:t>
-            </a:r>
-            <a:endParaRPr lang="en-US" sz="1350" dirty="0"/>
-          </a:p>
-          <a:p>
-            <a:pPr indent="0" marL="0">
-              <a:spcAft>
-                <a:spcPts val="200"/>
-              </a:spcAft>
-              <a:buNone/>
-            </a:pPr>
-            <a:r>
-              <a:rPr lang="en-US" sz="1200" dirty="0">
+              <a:t>Ağacları</a:t>
+            </a:r>
+            <a:endParaRPr lang="en-US" sz="1300" dirty="0"/>
+          </a:p>
+          <a:p>
+            <a:pPr indent="0" marL="0">
+              <a:buNone/>
+            </a:pPr>
+            <a:r>
+              <a:rPr lang="en-US" sz="1150" dirty="0">
                 <a:solidFill>
                   <a:srgbClr val="4A5852"/>
                 </a:solidFill>
@@ -8528,9 +8414,9 @@
                 <a:ea typeface="Calibri" pitchFamily="34" charset="-122"/>
                 <a:cs typeface="Calibri" pitchFamily="34" charset="-120"/>
               </a:rPr>
-              <a:t>Hər bitki və onun tutduğu torpaq.</a:t>
-            </a:r>
-            <a:endParaRPr lang="en-US" sz="1350" dirty="0"/>
+              <a:t>Burada: 59 xurma palması, sağlamlıq balı 46.</a:t>
+            </a:r>
+            <a:endParaRPr lang="en-US" sz="1300" dirty="0"/>
           </a:p>
         </p:txBody>
       </p:sp>
@@ -8621,8 +8507,8 @@
         </p:blipFill>
         <p:spPr>
           <a:xfrm>
-            <a:off x="3955843" y="411480"/>
-            <a:ext cx="4280010" cy="6035040"/>
+            <a:off x="2788920" y="2168655"/>
+            <a:ext cx="6613855" cy="4029450"/>
           </a:xfrm>
           <a:prstGeom prst="rect">
             <a:avLst/>
@@ -8637,8 +8523,8 @@
         </p:nvSpPr>
         <p:spPr>
           <a:xfrm>
-            <a:off x="3968272" y="1883840"/>
-            <a:ext cx="246888" cy="246888"/>
+            <a:off x="3369353" y="3047533"/>
+            <a:ext cx="228600" cy="228600"/>
           </a:xfrm>
           <a:prstGeom prst="ellipse">
             <a:avLst/>
@@ -8660,7 +8546,7 @@
               <a:buNone/>
             </a:pPr>
             <a:r>
-              <a:rPr lang="en-US" sz="1050" b="1" dirty="0">
+              <a:rPr lang="en-US" sz="1000" b="1" dirty="0">
                 <a:solidFill>
                   <a:srgbClr val="FFFFFF"/>
                 </a:solidFill>
@@ -8670,7 +8556,7 @@
               </a:rPr>
               <a:t>1</a:t>
             </a:r>
-            <a:endParaRPr lang="en-US" sz="1050" dirty="0"/>
+            <a:endParaRPr lang="en-US" sz="1000" dirty="0"/>
           </a:p>
         </p:txBody>
       </p:sp>
@@ -8682,8 +8568,8 @@
         </p:nvSpPr>
         <p:spPr>
           <a:xfrm>
-            <a:off x="4047532" y="2439364"/>
-            <a:ext cx="246888" cy="246888"/>
+            <a:off x="3415668" y="3502004"/>
+            <a:ext cx="228600" cy="228600"/>
           </a:xfrm>
           <a:prstGeom prst="ellipse">
             <a:avLst/>
@@ -8705,7 +8591,7 @@
               <a:buNone/>
             </a:pPr>
             <a:r>
-              <a:rPr lang="en-US" sz="1050" b="1" dirty="0">
+              <a:rPr lang="en-US" sz="1000" b="1" dirty="0">
                 <a:solidFill>
                   <a:srgbClr val="FFFFFF"/>
                 </a:solidFill>
@@ -8715,7 +8601,7 @@
               </a:rPr>
               <a:t>2</a:t>
             </a:r>
-            <a:endParaRPr lang="en-US" sz="1050" dirty="0"/>
+            <a:endParaRPr lang="en-US" sz="1000" dirty="0"/>
           </a:p>
         </p:txBody>
       </p:sp>
@@ -8727,8 +8613,8 @@
         </p:nvSpPr>
         <p:spPr>
           <a:xfrm>
-            <a:off x="7999181" y="565444"/>
-            <a:ext cx="246888" cy="246888"/>
+            <a:off x="8512256" y="2479300"/>
+            <a:ext cx="228600" cy="228600"/>
           </a:xfrm>
           <a:prstGeom prst="ellipse">
             <a:avLst/>
@@ -8750,7 +8636,7 @@
               <a:buNone/>
             </a:pPr>
             <a:r>
-              <a:rPr lang="en-US" sz="1050" b="1" dirty="0">
+              <a:rPr lang="en-US" sz="1000" b="1" dirty="0">
                 <a:solidFill>
                   <a:srgbClr val="FFFFFF"/>
                 </a:solidFill>
@@ -8760,7 +8646,7 @@
               </a:rPr>
               <a:t>3</a:t>
             </a:r>
-            <a:endParaRPr lang="en-US" sz="1050" dirty="0"/>
+            <a:endParaRPr lang="en-US" sz="1000" dirty="0"/>
           </a:p>
         </p:txBody>
       </p:sp>
@@ -8772,8 +8658,8 @@
         </p:nvSpPr>
         <p:spPr>
           <a:xfrm>
-            <a:off x="3968272" y="3470444"/>
-            <a:ext cx="246888" cy="246888"/>
+            <a:off x="3369353" y="4345526"/>
+            <a:ext cx="228600" cy="228600"/>
           </a:xfrm>
           <a:prstGeom prst="ellipse">
             <a:avLst/>
@@ -8795,7 +8681,7 @@
               <a:buNone/>
             </a:pPr>
             <a:r>
-              <a:rPr lang="en-US" sz="1050" b="1" dirty="0">
+              <a:rPr lang="en-US" sz="1000" b="1" dirty="0">
                 <a:solidFill>
                   <a:srgbClr val="FFFFFF"/>
                 </a:solidFill>
@@ -8805,7 +8691,7 @@
               </a:rPr>
               <a:t>4</a:t>
             </a:r>
-            <a:endParaRPr lang="en-US" sz="1050" dirty="0"/>
+            <a:endParaRPr lang="en-US" sz="1000" dirty="0"/>
           </a:p>
         </p:txBody>
       </p:sp>
@@ -8817,8 +8703,8 @@
         </p:nvSpPr>
         <p:spPr>
           <a:xfrm>
-            <a:off x="502920" y="502920"/>
-            <a:ext cx="3132883" cy="237744"/>
+            <a:off x="502920" y="457200"/>
+            <a:ext cx="5410048" cy="237744"/>
           </a:xfrm>
           <a:prstGeom prst="rect">
             <a:avLst/>
@@ -8856,8 +8742,8 @@
         </p:nvSpPr>
         <p:spPr>
           <a:xfrm>
-            <a:off x="502920" y="786384"/>
-            <a:ext cx="3132883" cy="822960"/>
+            <a:off x="502920" y="731520"/>
+            <a:ext cx="5410048" cy="457200"/>
           </a:xfrm>
           <a:prstGeom prst="rect">
             <a:avLst/>
@@ -8895,8 +8781,8 @@
         </p:nvSpPr>
         <p:spPr>
           <a:xfrm>
-            <a:off x="502920" y="1664208"/>
-            <a:ext cx="3132883" cy="960120"/>
+            <a:off x="502920" y="1225296"/>
+            <a:ext cx="5410048" cy="585216"/>
           </a:xfrm>
           <a:prstGeom prst="rect">
             <a:avLst/>
@@ -8934,8 +8820,8 @@
         </p:nvSpPr>
         <p:spPr>
           <a:xfrm>
-            <a:off x="507492" y="2802636"/>
-            <a:ext cx="246888" cy="246888"/>
+            <a:off x="502920" y="2261286"/>
+            <a:ext cx="228600" cy="228600"/>
           </a:xfrm>
           <a:prstGeom prst="ellipse">
             <a:avLst/>
@@ -8957,7 +8843,7 @@
               <a:buNone/>
             </a:pPr>
             <a:r>
-              <a:rPr lang="en-US" sz="1050" b="1" dirty="0">
+              <a:rPr lang="en-US" sz="1000" b="1" dirty="0">
                 <a:solidFill>
                   <a:srgbClr val="FFFFFF"/>
                 </a:solidFill>
@@ -8967,7 +8853,7 @@
               </a:rPr>
               <a:t>1</a:t>
             </a:r>
-            <a:endParaRPr lang="en-US" sz="1050" dirty="0"/>
+            <a:endParaRPr lang="en-US" sz="1000" dirty="0"/>
           </a:p>
         </p:txBody>
       </p:sp>
@@ -8979,8 +8865,8 @@
         </p:nvSpPr>
         <p:spPr>
           <a:xfrm>
-            <a:off x="886968" y="2807208"/>
-            <a:ext cx="2748835" cy="818388"/>
+            <a:off x="832104" y="2265858"/>
+            <a:ext cx="1728216" cy="961726"/>
           </a:xfrm>
           <a:prstGeom prst="rect">
             <a:avLst/>
@@ -8999,7 +8885,7 @@
               <a:buNone/>
             </a:pPr>
             <a:r>
-              <a:rPr lang="en-US" sz="1350" b="1" dirty="0">
+              <a:rPr lang="en-US" sz="1300" b="1" dirty="0">
                 <a:solidFill>
                   <a:srgbClr val="0D1411"/>
                 </a:solidFill>
@@ -9009,17 +8895,14 @@
               </a:rPr>
               <a:t>Most urgent first</a:t>
             </a:r>
-            <a:endParaRPr lang="en-US" sz="1350" dirty="0"/>
-          </a:p>
-          <a:p>
-            <a:pPr indent="0" marL="0">
-              <a:spcAft>
-                <a:spcPts val="200"/>
-              </a:spcAft>
-              <a:buNone/>
-            </a:pPr>
-            <a:r>
-              <a:rPr lang="en-US" sz="1200" dirty="0">
+            <a:endParaRPr lang="en-US" sz="1300" dirty="0"/>
+          </a:p>
+          <a:p>
+            <a:pPr indent="0" marL="0">
+              <a:buNone/>
+            </a:pPr>
+            <a:r>
+              <a:rPr lang="en-US" sz="1150" dirty="0">
                 <a:solidFill>
                   <a:srgbClr val="4A5852"/>
                 </a:solidFill>
@@ -9027,9 +8910,9 @@
                 <a:ea typeface="Calibri" pitchFamily="34" charset="-122"/>
                 <a:cs typeface="Calibri" pitchFamily="34" charset="-120"/>
               </a:rPr>
-              <a:t>Each problem, with a short reason in plain words.</a:t>
-            </a:r>
-            <a:endParaRPr lang="en-US" sz="1350" dirty="0"/>
+              <a:t>Each problem, with a short reason.</a:t>
+            </a:r>
+            <a:endParaRPr lang="en-US" sz="1300" dirty="0"/>
           </a:p>
         </p:txBody>
       </p:sp>
@@ -9041,8 +8924,8 @@
         </p:nvSpPr>
         <p:spPr>
           <a:xfrm>
-            <a:off x="507492" y="3694176"/>
-            <a:ext cx="246888" cy="246888"/>
+            <a:off x="502920" y="3296165"/>
+            <a:ext cx="228600" cy="228600"/>
           </a:xfrm>
           <a:prstGeom prst="ellipse">
             <a:avLst/>
@@ -9064,7 +8947,7 @@
               <a:buNone/>
             </a:pPr>
             <a:r>
-              <a:rPr lang="en-US" sz="1050" b="1" dirty="0">
+              <a:rPr lang="en-US" sz="1000" b="1" dirty="0">
                 <a:solidFill>
                   <a:srgbClr val="FFFFFF"/>
                 </a:solidFill>
@@ -9074,7 +8957,7 @@
               </a:rPr>
               <a:t>2</a:t>
             </a:r>
-            <a:endParaRPr lang="en-US" sz="1050" dirty="0"/>
+            <a:endParaRPr lang="en-US" sz="1000" dirty="0"/>
           </a:p>
         </p:txBody>
       </p:sp>
@@ -9086,8 +8969,8 @@
         </p:nvSpPr>
         <p:spPr>
           <a:xfrm>
-            <a:off x="886968" y="3698748"/>
-            <a:ext cx="2748835" cy="818388"/>
+            <a:off x="832104" y="3300737"/>
+            <a:ext cx="1728216" cy="961726"/>
           </a:xfrm>
           <a:prstGeom prst="rect">
             <a:avLst/>
@@ -9106,7 +8989,7 @@
               <a:buNone/>
             </a:pPr>
             <a:r>
-              <a:rPr lang="en-US" sz="1350" b="1" dirty="0">
+              <a:rPr lang="en-US" sz="1300" b="1" dirty="0">
                 <a:solidFill>
                   <a:srgbClr val="0D1411"/>
                 </a:solidFill>
@@ -9116,17 +8999,14 @@
               </a:rPr>
               <a:t>What to do</a:t>
             </a:r>
-            <a:endParaRPr lang="en-US" sz="1350" dirty="0"/>
-          </a:p>
-          <a:p>
-            <a:pPr indent="0" marL="0">
-              <a:spcAft>
-                <a:spcPts val="200"/>
-              </a:spcAft>
-              <a:buNone/>
-            </a:pPr>
-            <a:r>
-              <a:rPr lang="en-US" sz="1200" dirty="0">
+            <a:endParaRPr lang="en-US" sz="1300" dirty="0"/>
+          </a:p>
+          <a:p>
+            <a:pPr indent="0" marL="0">
+              <a:buNone/>
+            </a:pPr>
+            <a:r>
+              <a:rPr lang="en-US" sz="1150" dirty="0">
                 <a:solidFill>
                   <a:srgbClr val="4A5852"/>
                 </a:solidFill>
@@ -9134,9 +9014,9 @@
                 <a:ea typeface="Calibri" pitchFamily="34" charset="-122"/>
                 <a:cs typeface="Calibri" pitchFamily="34" charset="-120"/>
               </a:rPr>
-              <a:t>Here: look for lack of water, salt in the soil, or pests.</a:t>
-            </a:r>
-            <a:endParaRPr lang="en-US" sz="1350" dirty="0"/>
+              <a:t>Look for lack of water, salt in the soil, or pests.</a:t>
+            </a:r>
+            <a:endParaRPr lang="en-US" sz="1300" dirty="0"/>
           </a:p>
         </p:txBody>
       </p:sp>
@@ -9148,8 +9028,8 @@
         </p:nvSpPr>
         <p:spPr>
           <a:xfrm>
-            <a:off x="507492" y="4585716"/>
-            <a:ext cx="246888" cy="246888"/>
+            <a:off x="502920" y="4331043"/>
+            <a:ext cx="228600" cy="228600"/>
           </a:xfrm>
           <a:prstGeom prst="ellipse">
             <a:avLst/>
@@ -9171,7 +9051,7 @@
               <a:buNone/>
             </a:pPr>
             <a:r>
-              <a:rPr lang="en-US" sz="1050" b="1" dirty="0">
+              <a:rPr lang="en-US" sz="1000" b="1" dirty="0">
                 <a:solidFill>
                   <a:srgbClr val="FFFFFF"/>
                 </a:solidFill>
@@ -9181,7 +9061,7 @@
               </a:rPr>
               <a:t>3</a:t>
             </a:r>
-            <a:endParaRPr lang="en-US" sz="1050" dirty="0"/>
+            <a:endParaRPr lang="en-US" sz="1000" dirty="0"/>
           </a:p>
         </p:txBody>
       </p:sp>
@@ -9193,8 +9073,8 @@
         </p:nvSpPr>
         <p:spPr>
           <a:xfrm>
-            <a:off x="886968" y="4590288"/>
-            <a:ext cx="2748835" cy="818388"/>
+            <a:off x="832104" y="4335615"/>
+            <a:ext cx="1728216" cy="961726"/>
           </a:xfrm>
           <a:prstGeom prst="rect">
             <a:avLst/>
@@ -9213,7 +9093,7 @@
               <a:buNone/>
             </a:pPr>
             <a:r>
-              <a:rPr lang="en-US" sz="1350" b="1" dirty="0">
+              <a:rPr lang="en-US" sz="1300" b="1" dirty="0">
                 <a:solidFill>
                   <a:srgbClr val="0D1411"/>
                 </a:solidFill>
@@ -9223,17 +9103,14 @@
               </a:rPr>
               <a:t>Take it to the farm</a:t>
             </a:r>
-            <a:endParaRPr lang="en-US" sz="1350" dirty="0"/>
-          </a:p>
-          <a:p>
-            <a:pPr indent="0" marL="0">
-              <a:spcAft>
-                <a:spcPts val="200"/>
-              </a:spcAft>
-              <a:buNone/>
-            </a:pPr>
-            <a:r>
-              <a:rPr lang="en-US" sz="1200" dirty="0">
+            <a:endParaRPr lang="en-US" sz="1300" dirty="0"/>
+          </a:p>
+          <a:p>
+            <a:pPr indent="0" marL="0">
+              <a:buNone/>
+            </a:pPr>
+            <a:r>
+              <a:rPr lang="en-US" sz="1150" dirty="0">
                 <a:solidFill>
                   <a:srgbClr val="4A5852"/>
                 </a:solidFill>
@@ -9243,7 +9120,7 @@
               </a:rPr>
               <a:t>Print one page for the visit.</a:t>
             </a:r>
-            <a:endParaRPr lang="en-US" sz="1350" dirty="0"/>
+            <a:endParaRPr lang="en-US" sz="1300" dirty="0"/>
           </a:p>
         </p:txBody>
       </p:sp>
@@ -9255,8 +9132,8 @@
         </p:nvSpPr>
         <p:spPr>
           <a:xfrm>
-            <a:off x="507492" y="5477256"/>
-            <a:ext cx="246888" cy="246888"/>
+            <a:off x="502920" y="5365922"/>
+            <a:ext cx="228600" cy="228600"/>
           </a:xfrm>
           <a:prstGeom prst="ellipse">
             <a:avLst/>
@@ -9278,7 +9155,7 @@
               <a:buNone/>
             </a:pPr>
             <a:r>
-              <a:rPr lang="en-US" sz="1050" b="1" dirty="0">
+              <a:rPr lang="en-US" sz="1000" b="1" dirty="0">
                 <a:solidFill>
                   <a:srgbClr val="FFFFFF"/>
                 </a:solidFill>
@@ -9288,7 +9165,7 @@
               </a:rPr>
               <a:t>4</a:t>
             </a:r>
-            <a:endParaRPr lang="en-US" sz="1050" dirty="0"/>
+            <a:endParaRPr lang="en-US" sz="1000" dirty="0"/>
           </a:p>
         </p:txBody>
       </p:sp>
@@ -9300,8 +9177,8 @@
         </p:nvSpPr>
         <p:spPr>
           <a:xfrm>
-            <a:off x="886968" y="5481828"/>
-            <a:ext cx="2748835" cy="818388"/>
+            <a:off x="832104" y="5370494"/>
+            <a:ext cx="1728216" cy="961726"/>
           </a:xfrm>
           <a:prstGeom prst="rect">
             <a:avLst/>
@@ -9320,7 +9197,7 @@
               <a:buNone/>
             </a:pPr>
             <a:r>
-              <a:rPr lang="en-US" sz="1350" b="1" dirty="0">
+              <a:rPr lang="en-US" sz="1300" b="1" dirty="0">
                 <a:solidFill>
                   <a:srgbClr val="0D1411"/>
                 </a:solidFill>
@@ -9330,17 +9207,14 @@
               </a:rPr>
               <a:t>A possible cause</a:t>
             </a:r>
-            <a:endParaRPr lang="en-US" sz="1350" dirty="0"/>
-          </a:p>
-          <a:p>
-            <a:pPr indent="0" marL="0">
-              <a:spcAft>
-                <a:spcPts val="200"/>
-              </a:spcAft>
-              <a:buNone/>
-            </a:pPr>
-            <a:r>
-              <a:rPr lang="en-US" sz="1200" dirty="0">
+            <a:endParaRPr lang="en-US" sz="1300" dirty="0"/>
+          </a:p>
+          <a:p>
+            <a:pPr indent="0" marL="0">
+              <a:buNone/>
+            </a:pPr>
+            <a:r>
+              <a:rPr lang="en-US" sz="1150" dirty="0">
                 <a:solidFill>
                   <a:srgbClr val="4A5852"/>
                 </a:solidFill>
@@ -9348,9 +9222,9 @@
                 <a:ea typeface="Calibri" pitchFamily="34" charset="-122"/>
                 <a:cs typeface="Calibri" pitchFamily="34" charset="-120"/>
               </a:rPr>
-              <a:t>Here the farm used only 70% of the water it is allowed.</a:t>
-            </a:r>
-            <a:endParaRPr lang="en-US" sz="1350" dirty="0"/>
+              <a:t>The farm used only 70% of the water it is allowed.</a:t>
+            </a:r>
+            <a:endParaRPr lang="en-US" sz="1300" dirty="0"/>
           </a:p>
         </p:txBody>
       </p:sp>
@@ -9362,8 +9236,8 @@
         </p:nvSpPr>
         <p:spPr>
           <a:xfrm>
-            <a:off x="8555892" y="502920"/>
-            <a:ext cx="3132883" cy="237744"/>
+            <a:off x="6278728" y="457200"/>
+            <a:ext cx="5410048" cy="237744"/>
           </a:xfrm>
           <a:prstGeom prst="rect">
             <a:avLst/>
@@ -9401,8 +9275,8 @@
         </p:nvSpPr>
         <p:spPr>
           <a:xfrm>
-            <a:off x="8555892" y="786384"/>
-            <a:ext cx="3132883" cy="822960"/>
+            <a:off x="6278728" y="731520"/>
+            <a:ext cx="5410048" cy="457200"/>
           </a:xfrm>
           <a:prstGeom prst="rect">
             <a:avLst/>
@@ -9440,8 +9314,8 @@
         </p:nvSpPr>
         <p:spPr>
           <a:xfrm>
-            <a:off x="8555892" y="1664208"/>
-            <a:ext cx="3132883" cy="960120"/>
+            <a:off x="6278728" y="1225296"/>
+            <a:ext cx="5410048" cy="585216"/>
           </a:xfrm>
           <a:prstGeom prst="rect">
             <a:avLst/>
@@ -9479,8 +9353,8 @@
         </p:nvSpPr>
         <p:spPr>
           <a:xfrm>
-            <a:off x="8560464" y="2802636"/>
-            <a:ext cx="246888" cy="246888"/>
+            <a:off x="9631375" y="2261286"/>
+            <a:ext cx="228600" cy="228600"/>
           </a:xfrm>
           <a:prstGeom prst="ellipse">
             <a:avLst/>
@@ -9502,7 +9376,7 @@
               <a:buNone/>
             </a:pPr>
             <a:r>
-              <a:rPr lang="en-US" sz="1050" b="1" dirty="0">
+              <a:rPr lang="en-US" sz="1000" b="1" dirty="0">
                 <a:solidFill>
                   <a:srgbClr val="FFFFFF"/>
                 </a:solidFill>
@@ -9512,7 +9386,7 @@
               </a:rPr>
               <a:t>1</a:t>
             </a:r>
-            <a:endParaRPr lang="en-US" sz="1050" dirty="0"/>
+            <a:endParaRPr lang="en-US" sz="1000" dirty="0"/>
           </a:p>
         </p:txBody>
       </p:sp>
@@ -9524,8 +9398,8 @@
         </p:nvSpPr>
         <p:spPr>
           <a:xfrm>
-            <a:off x="8939940" y="2807208"/>
-            <a:ext cx="2748835" cy="818388"/>
+            <a:off x="9960559" y="2265858"/>
+            <a:ext cx="1728216" cy="961726"/>
           </a:xfrm>
           <a:prstGeom prst="rect">
             <a:avLst/>
@@ -9544,7 +9418,7 @@
               <a:buNone/>
             </a:pPr>
             <a:r>
-              <a:rPr lang="en-US" sz="1350" b="1" dirty="0">
+              <a:rPr lang="en-US" sz="1300" b="1" dirty="0">
                 <a:solidFill>
                   <a:srgbClr val="0D1411"/>
                 </a:solidFill>
@@ -9554,17 +9428,14 @@
               </a:rPr>
               <a:t>Ən təcili birinci</a:t>
             </a:r>
-            <a:endParaRPr lang="en-US" sz="1350" dirty="0"/>
-          </a:p>
-          <a:p>
-            <a:pPr indent="0" marL="0">
-              <a:spcAft>
-                <a:spcPts val="200"/>
-              </a:spcAft>
-              <a:buNone/>
-            </a:pPr>
-            <a:r>
-              <a:rPr lang="en-US" sz="1200" dirty="0">
+            <a:endParaRPr lang="en-US" sz="1300" dirty="0"/>
+          </a:p>
+          <a:p>
+            <a:pPr indent="0" marL="0">
+              <a:buNone/>
+            </a:pPr>
+            <a:r>
+              <a:rPr lang="en-US" sz="1150" dirty="0">
                 <a:solidFill>
                   <a:srgbClr val="4A5852"/>
                 </a:solidFill>
@@ -9572,9 +9443,9 @@
                 <a:ea typeface="Calibri" pitchFamily="34" charset="-122"/>
                 <a:cs typeface="Calibri" pitchFamily="34" charset="-120"/>
               </a:rPr>
-              <a:t>Hər problem və sadə sözlərlə qısa səbəbi.</a:t>
-            </a:r>
-            <a:endParaRPr lang="en-US" sz="1350" dirty="0"/>
+              <a:t>Hər problem və qısa səbəbi.</a:t>
+            </a:r>
+            <a:endParaRPr lang="en-US" sz="1300" dirty="0"/>
           </a:p>
         </p:txBody>
       </p:sp>
@@ -9586,8 +9457,8 @@
         </p:nvSpPr>
         <p:spPr>
           <a:xfrm>
-            <a:off x="8560464" y="3694176"/>
-            <a:ext cx="246888" cy="246888"/>
+            <a:off x="9631375" y="3296165"/>
+            <a:ext cx="228600" cy="228600"/>
           </a:xfrm>
           <a:prstGeom prst="ellipse">
             <a:avLst/>
@@ -9609,7 +9480,7 @@
               <a:buNone/>
             </a:pPr>
             <a:r>
-              <a:rPr lang="en-US" sz="1050" b="1" dirty="0">
+              <a:rPr lang="en-US" sz="1000" b="1" dirty="0">
                 <a:solidFill>
                   <a:srgbClr val="FFFFFF"/>
                 </a:solidFill>
@@ -9619,7 +9490,7 @@
               </a:rPr>
               <a:t>2</a:t>
             </a:r>
-            <a:endParaRPr lang="en-US" sz="1050" dirty="0"/>
+            <a:endParaRPr lang="en-US" sz="1000" dirty="0"/>
           </a:p>
         </p:txBody>
       </p:sp>
@@ -9631,8 +9502,8 @@
         </p:nvSpPr>
         <p:spPr>
           <a:xfrm>
-            <a:off x="8939940" y="3698748"/>
-            <a:ext cx="2748835" cy="818388"/>
+            <a:off x="9960559" y="3300737"/>
+            <a:ext cx="1728216" cy="961726"/>
           </a:xfrm>
           <a:prstGeom prst="rect">
             <a:avLst/>
@@ -9651,7 +9522,7 @@
               <a:buNone/>
             </a:pPr>
             <a:r>
-              <a:rPr lang="en-US" sz="1350" b="1" dirty="0">
+              <a:rPr lang="en-US" sz="1300" b="1" dirty="0">
                 <a:solidFill>
                   <a:srgbClr val="0D1411"/>
                 </a:solidFill>
@@ -9661,17 +9532,14 @@
               </a:rPr>
               <a:t>Nə etməli</a:t>
             </a:r>
-            <a:endParaRPr lang="en-US" sz="1350" dirty="0"/>
-          </a:p>
-          <a:p>
-            <a:pPr indent="0" marL="0">
-              <a:spcAft>
-                <a:spcPts val="200"/>
-              </a:spcAft>
-              <a:buNone/>
-            </a:pPr>
-            <a:r>
-              <a:rPr lang="en-US" sz="1200" dirty="0">
+            <a:endParaRPr lang="en-US" sz="1300" dirty="0"/>
+          </a:p>
+          <a:p>
+            <a:pPr indent="0" marL="0">
+              <a:buNone/>
+            </a:pPr>
+            <a:r>
+              <a:rPr lang="en-US" sz="1150" dirty="0">
                 <a:solidFill>
                   <a:srgbClr val="4A5852"/>
                 </a:solidFill>
@@ -9679,9 +9547,9 @@
                 <a:ea typeface="Calibri" pitchFamily="34" charset="-122"/>
                 <a:cs typeface="Calibri" pitchFamily="34" charset="-120"/>
               </a:rPr>
-              <a:t>Burada: su çatışmazlığını, torpaqda duzu və ya zərərvericiləri axtarın.</a:t>
-            </a:r>
-            <a:endParaRPr lang="en-US" sz="1350" dirty="0"/>
+              <a:t>Su çatışmazlığını, torpaqda duzu və ya zərərvericiləri axtarın.</a:t>
+            </a:r>
+            <a:endParaRPr lang="en-US" sz="1300" dirty="0"/>
           </a:p>
         </p:txBody>
       </p:sp>
@@ -9693,8 +9561,8 @@
         </p:nvSpPr>
         <p:spPr>
           <a:xfrm>
-            <a:off x="8560464" y="4585716"/>
-            <a:ext cx="246888" cy="246888"/>
+            <a:off x="9631375" y="4331043"/>
+            <a:ext cx="228600" cy="228600"/>
           </a:xfrm>
           <a:prstGeom prst="ellipse">
             <a:avLst/>
@@ -9716,7 +9584,7 @@
               <a:buNone/>
             </a:pPr>
             <a:r>
-              <a:rPr lang="en-US" sz="1050" b="1" dirty="0">
+              <a:rPr lang="en-US" sz="1000" b="1" dirty="0">
                 <a:solidFill>
                   <a:srgbClr val="FFFFFF"/>
                 </a:solidFill>
@@ -9726,7 +9594,7 @@
               </a:rPr>
               <a:t>3</a:t>
             </a:r>
-            <a:endParaRPr lang="en-US" sz="1050" dirty="0"/>
+            <a:endParaRPr lang="en-US" sz="1000" dirty="0"/>
           </a:p>
         </p:txBody>
       </p:sp>
@@ -9738,8 +9606,8 @@
         </p:nvSpPr>
         <p:spPr>
           <a:xfrm>
-            <a:off x="8939940" y="4590288"/>
-            <a:ext cx="2748835" cy="818388"/>
+            <a:off x="9960559" y="4335615"/>
+            <a:ext cx="1728216" cy="961726"/>
           </a:xfrm>
           <a:prstGeom prst="rect">
             <a:avLst/>
@@ -9758,7 +9626,7 @@
               <a:buNone/>
             </a:pPr>
             <a:r>
-              <a:rPr lang="en-US" sz="1350" b="1" dirty="0">
+              <a:rPr lang="en-US" sz="1300" b="1" dirty="0">
                 <a:solidFill>
                   <a:srgbClr val="0D1411"/>
                 </a:solidFill>
@@ -9768,17 +9636,14 @@
               </a:rPr>
               <a:t>Təsərrüfata aparın</a:t>
             </a:r>
-            <a:endParaRPr lang="en-US" sz="1350" dirty="0"/>
-          </a:p>
-          <a:p>
-            <a:pPr indent="0" marL="0">
-              <a:spcAft>
-                <a:spcPts val="200"/>
-              </a:spcAft>
-              <a:buNone/>
-            </a:pPr>
-            <a:r>
-              <a:rPr lang="en-US" sz="1200" dirty="0">
+            <a:endParaRPr lang="en-US" sz="1300" dirty="0"/>
+          </a:p>
+          <a:p>
+            <a:pPr indent="0" marL="0">
+              <a:buNone/>
+            </a:pPr>
+            <a:r>
+              <a:rPr lang="en-US" sz="1150" dirty="0">
                 <a:solidFill>
                   <a:srgbClr val="4A5852"/>
                 </a:solidFill>
@@ -9788,7 +9653,7 @@
               </a:rPr>
               <a:t>Ziyarət üçün bir səhifə çap edin.</a:t>
             </a:r>
-            <a:endParaRPr lang="en-US" sz="1350" dirty="0"/>
+            <a:endParaRPr lang="en-US" sz="1300" dirty="0"/>
           </a:p>
         </p:txBody>
       </p:sp>
@@ -9800,8 +9665,8 @@
         </p:nvSpPr>
         <p:spPr>
           <a:xfrm>
-            <a:off x="8560464" y="5477256"/>
-            <a:ext cx="246888" cy="246888"/>
+            <a:off x="9631375" y="5365922"/>
+            <a:ext cx="228600" cy="228600"/>
           </a:xfrm>
           <a:prstGeom prst="ellipse">
             <a:avLst/>
@@ -9823,7 +9688,7 @@
               <a:buNone/>
             </a:pPr>
             <a:r>
-              <a:rPr lang="en-US" sz="1050" b="1" dirty="0">
+              <a:rPr lang="en-US" sz="1000" b="1" dirty="0">
                 <a:solidFill>
                   <a:srgbClr val="FFFFFF"/>
                 </a:solidFill>
@@ -9833,7 +9698,7 @@
               </a:rPr>
               <a:t>4</a:t>
             </a:r>
-            <a:endParaRPr lang="en-US" sz="1050" dirty="0"/>
+            <a:endParaRPr lang="en-US" sz="1000" dirty="0"/>
           </a:p>
         </p:txBody>
       </p:sp>
@@ -9845,8 +9710,8 @@
         </p:nvSpPr>
         <p:spPr>
           <a:xfrm>
-            <a:off x="8939940" y="5481828"/>
-            <a:ext cx="2748835" cy="818388"/>
+            <a:off x="9960559" y="5370494"/>
+            <a:ext cx="1728216" cy="961726"/>
           </a:xfrm>
           <a:prstGeom prst="rect">
             <a:avLst/>
@@ -9865,7 +9730,7 @@
               <a:buNone/>
             </a:pPr>
             <a:r>
-              <a:rPr lang="en-US" sz="1350" b="1" dirty="0">
+              <a:rPr lang="en-US" sz="1300" b="1" dirty="0">
                 <a:solidFill>
                   <a:srgbClr val="0D1411"/>
                 </a:solidFill>
@@ -9875,17 +9740,14 @@
               </a:rPr>
               <a:t>Mümkün səbəb</a:t>
             </a:r>
-            <a:endParaRPr lang="en-US" sz="1350" dirty="0"/>
-          </a:p>
-          <a:p>
-            <a:pPr indent="0" marL="0">
-              <a:spcAft>
-                <a:spcPts val="200"/>
-              </a:spcAft>
-              <a:buNone/>
-            </a:pPr>
-            <a:r>
-              <a:rPr lang="en-US" sz="1200" dirty="0">
+            <a:endParaRPr lang="en-US" sz="1300" dirty="0"/>
+          </a:p>
+          <a:p>
+            <a:pPr indent="0" marL="0">
+              <a:buNone/>
+            </a:pPr>
+            <a:r>
+              <a:rPr lang="en-US" sz="1150" dirty="0">
                 <a:solidFill>
                   <a:srgbClr val="4A5852"/>
                 </a:solidFill>
@@ -9893,9 +9755,9 @@
                 <a:ea typeface="Calibri" pitchFamily="34" charset="-122"/>
                 <a:cs typeface="Calibri" pitchFamily="34" charset="-120"/>
               </a:rPr>
-              <a:t>Burada təsərrüfat ona ayrılan suyun yalnız 70 faizini istifadə edib.</a:t>
-            </a:r>
-            <a:endParaRPr lang="en-US" sz="1350" dirty="0"/>
+              <a:t>Təsərrüfat ona ayrılan suyun yalnız 70 faizini istifadə edib.</a:t>
+            </a:r>
+            <a:endParaRPr lang="en-US" sz="1300" dirty="0"/>
           </a:p>
         </p:txBody>
       </p:sp>

--- a/docs/ADAFSA_Platform_Tour_EN_AZ.pptx
+++ b/docs/ADAFSA_Platform_Tour_EN_AZ.pptx
@@ -602,15 +602,15 @@
               <a:rPr lang="en-US" dirty="0"/>
               <a:t>All your farms on one page
 The first page. It shows what is grown in the whole region, and where.
-1. The menu — Every part of the website. Point at an icon to see its pages.
-2. Choose what to count — A region, and the crop groups.
-3. The big numbers — Farms, land, and land in use. 10 dunums = 1 hectare.
+1. The menu — Flexible modules and in-depth navigation.
+2. Extensive filtering — Analyse farms that grow specific crops or trees.
+3. At a glance metrics — Understand how many farms are tracked, and how much area is being used.
 4. Where the farms are — Each circle is a group of farms. Zoom in to split it.
 Bütün təsərrüfatlar bir səhifədə
 İlk səhifə. Bütün bölgədə nəyin və harada becərildiyini göstərir.
-1. Menyu — Saytın bütün bölmələri. Səhifələri görmək üçün ikonun üzərinə gəlin.
-2. Nəyi sayacağınızı seçin — Bölgə və bitki qrupları.
-3. Əsas rəqəmlər — Təsərrüfatlar, torpaq və istifadə olunan torpaq. 10 dönüm = 1 hektar.
+1. Menyu — Çevik modullar və ətraflı naviqasiya.
+2. Geniş filtrləmə — Müəyyən bitki və ya ağac becərən təsərrüfatları təhlil edin.
+3. Bir baxışda göstəricilər — Neçə təsərrüfatın izləndiyini və nə qədər ərazinin istifadə olunduğunu anlayın.
 4. Təsərrüfatlar haradadır — Hər dairə bir qrup təsərrüfatdır. Bölmək üçün yaxınlaşdırın.</a:t>
             </a:r>
             <a:endParaRPr lang="en-US" dirty="0"/>
@@ -701,14 +701,12 @@
               <a:rPr lang="en-US" dirty="0"/>
               <a:t>What grows where
 The field crops on every farm: which crop, on how much land, and on which farm.
-1. Open a crop group — Tick a group, or open it to pick one crop.
+1. Filter specific crop groups — Tick a group, or open it to pick specific crops.
 2. Coloured by crop — Each dot is a farm, in the colour of its main crop.
-3. Land for each crop — Dunums and share. Click a group to see its crops.
 Harada nə becərilir
 Hər təsərrüfatda tarla bitkiləri: hansı bitki, nə qədər torpaqda və hansı təsərrüfatda.
-1. Bitki qrupunu açın — Qrupu seçin və ya açıb bir bitki seçin.
-2. Bitkiyə görə rəng — Hər nöqtə bir təsərrüfatdır, əsas bitkisinin rəngində.
-3. Hər bitkinin torpağı — Dönüm və pay. Bitkiləri görmək üçün qrupa klikləyin.</a:t>
+1. Bitki qruplarını filtrləyin — Qrupu seçin və ya açıb konkret bitkiləri seçin.
+2. Bitkiyə görə rəng — Hər nöqtə bir təsərrüfatdır, əsas bitkisinin rəngində.</a:t>
             </a:r>
             <a:endParaRPr lang="en-US" dirty="0"/>
           </a:p>
@@ -798,16 +796,12 @@
               <a:rPr lang="en-US" dirty="0"/>
               <a:t>Every tree, in every orchard
 The satellite finds each tree, counts it, and tells its kind.
-1. All trees, counted — Date palms, fruit trees and forest trees.
+1. All trees, counted — From fruit trees to forest trees.
 2. One dot, one tree — Zoom in to a farm. The colour of a dot is its variety.
-3. Which variety — Each colour is one variety of palm or fruit tree.
-4. Land under trees — Dunums of palms, fruit trees and forest trees.
 Hər bağda hər ağac
 Peyk hər ağacı tapır, sayır və onun növünü deyir.
-1. Bütün ağaclar sayılır — Xurma palmaları, meyvə və meşə ağacları.
-2. Bir nöqtə, bir ağac — Təsərrüfata yaxınlaşın. Nöqtənin rəngi sortu göstərir.
-3. Hansı sort — Hər rəng bir xurma və ya meyvə ağacı sortudur.
-4. Ağacların torpağı — Xurma, meyvə və meşə ağaclarının dönümü.</a:t>
+1. Bütün ağaclar sayılır — Meyvə ağaclarından meşə ağaclarına qədər.
+2. Bir nöqtə, bir ağac — Təsərrüfata yaxınlaşın. Nöqtənin rəngi sortu göstərir.</a:t>
             </a:r>
             <a:endParaRPr lang="en-US" dirty="0"/>
           </a:p>
@@ -897,14 +891,14 @@
               <a:rPr lang="en-US" dirty="0"/>
               <a:t>Plant health, farm by farm
 The satellite measures how green and strong the trees are. A low score is an early warning.
-1. A score from 0 to 100 — For palms and fruit trees. 80 or more is healthy.
-2. Who to visit first — Here: 6 farms have very stressed trees.
+1. A score from 0 to 100 — For crops and fruit trees.
+2. Who to visit first — Here: 6 farms have very stressed crops.
 3. Four levels — Healthy, fair, stressed, very stressed.
 4. Health on the map — The score of each area. Zoom in to see each farm.
 Hər təsərrüfatda bitki sağlamlığı
 Peyk ağacların nə qədər yaşıl və güclü olduğunu ölçür. Aşağı bal erkən xəbərdarlıqdır.
-1. 0-dan 100-ə qədər bal — Xurma və meyvə ağacları üçün. 80 və yuxarı sağlamdır.
-2. Əvvəlcə kimə baş çəkmək — Burada: 6 təsərrüfatda ağaclar çox zəifdir.
+1. 0-dan 100-ə qədər bal — Əkinlər və meyvə ağacları üçün.
+2. Əvvəlcə kimə baş çəkmək — Burada: 6 təsərrüfatda əkinlər çox zəifdir.
 3. Dörd səviyyə — Sağlam, orta, zəif, çox zəif.
 4. Xəritədə sağlamlıq — Hər ərazinin balı. Hər təsərrüfatı görmək üçün yaxınlaşdırın.</a:t>
             </a:r>
@@ -1098,13 +1092,11 @@
 1. Most urgent first — Each problem, with a short reason.
 2. What to do — Look for lack of water, salt in the soil, or pests.
 3. Take it to the farm — Print one page for the visit.
-4. A possible cause — The farm used only 70% of the water it is allowed.
 Baldan təsərrüfat ziyarətinə
 Bu təsərrüfatda nəyi yoxlamaq lazımdır. Sayt xəstəliyin adını demir. Harada baxmağı göstərir.
 1. Ən təcili birinci — Hər problem və qısa səbəbi.
 2. Nə etməli — Su çatışmazlığını, torpaqda duzu və ya zərərvericiləri axtarın.
-3. Təsərrüfata aparın — Ziyarət üçün bir səhifə çap edin.
-4. Mümkün səbəb — Təsərrüfat ona ayrılan suyun yalnız 70 faizini istifadə edib.</a:t>
+3. Təsərrüfata aparın — Ziyarət üçün bir səhifə çap edin.</a:t>
             </a:r>
             <a:endParaRPr lang="en-US" dirty="0"/>
           </a:p>
@@ -2458,7 +2450,7 @@
                 <a:ea typeface="Calibri" pitchFamily="34" charset="-122"/>
                 <a:cs typeface="Calibri" pitchFamily="34" charset="-120"/>
               </a:rPr>
-              <a:t>Every part of the website. Point at an icon to see its pages.</a:t>
+              <a:t>Flexible modules and in-depth navigation.</a:t>
             </a:r>
             <a:endParaRPr lang="en-US" sz="1300" dirty="0"/>
           </a:p>
@@ -2545,7 +2537,7 @@
                 <a:ea typeface="Calibri" pitchFamily="34" charset="-122"/>
                 <a:cs typeface="Calibri" pitchFamily="34" charset="-120"/>
               </a:rPr>
-              <a:t>Choose what to count</a:t>
+              <a:t>Extensive filtering</a:t>
             </a:r>
             <a:endParaRPr lang="en-US" sz="1300" dirty="0"/>
           </a:p>
@@ -2562,7 +2554,7 @@
                 <a:ea typeface="Calibri" pitchFamily="34" charset="-122"/>
                 <a:cs typeface="Calibri" pitchFamily="34" charset="-120"/>
               </a:rPr>
-              <a:t>A region, and the crop groups.</a:t>
+              <a:t>Analyse farms that grow specific crops or trees.</a:t>
             </a:r>
             <a:endParaRPr lang="en-US" sz="1300" dirty="0"/>
           </a:p>
@@ -2649,7 +2641,7 @@
                 <a:ea typeface="Calibri" pitchFamily="34" charset="-122"/>
                 <a:cs typeface="Calibri" pitchFamily="34" charset="-120"/>
               </a:rPr>
-              <a:t>The big numbers</a:t>
+              <a:t>At a glance metrics</a:t>
             </a:r>
             <a:endParaRPr lang="en-US" sz="1300" dirty="0"/>
           </a:p>
@@ -2666,7 +2658,7 @@
                 <a:ea typeface="Calibri" pitchFamily="34" charset="-122"/>
                 <a:cs typeface="Calibri" pitchFamily="34" charset="-120"/>
               </a:rPr>
-              <a:t>Farms, land, and land in use. 10 dunums = 1 hectare.</a:t>
+              <a:t>Understand how many farms are tracked, and how much area is being used.</a:t>
             </a:r>
             <a:endParaRPr lang="en-US" sz="1300" dirty="0"/>
           </a:p>
@@ -2991,7 +2983,7 @@
                 <a:ea typeface="Calibri" pitchFamily="34" charset="-122"/>
                 <a:cs typeface="Calibri" pitchFamily="34" charset="-120"/>
               </a:rPr>
-              <a:t>Saytın bütün bölmələri. Səhifələri görmək üçün ikonun üzərinə gəlin.</a:t>
+              <a:t>Çevik modullar və ətraflı naviqasiya.</a:t>
             </a:r>
             <a:endParaRPr lang="en-US" sz="1300" dirty="0"/>
           </a:p>
@@ -3078,7 +3070,7 @@
                 <a:ea typeface="Calibri" pitchFamily="34" charset="-122"/>
                 <a:cs typeface="Calibri" pitchFamily="34" charset="-120"/>
               </a:rPr>
-              <a:t>Nəyi sayacağınızı seçin</a:t>
+              <a:t>Geniş filtrləmə</a:t>
             </a:r>
             <a:endParaRPr lang="en-US" sz="1300" dirty="0"/>
           </a:p>
@@ -3095,7 +3087,7 @@
                 <a:ea typeface="Calibri" pitchFamily="34" charset="-122"/>
                 <a:cs typeface="Calibri" pitchFamily="34" charset="-120"/>
               </a:rPr>
-              <a:t>Bölgə və bitki qrupları.</a:t>
+              <a:t>Müəyyən bitki və ya ağac becərən təsərrüfatları təhlil edin.</a:t>
             </a:r>
             <a:endParaRPr lang="en-US" sz="1300" dirty="0"/>
           </a:p>
@@ -3182,7 +3174,7 @@
                 <a:ea typeface="Calibri" pitchFamily="34" charset="-122"/>
                 <a:cs typeface="Calibri" pitchFamily="34" charset="-120"/>
               </a:rPr>
-              <a:t>Əsas rəqəmlər</a:t>
+              <a:t>Bir baxışda göstəricilər</a:t>
             </a:r>
             <a:endParaRPr lang="en-US" sz="1300" dirty="0"/>
           </a:p>
@@ -3199,7 +3191,7 @@
                 <a:ea typeface="Calibri" pitchFamily="34" charset="-122"/>
                 <a:cs typeface="Calibri" pitchFamily="34" charset="-120"/>
               </a:rPr>
-              <a:t>Təsərrüfatlar, torpaq və istifadə olunan torpaq. 10 dönüm = 1 hektar.</a:t>
+              <a:t>Neçə təsərrüfatın izləndiyini və nə qədər ərazinin istifadə olunduğunu anlayın.</a:t>
             </a:r>
             <a:endParaRPr lang="en-US" sz="1300" dirty="0"/>
           </a:p>
@@ -3502,7 +3494,124 @@
         </p:nvSpPr>
         <p:spPr>
           <a:xfrm>
-            <a:off x="3369353" y="5533519"/>
+            <a:off x="502920" y="457200"/>
+            <a:ext cx="5410048" cy="237744"/>
+          </a:xfrm>
+          <a:prstGeom prst="rect">
+            <a:avLst/>
+          </a:prstGeom>
+          <a:noFill/>
+          <a:ln/>
+        </p:spPr>
+        <p:txBody>
+          <a:bodyPr wrap="square" lIns="0" tIns="0" rIns="0" bIns="0" rtlCol="0" anchor="ctr"/>
+          <a:lstStyle/>
+          <a:p>
+            <a:pPr indent="0" marL="0">
+              <a:buNone/>
+            </a:pPr>
+            <a:r>
+              <a:rPr lang="en-US" sz="1000" b="1" spc="200" kern="0" dirty="0">
+                <a:solidFill>
+                  <a:srgbClr val="1B7350"/>
+                </a:solidFill>
+                <a:latin typeface="Calibri" pitchFamily="34" charset="0"/>
+                <a:ea typeface="Calibri" pitchFamily="34" charset="-122"/>
+                <a:cs typeface="Calibri" pitchFamily="34" charset="-120"/>
+              </a:rPr>
+              <a:t>ENGLISH</a:t>
+            </a:r>
+            <a:endParaRPr lang="en-US" sz="1000" dirty="0"/>
+          </a:p>
+        </p:txBody>
+      </p:sp>
+      <p:sp>
+        <p:nvSpPr>
+          <p:cNvPr id="6" name="Text 3"/>
+          <p:cNvSpPr txBox="1"/>
+          <p:nvPr/>
+        </p:nvSpPr>
+        <p:spPr>
+          <a:xfrm>
+            <a:off x="502920" y="731520"/>
+            <a:ext cx="5410048" cy="457200"/>
+          </a:xfrm>
+          <a:prstGeom prst="rect">
+            <a:avLst/>
+          </a:prstGeom>
+          <a:noFill/>
+          <a:ln/>
+        </p:spPr>
+        <p:txBody>
+          <a:bodyPr wrap="square" lIns="0" tIns="0" rIns="0" bIns="0" rtlCol="0" anchor="t"/>
+          <a:lstStyle/>
+          <a:p>
+            <a:pPr indent="0" marL="0">
+              <a:buNone/>
+            </a:pPr>
+            <a:r>
+              <a:rPr lang="en-US" sz="2400" b="1" dirty="0">
+                <a:solidFill>
+                  <a:srgbClr val="0D1411"/>
+                </a:solidFill>
+                <a:latin typeface="Calibri" pitchFamily="34" charset="0"/>
+                <a:ea typeface="Calibri" pitchFamily="34" charset="-122"/>
+                <a:cs typeface="Calibri" pitchFamily="34" charset="-120"/>
+              </a:rPr>
+              <a:t>What grows where</a:t>
+            </a:r>
+            <a:endParaRPr lang="en-US" sz="2400" dirty="0"/>
+          </a:p>
+        </p:txBody>
+      </p:sp>
+      <p:sp>
+        <p:nvSpPr>
+          <p:cNvPr id="7" name="Text 4"/>
+          <p:cNvSpPr txBox="1"/>
+          <p:nvPr/>
+        </p:nvSpPr>
+        <p:spPr>
+          <a:xfrm>
+            <a:off x="502920" y="1225296"/>
+            <a:ext cx="5410048" cy="585216"/>
+          </a:xfrm>
+          <a:prstGeom prst="rect">
+            <a:avLst/>
+          </a:prstGeom>
+          <a:noFill/>
+          <a:ln/>
+        </p:spPr>
+        <p:txBody>
+          <a:bodyPr wrap="square" lIns="0" tIns="0" rIns="0" bIns="0" rtlCol="0" anchor="t"/>
+          <a:lstStyle/>
+          <a:p>
+            <a:pPr indent="0" marL="0">
+              <a:buNone/>
+            </a:pPr>
+            <a:r>
+              <a:rPr lang="en-US" sz="1400" dirty="0">
+                <a:solidFill>
+                  <a:srgbClr val="4A5852"/>
+                </a:solidFill>
+                <a:latin typeface="Calibri" pitchFamily="34" charset="0"/>
+                <a:ea typeface="Calibri" pitchFamily="34" charset="-122"/>
+                <a:cs typeface="Calibri" pitchFamily="34" charset="-120"/>
+              </a:rPr>
+              <a:t>The field crops on every farm: which crop, on how much land, and on which farm.</a:t>
+            </a:r>
+            <a:endParaRPr lang="en-US" sz="1400" dirty="0"/>
+          </a:p>
+        </p:txBody>
+      </p:sp>
+      <p:sp>
+        <p:nvSpPr>
+          <p:cNvPr id="8" name="Text 5"/>
+          <p:cNvSpPr txBox="1"/>
+          <p:nvPr/>
+        </p:nvSpPr>
+        <p:spPr>
+          <a:xfrm>
+            <a:off x="502920" y="2261286"/>
             <a:ext cx="228600" cy="228600"/>
           </a:xfrm>
           <a:prstGeom prst="ellipse">
@@ -3533,7 +3642,7 @@
                 <a:ea typeface="Calibri" pitchFamily="34" charset="-122"/>
                 <a:cs typeface="Calibri" pitchFamily="34" charset="-120"/>
               </a:rPr>
-              <a:t>3</a:t>
+              <a:t>1</a:t>
             </a:r>
             <a:endParaRPr lang="en-US" sz="1000" dirty="0"/>
           </a:p>
@@ -3541,53 +3650,14 @@
       </p:sp>
       <p:sp>
         <p:nvSpPr>
-          <p:cNvPr id="6" name="Text 3"/>
-          <p:cNvSpPr txBox="1"/>
-          <p:nvPr/>
-        </p:nvSpPr>
-        <p:spPr>
-          <a:xfrm>
-            <a:off x="502920" y="457200"/>
-            <a:ext cx="5410048" cy="237744"/>
-          </a:xfrm>
-          <a:prstGeom prst="rect">
-            <a:avLst/>
-          </a:prstGeom>
-          <a:noFill/>
-          <a:ln/>
-        </p:spPr>
-        <p:txBody>
-          <a:bodyPr wrap="square" lIns="0" tIns="0" rIns="0" bIns="0" rtlCol="0" anchor="ctr"/>
-          <a:lstStyle/>
-          <a:p>
-            <a:pPr indent="0" marL="0">
-              <a:buNone/>
-            </a:pPr>
-            <a:r>
-              <a:rPr lang="en-US" sz="1000" b="1" spc="200" kern="0" dirty="0">
-                <a:solidFill>
-                  <a:srgbClr val="1B7350"/>
-                </a:solidFill>
-                <a:latin typeface="Calibri" pitchFamily="34" charset="0"/>
-                <a:ea typeface="Calibri" pitchFamily="34" charset="-122"/>
-                <a:cs typeface="Calibri" pitchFamily="34" charset="-120"/>
-              </a:rPr>
-              <a:t>ENGLISH</a:t>
-            </a:r>
-            <a:endParaRPr lang="en-US" sz="1000" dirty="0"/>
-          </a:p>
-        </p:txBody>
-      </p:sp>
-      <p:sp>
-        <p:nvSpPr>
-          <p:cNvPr id="7" name="Text 4"/>
-          <p:cNvSpPr txBox="1"/>
-          <p:nvPr/>
-        </p:nvSpPr>
-        <p:spPr>
-          <a:xfrm>
-            <a:off x="502920" y="731520"/>
-            <a:ext cx="5410048" cy="457200"/>
+          <p:cNvPr id="9" name="Text 6"/>
+          <p:cNvSpPr txBox="1"/>
+          <p:nvPr/>
+        </p:nvSpPr>
+        <p:spPr>
+          <a:xfrm>
+            <a:off x="832104" y="2265858"/>
+            <a:ext cx="1728216" cy="1024128"/>
           </a:xfrm>
           <a:prstGeom prst="rect">
             <a:avLst/>
@@ -3600,10 +3670,13 @@
           <a:lstStyle/>
           <a:p>
             <a:pPr indent="0" marL="0">
-              <a:buNone/>
-            </a:pPr>
-            <a:r>
-              <a:rPr lang="en-US" sz="2400" b="1" dirty="0">
+              <a:spcAft>
+                <a:spcPts val="200"/>
+              </a:spcAft>
+              <a:buNone/>
+            </a:pPr>
+            <a:r>
+              <a:rPr lang="en-US" sz="1300" b="1" dirty="0">
                 <a:solidFill>
                   <a:srgbClr val="0D1411"/>
                 </a:solidFill>
@@ -3611,38 +3684,16 @@
                 <a:ea typeface="Calibri" pitchFamily="34" charset="-122"/>
                 <a:cs typeface="Calibri" pitchFamily="34" charset="-120"/>
               </a:rPr>
-              <a:t>What grows where</a:t>
-            </a:r>
-            <a:endParaRPr lang="en-US" sz="2400" dirty="0"/>
-          </a:p>
-        </p:txBody>
-      </p:sp>
-      <p:sp>
-        <p:nvSpPr>
-          <p:cNvPr id="8" name="Text 5"/>
-          <p:cNvSpPr txBox="1"/>
-          <p:nvPr/>
-        </p:nvSpPr>
-        <p:spPr>
-          <a:xfrm>
-            <a:off x="502920" y="1225296"/>
-            <a:ext cx="5410048" cy="585216"/>
-          </a:xfrm>
-          <a:prstGeom prst="rect">
-            <a:avLst/>
-          </a:prstGeom>
-          <a:noFill/>
-          <a:ln/>
-        </p:spPr>
-        <p:txBody>
-          <a:bodyPr wrap="square" lIns="0" tIns="0" rIns="0" bIns="0" rtlCol="0" anchor="t"/>
-          <a:lstStyle/>
-          <a:p>
-            <a:pPr indent="0" marL="0">
-              <a:buNone/>
-            </a:pPr>
-            <a:r>
-              <a:rPr lang="en-US" sz="1400" dirty="0">
+              <a:t>Filter specific crop groups</a:t>
+            </a:r>
+            <a:endParaRPr lang="en-US" sz="1300" dirty="0"/>
+          </a:p>
+          <a:p>
+            <a:pPr indent="0" marL="0">
+              <a:buNone/>
+            </a:pPr>
+            <a:r>
+              <a:rPr lang="en-US" sz="1150" dirty="0">
                 <a:solidFill>
                   <a:srgbClr val="4A5852"/>
                 </a:solidFill>
@@ -3650,21 +3701,21 @@
                 <a:ea typeface="Calibri" pitchFamily="34" charset="-122"/>
                 <a:cs typeface="Calibri" pitchFamily="34" charset="-120"/>
               </a:rPr>
-              <a:t>The field crops on every farm: which crop, on how much land, and on which farm.</a:t>
-            </a:r>
-            <a:endParaRPr lang="en-US" sz="1400" dirty="0"/>
-          </a:p>
-        </p:txBody>
-      </p:sp>
-      <p:sp>
-        <p:nvSpPr>
-          <p:cNvPr id="9" name="Text 6"/>
-          <p:cNvSpPr txBox="1"/>
-          <p:nvPr/>
-        </p:nvSpPr>
-        <p:spPr>
-          <a:xfrm>
-            <a:off x="502920" y="2261286"/>
+              <a:t>Tick a group, or open it to pick specific crops.</a:t>
+            </a:r>
+            <a:endParaRPr lang="en-US" sz="1300" dirty="0"/>
+          </a:p>
+        </p:txBody>
+      </p:sp>
+      <p:sp>
+        <p:nvSpPr>
+          <p:cNvPr id="10" name="Text 7"/>
+          <p:cNvSpPr txBox="1"/>
+          <p:nvPr/>
+        </p:nvSpPr>
+        <p:spPr>
+          <a:xfrm>
+            <a:off x="502920" y="3358566"/>
             <a:ext cx="228600" cy="228600"/>
           </a:xfrm>
           <a:prstGeom prst="ellipse">
@@ -3695,7 +3746,7 @@
                 <a:ea typeface="Calibri" pitchFamily="34" charset="-122"/>
                 <a:cs typeface="Calibri" pitchFamily="34" charset="-120"/>
               </a:rPr>
-              <a:t>1</a:t>
+              <a:t>2</a:t>
             </a:r>
             <a:endParaRPr lang="en-US" sz="1000" dirty="0"/>
           </a:p>
@@ -3703,13 +3754,13 @@
       </p:sp>
       <p:sp>
         <p:nvSpPr>
-          <p:cNvPr id="10" name="Text 7"/>
-          <p:cNvSpPr txBox="1"/>
-          <p:nvPr/>
-        </p:nvSpPr>
-        <p:spPr>
-          <a:xfrm>
-            <a:off x="832104" y="2265858"/>
+          <p:cNvPr id="11" name="Text 8"/>
+          <p:cNvSpPr txBox="1"/>
+          <p:nvPr/>
+        </p:nvSpPr>
+        <p:spPr>
+          <a:xfrm>
+            <a:off x="832104" y="3363138"/>
             <a:ext cx="1728216" cy="1024128"/>
           </a:xfrm>
           <a:prstGeom prst="rect">
@@ -3737,7 +3788,7 @@
                 <a:ea typeface="Calibri" pitchFamily="34" charset="-122"/>
                 <a:cs typeface="Calibri" pitchFamily="34" charset="-120"/>
               </a:rPr>
-              <a:t>Open a crop group</a:t>
+              <a:t>Coloured by crop</a:t>
             </a:r>
             <a:endParaRPr lang="en-US" sz="1300" dirty="0"/>
           </a:p>
@@ -3754,7 +3805,7 @@
                 <a:ea typeface="Calibri" pitchFamily="34" charset="-122"/>
                 <a:cs typeface="Calibri" pitchFamily="34" charset="-120"/>
               </a:rPr>
-              <a:t>Tick a group, or open it to pick one crop.</a:t>
+              <a:t>Each dot is a farm, in the colour of its main crop.</a:t>
             </a:r>
             <a:endParaRPr lang="en-US" sz="1300" dirty="0"/>
           </a:p>
@@ -3762,13 +3813,130 @@
       </p:sp>
       <p:sp>
         <p:nvSpPr>
-          <p:cNvPr id="11" name="Text 8"/>
-          <p:cNvSpPr txBox="1"/>
-          <p:nvPr/>
-        </p:nvSpPr>
-        <p:spPr>
-          <a:xfrm>
-            <a:off x="502920" y="3358566"/>
+          <p:cNvPr id="12" name="Text 9"/>
+          <p:cNvSpPr txBox="1"/>
+          <p:nvPr/>
+        </p:nvSpPr>
+        <p:spPr>
+          <a:xfrm>
+            <a:off x="6278728" y="457200"/>
+            <a:ext cx="5410048" cy="237744"/>
+          </a:xfrm>
+          <a:prstGeom prst="rect">
+            <a:avLst/>
+          </a:prstGeom>
+          <a:noFill/>
+          <a:ln/>
+        </p:spPr>
+        <p:txBody>
+          <a:bodyPr wrap="square" lIns="0" tIns="0" rIns="0" bIns="0" rtlCol="0" anchor="ctr"/>
+          <a:lstStyle/>
+          <a:p>
+            <a:pPr indent="0" marL="0">
+              <a:buNone/>
+            </a:pPr>
+            <a:r>
+              <a:rPr lang="en-US" sz="1000" b="1" spc="200" kern="0" dirty="0">
+                <a:solidFill>
+                  <a:srgbClr val="1B7350"/>
+                </a:solidFill>
+                <a:latin typeface="Calibri" pitchFamily="34" charset="0"/>
+                <a:ea typeface="Calibri" pitchFamily="34" charset="-122"/>
+                <a:cs typeface="Calibri" pitchFamily="34" charset="-120"/>
+              </a:rPr>
+              <a:t>AZƏRBAYCANCA</a:t>
+            </a:r>
+            <a:endParaRPr lang="en-US" sz="1000" dirty="0"/>
+          </a:p>
+        </p:txBody>
+      </p:sp>
+      <p:sp>
+        <p:nvSpPr>
+          <p:cNvPr id="13" name="Text 10"/>
+          <p:cNvSpPr txBox="1"/>
+          <p:nvPr/>
+        </p:nvSpPr>
+        <p:spPr>
+          <a:xfrm>
+            <a:off x="6278728" y="731520"/>
+            <a:ext cx="5410048" cy="457200"/>
+          </a:xfrm>
+          <a:prstGeom prst="rect">
+            <a:avLst/>
+          </a:prstGeom>
+          <a:noFill/>
+          <a:ln/>
+        </p:spPr>
+        <p:txBody>
+          <a:bodyPr wrap="square" lIns="0" tIns="0" rIns="0" bIns="0" rtlCol="0" anchor="t"/>
+          <a:lstStyle/>
+          <a:p>
+            <a:pPr indent="0" marL="0">
+              <a:buNone/>
+            </a:pPr>
+            <a:r>
+              <a:rPr lang="en-US" sz="2400" b="1" dirty="0">
+                <a:solidFill>
+                  <a:srgbClr val="0D1411"/>
+                </a:solidFill>
+                <a:latin typeface="Calibri" pitchFamily="34" charset="0"/>
+                <a:ea typeface="Calibri" pitchFamily="34" charset="-122"/>
+                <a:cs typeface="Calibri" pitchFamily="34" charset="-120"/>
+              </a:rPr>
+              <a:t>Harada nə becərilir</a:t>
+            </a:r>
+            <a:endParaRPr lang="en-US" sz="2400" dirty="0"/>
+          </a:p>
+        </p:txBody>
+      </p:sp>
+      <p:sp>
+        <p:nvSpPr>
+          <p:cNvPr id="14" name="Text 11"/>
+          <p:cNvSpPr txBox="1"/>
+          <p:nvPr/>
+        </p:nvSpPr>
+        <p:spPr>
+          <a:xfrm>
+            <a:off x="6278728" y="1225296"/>
+            <a:ext cx="5410048" cy="585216"/>
+          </a:xfrm>
+          <a:prstGeom prst="rect">
+            <a:avLst/>
+          </a:prstGeom>
+          <a:noFill/>
+          <a:ln/>
+        </p:spPr>
+        <p:txBody>
+          <a:bodyPr wrap="square" lIns="0" tIns="0" rIns="0" bIns="0" rtlCol="0" anchor="t"/>
+          <a:lstStyle/>
+          <a:p>
+            <a:pPr indent="0" marL="0">
+              <a:buNone/>
+            </a:pPr>
+            <a:r>
+              <a:rPr lang="en-US" sz="1400" dirty="0">
+                <a:solidFill>
+                  <a:srgbClr val="4A5852"/>
+                </a:solidFill>
+                <a:latin typeface="Calibri" pitchFamily="34" charset="0"/>
+                <a:ea typeface="Calibri" pitchFamily="34" charset="-122"/>
+                <a:cs typeface="Calibri" pitchFamily="34" charset="-120"/>
+              </a:rPr>
+              <a:t>Hər təsərrüfatda tarla bitkiləri: hansı bitki, nə qədər torpaqda və hansı təsərrüfatda.</a:t>
+            </a:r>
+            <a:endParaRPr lang="en-US" sz="1400" dirty="0"/>
+          </a:p>
+        </p:txBody>
+      </p:sp>
+      <p:sp>
+        <p:nvSpPr>
+          <p:cNvPr id="15" name="Text 12"/>
+          <p:cNvSpPr txBox="1"/>
+          <p:nvPr/>
+        </p:nvSpPr>
+        <p:spPr>
+          <a:xfrm>
+            <a:off x="9631375" y="2261286"/>
             <a:ext cx="228600" cy="228600"/>
           </a:xfrm>
           <a:prstGeom prst="ellipse">
@@ -3799,7 +3967,7 @@
                 <a:ea typeface="Calibri" pitchFamily="34" charset="-122"/>
                 <a:cs typeface="Calibri" pitchFamily="34" charset="-120"/>
               </a:rPr>
-              <a:t>2</a:t>
+              <a:t>1</a:t>
             </a:r>
             <a:endParaRPr lang="en-US" sz="1000" dirty="0"/>
           </a:p>
@@ -3807,13 +3975,13 @@
       </p:sp>
       <p:sp>
         <p:nvSpPr>
-          <p:cNvPr id="12" name="Text 9"/>
-          <p:cNvSpPr txBox="1"/>
-          <p:nvPr/>
-        </p:nvSpPr>
-        <p:spPr>
-          <a:xfrm>
-            <a:off x="832104" y="3363138"/>
+          <p:cNvPr id="16" name="Text 13"/>
+          <p:cNvSpPr txBox="1"/>
+          <p:nvPr/>
+        </p:nvSpPr>
+        <p:spPr>
+          <a:xfrm>
+            <a:off x="9960559" y="2265858"/>
             <a:ext cx="1728216" cy="1024128"/>
           </a:xfrm>
           <a:prstGeom prst="rect">
@@ -3841,7 +4009,7 @@
                 <a:ea typeface="Calibri" pitchFamily="34" charset="-122"/>
                 <a:cs typeface="Calibri" pitchFamily="34" charset="-120"/>
               </a:rPr>
-              <a:t>Coloured by crop</a:t>
+              <a:t>Bitki qruplarını filtrləyin</a:t>
             </a:r>
             <a:endParaRPr lang="en-US" sz="1300" dirty="0"/>
           </a:p>
@@ -3858,7 +4026,7 @@
                 <a:ea typeface="Calibri" pitchFamily="34" charset="-122"/>
                 <a:cs typeface="Calibri" pitchFamily="34" charset="-120"/>
               </a:rPr>
-              <a:t>Each dot is a farm, in the colour of its main crop.</a:t>
+              <a:t>Qrupu seçin və ya açıb konkret bitkiləri seçin.</a:t>
             </a:r>
             <a:endParaRPr lang="en-US" sz="1300" dirty="0"/>
           </a:p>
@@ -3866,13 +4034,13 @@
       </p:sp>
       <p:sp>
         <p:nvSpPr>
-          <p:cNvPr id="13" name="Text 10"/>
-          <p:cNvSpPr txBox="1"/>
-          <p:nvPr/>
-        </p:nvSpPr>
-        <p:spPr>
-          <a:xfrm>
-            <a:off x="502920" y="4455846"/>
+          <p:cNvPr id="17" name="Text 14"/>
+          <p:cNvSpPr txBox="1"/>
+          <p:nvPr/>
+        </p:nvSpPr>
+        <p:spPr>
+          <a:xfrm>
+            <a:off x="9631375" y="3358566"/>
             <a:ext cx="228600" cy="228600"/>
           </a:xfrm>
           <a:prstGeom prst="ellipse">
@@ -3903,7 +4071,7 @@
                 <a:ea typeface="Calibri" pitchFamily="34" charset="-122"/>
                 <a:cs typeface="Calibri" pitchFamily="34" charset="-120"/>
               </a:rPr>
-              <a:t>3</a:t>
+              <a:t>2</a:t>
             </a:r>
             <a:endParaRPr lang="en-US" sz="1000" dirty="0"/>
           </a:p>
@@ -3911,13 +4079,13 @@
       </p:sp>
       <p:sp>
         <p:nvSpPr>
-          <p:cNvPr id="14" name="Text 11"/>
-          <p:cNvSpPr txBox="1"/>
-          <p:nvPr/>
-        </p:nvSpPr>
-        <p:spPr>
-          <a:xfrm>
-            <a:off x="832104" y="4460418"/>
+          <p:cNvPr id="18" name="Text 15"/>
+          <p:cNvSpPr txBox="1"/>
+          <p:nvPr/>
+        </p:nvSpPr>
+        <p:spPr>
+          <a:xfrm>
+            <a:off x="9960559" y="3363138"/>
             <a:ext cx="1728216" cy="1024128"/>
           </a:xfrm>
           <a:prstGeom prst="rect">
@@ -3945,7 +4113,7 @@
                 <a:ea typeface="Calibri" pitchFamily="34" charset="-122"/>
                 <a:cs typeface="Calibri" pitchFamily="34" charset="-120"/>
               </a:rPr>
-              <a:t>Land for each crop</a:t>
+              <a:t>Bitkiyə görə rəng</a:t>
             </a:r>
             <a:endParaRPr lang="en-US" sz="1300" dirty="0"/>
           </a:p>
@@ -3962,7 +4130,7 @@
                 <a:ea typeface="Calibri" pitchFamily="34" charset="-122"/>
                 <a:cs typeface="Calibri" pitchFamily="34" charset="-120"/>
               </a:rPr>
-              <a:t>Dunums and share. Click a group to see its crops.</a:t>
+              <a:t>Hər nöqtə bir təsərrüfatdır, əsas bitkisinin rəngində.</a:t>
             </a:r>
             <a:endParaRPr lang="en-US" sz="1300" dirty="0"/>
           </a:p>
@@ -3970,436 +4138,7 @@
       </p:sp>
       <p:sp>
         <p:nvSpPr>
-          <p:cNvPr id="15" name="Text 12"/>
-          <p:cNvSpPr txBox="1"/>
-          <p:nvPr/>
-        </p:nvSpPr>
-        <p:spPr>
-          <a:xfrm>
-            <a:off x="6278728" y="457200"/>
-            <a:ext cx="5410048" cy="237744"/>
-          </a:xfrm>
-          <a:prstGeom prst="rect">
-            <a:avLst/>
-          </a:prstGeom>
-          <a:noFill/>
-          <a:ln/>
-        </p:spPr>
-        <p:txBody>
-          <a:bodyPr wrap="square" lIns="0" tIns="0" rIns="0" bIns="0" rtlCol="0" anchor="ctr"/>
-          <a:lstStyle/>
-          <a:p>
-            <a:pPr indent="0" marL="0">
-              <a:buNone/>
-            </a:pPr>
-            <a:r>
-              <a:rPr lang="en-US" sz="1000" b="1" spc="200" kern="0" dirty="0">
-                <a:solidFill>
-                  <a:srgbClr val="1B7350"/>
-                </a:solidFill>
-                <a:latin typeface="Calibri" pitchFamily="34" charset="0"/>
-                <a:ea typeface="Calibri" pitchFamily="34" charset="-122"/>
-                <a:cs typeface="Calibri" pitchFamily="34" charset="-120"/>
-              </a:rPr>
-              <a:t>AZƏRBAYCANCA</a:t>
-            </a:r>
-            <a:endParaRPr lang="en-US" sz="1000" dirty="0"/>
-          </a:p>
-        </p:txBody>
-      </p:sp>
-      <p:sp>
-        <p:nvSpPr>
-          <p:cNvPr id="16" name="Text 13"/>
-          <p:cNvSpPr txBox="1"/>
-          <p:nvPr/>
-        </p:nvSpPr>
-        <p:spPr>
-          <a:xfrm>
-            <a:off x="6278728" y="731520"/>
-            <a:ext cx="5410048" cy="457200"/>
-          </a:xfrm>
-          <a:prstGeom prst="rect">
-            <a:avLst/>
-          </a:prstGeom>
-          <a:noFill/>
-          <a:ln/>
-        </p:spPr>
-        <p:txBody>
-          <a:bodyPr wrap="square" lIns="0" tIns="0" rIns="0" bIns="0" rtlCol="0" anchor="t"/>
-          <a:lstStyle/>
-          <a:p>
-            <a:pPr indent="0" marL="0">
-              <a:buNone/>
-            </a:pPr>
-            <a:r>
-              <a:rPr lang="en-US" sz="2400" b="1" dirty="0">
-                <a:solidFill>
-                  <a:srgbClr val="0D1411"/>
-                </a:solidFill>
-                <a:latin typeface="Calibri" pitchFamily="34" charset="0"/>
-                <a:ea typeface="Calibri" pitchFamily="34" charset="-122"/>
-                <a:cs typeface="Calibri" pitchFamily="34" charset="-120"/>
-              </a:rPr>
-              <a:t>Harada nə becərilir</a:t>
-            </a:r>
-            <a:endParaRPr lang="en-US" sz="2400" dirty="0"/>
-          </a:p>
-        </p:txBody>
-      </p:sp>
-      <p:sp>
-        <p:nvSpPr>
-          <p:cNvPr id="17" name="Text 14"/>
-          <p:cNvSpPr txBox="1"/>
-          <p:nvPr/>
-        </p:nvSpPr>
-        <p:spPr>
-          <a:xfrm>
-            <a:off x="6278728" y="1225296"/>
-            <a:ext cx="5410048" cy="585216"/>
-          </a:xfrm>
-          <a:prstGeom prst="rect">
-            <a:avLst/>
-          </a:prstGeom>
-          <a:noFill/>
-          <a:ln/>
-        </p:spPr>
-        <p:txBody>
-          <a:bodyPr wrap="square" lIns="0" tIns="0" rIns="0" bIns="0" rtlCol="0" anchor="t"/>
-          <a:lstStyle/>
-          <a:p>
-            <a:pPr indent="0" marL="0">
-              <a:buNone/>
-            </a:pPr>
-            <a:r>
-              <a:rPr lang="en-US" sz="1400" dirty="0">
-                <a:solidFill>
-                  <a:srgbClr val="4A5852"/>
-                </a:solidFill>
-                <a:latin typeface="Calibri" pitchFamily="34" charset="0"/>
-                <a:ea typeface="Calibri" pitchFamily="34" charset="-122"/>
-                <a:cs typeface="Calibri" pitchFamily="34" charset="-120"/>
-              </a:rPr>
-              <a:t>Hər təsərrüfatda tarla bitkiləri: hansı bitki, nə qədər torpaqda və hansı təsərrüfatda.</a:t>
-            </a:r>
-            <a:endParaRPr lang="en-US" sz="1400" dirty="0"/>
-          </a:p>
-        </p:txBody>
-      </p:sp>
-      <p:sp>
-        <p:nvSpPr>
-          <p:cNvPr id="18" name="Text 15"/>
-          <p:cNvSpPr txBox="1"/>
-          <p:nvPr/>
-        </p:nvSpPr>
-        <p:spPr>
-          <a:xfrm>
-            <a:off x="9631375" y="2261286"/>
-            <a:ext cx="228600" cy="228600"/>
-          </a:xfrm>
-          <a:prstGeom prst="ellipse">
-            <a:avLst/>
-          </a:prstGeom>
-          <a:solidFill>
-            <a:srgbClr val="114230"/>
-          </a:solidFill>
-          <a:ln w="15875">
-            <a:solidFill>
-              <a:srgbClr val="FFFFFF"/>
-            </a:solidFill>
-          </a:ln>
-        </p:spPr>
-        <p:txBody>
-          <a:bodyPr wrap="square" lIns="0" tIns="0" rIns="0" bIns="0" rtlCol="0" anchor="ctr"/>
-          <a:lstStyle/>
-          <a:p>
-            <a:pPr algn="ctr" indent="0" marL="0">
-              <a:buNone/>
-            </a:pPr>
-            <a:r>
-              <a:rPr lang="en-US" sz="1000" b="1" dirty="0">
-                <a:solidFill>
-                  <a:srgbClr val="FFFFFF"/>
-                </a:solidFill>
-                <a:latin typeface="Calibri" pitchFamily="34" charset="0"/>
-                <a:ea typeface="Calibri" pitchFamily="34" charset="-122"/>
-                <a:cs typeface="Calibri" pitchFamily="34" charset="-120"/>
-              </a:rPr>
-              <a:t>1</a:t>
-            </a:r>
-            <a:endParaRPr lang="en-US" sz="1000" dirty="0"/>
-          </a:p>
-        </p:txBody>
-      </p:sp>
-      <p:sp>
-        <p:nvSpPr>
-          <p:cNvPr id="19" name="Text 16"/>
-          <p:cNvSpPr txBox="1"/>
-          <p:nvPr/>
-        </p:nvSpPr>
-        <p:spPr>
-          <a:xfrm>
-            <a:off x="9960559" y="2265858"/>
-            <a:ext cx="1728216" cy="1024128"/>
-          </a:xfrm>
-          <a:prstGeom prst="rect">
-            <a:avLst/>
-          </a:prstGeom>
-          <a:noFill/>
-          <a:ln/>
-        </p:spPr>
-        <p:txBody>
-          <a:bodyPr wrap="square" lIns="0" tIns="0" rIns="0" bIns="0" rtlCol="0" anchor="t"/>
-          <a:lstStyle/>
-          <a:p>
-            <a:pPr indent="0" marL="0">
-              <a:spcAft>
-                <a:spcPts val="200"/>
-              </a:spcAft>
-              <a:buNone/>
-            </a:pPr>
-            <a:r>
-              <a:rPr lang="en-US" sz="1300" b="1" dirty="0">
-                <a:solidFill>
-                  <a:srgbClr val="0D1411"/>
-                </a:solidFill>
-                <a:latin typeface="Calibri" pitchFamily="34" charset="0"/>
-                <a:ea typeface="Calibri" pitchFamily="34" charset="-122"/>
-                <a:cs typeface="Calibri" pitchFamily="34" charset="-120"/>
-              </a:rPr>
-              <a:t>Bitki qrupunu açın</a:t>
-            </a:r>
-            <a:endParaRPr lang="en-US" sz="1300" dirty="0"/>
-          </a:p>
-          <a:p>
-            <a:pPr indent="0" marL="0">
-              <a:buNone/>
-            </a:pPr>
-            <a:r>
-              <a:rPr lang="en-US" sz="1150" dirty="0">
-                <a:solidFill>
-                  <a:srgbClr val="4A5852"/>
-                </a:solidFill>
-                <a:latin typeface="Calibri" pitchFamily="34" charset="0"/>
-                <a:ea typeface="Calibri" pitchFamily="34" charset="-122"/>
-                <a:cs typeface="Calibri" pitchFamily="34" charset="-120"/>
-              </a:rPr>
-              <a:t>Qrupu seçin və ya açıb bir bitki seçin.</a:t>
-            </a:r>
-            <a:endParaRPr lang="en-US" sz="1300" dirty="0"/>
-          </a:p>
-        </p:txBody>
-      </p:sp>
-      <p:sp>
-        <p:nvSpPr>
-          <p:cNvPr id="20" name="Text 17"/>
-          <p:cNvSpPr txBox="1"/>
-          <p:nvPr/>
-        </p:nvSpPr>
-        <p:spPr>
-          <a:xfrm>
-            <a:off x="9631375" y="3358566"/>
-            <a:ext cx="228600" cy="228600"/>
-          </a:xfrm>
-          <a:prstGeom prst="ellipse">
-            <a:avLst/>
-          </a:prstGeom>
-          <a:solidFill>
-            <a:srgbClr val="114230"/>
-          </a:solidFill>
-          <a:ln w="15875">
-            <a:solidFill>
-              <a:srgbClr val="FFFFFF"/>
-            </a:solidFill>
-          </a:ln>
-        </p:spPr>
-        <p:txBody>
-          <a:bodyPr wrap="square" lIns="0" tIns="0" rIns="0" bIns="0" rtlCol="0" anchor="ctr"/>
-          <a:lstStyle/>
-          <a:p>
-            <a:pPr algn="ctr" indent="0" marL="0">
-              <a:buNone/>
-            </a:pPr>
-            <a:r>
-              <a:rPr lang="en-US" sz="1000" b="1" dirty="0">
-                <a:solidFill>
-                  <a:srgbClr val="FFFFFF"/>
-                </a:solidFill>
-                <a:latin typeface="Calibri" pitchFamily="34" charset="0"/>
-                <a:ea typeface="Calibri" pitchFamily="34" charset="-122"/>
-                <a:cs typeface="Calibri" pitchFamily="34" charset="-120"/>
-              </a:rPr>
-              <a:t>2</a:t>
-            </a:r>
-            <a:endParaRPr lang="en-US" sz="1000" dirty="0"/>
-          </a:p>
-        </p:txBody>
-      </p:sp>
-      <p:sp>
-        <p:nvSpPr>
-          <p:cNvPr id="21" name="Text 18"/>
-          <p:cNvSpPr txBox="1"/>
-          <p:nvPr/>
-        </p:nvSpPr>
-        <p:spPr>
-          <a:xfrm>
-            <a:off x="9960559" y="3363138"/>
-            <a:ext cx="1728216" cy="1024128"/>
-          </a:xfrm>
-          <a:prstGeom prst="rect">
-            <a:avLst/>
-          </a:prstGeom>
-          <a:noFill/>
-          <a:ln/>
-        </p:spPr>
-        <p:txBody>
-          <a:bodyPr wrap="square" lIns="0" tIns="0" rIns="0" bIns="0" rtlCol="0" anchor="t"/>
-          <a:lstStyle/>
-          <a:p>
-            <a:pPr indent="0" marL="0">
-              <a:spcAft>
-                <a:spcPts val="200"/>
-              </a:spcAft>
-              <a:buNone/>
-            </a:pPr>
-            <a:r>
-              <a:rPr lang="en-US" sz="1300" b="1" dirty="0">
-                <a:solidFill>
-                  <a:srgbClr val="0D1411"/>
-                </a:solidFill>
-                <a:latin typeface="Calibri" pitchFamily="34" charset="0"/>
-                <a:ea typeface="Calibri" pitchFamily="34" charset="-122"/>
-                <a:cs typeface="Calibri" pitchFamily="34" charset="-120"/>
-              </a:rPr>
-              <a:t>Bitkiyə görə rəng</a:t>
-            </a:r>
-            <a:endParaRPr lang="en-US" sz="1300" dirty="0"/>
-          </a:p>
-          <a:p>
-            <a:pPr indent="0" marL="0">
-              <a:buNone/>
-            </a:pPr>
-            <a:r>
-              <a:rPr lang="en-US" sz="1150" dirty="0">
-                <a:solidFill>
-                  <a:srgbClr val="4A5852"/>
-                </a:solidFill>
-                <a:latin typeface="Calibri" pitchFamily="34" charset="0"/>
-                <a:ea typeface="Calibri" pitchFamily="34" charset="-122"/>
-                <a:cs typeface="Calibri" pitchFamily="34" charset="-120"/>
-              </a:rPr>
-              <a:t>Hər nöqtə bir təsərrüfatdır, əsas bitkisinin rəngində.</a:t>
-            </a:r>
-            <a:endParaRPr lang="en-US" sz="1300" dirty="0"/>
-          </a:p>
-        </p:txBody>
-      </p:sp>
-      <p:sp>
-        <p:nvSpPr>
-          <p:cNvPr id="22" name="Text 19"/>
-          <p:cNvSpPr txBox="1"/>
-          <p:nvPr/>
-        </p:nvSpPr>
-        <p:spPr>
-          <a:xfrm>
-            <a:off x="9631375" y="4455846"/>
-            <a:ext cx="228600" cy="228600"/>
-          </a:xfrm>
-          <a:prstGeom prst="ellipse">
-            <a:avLst/>
-          </a:prstGeom>
-          <a:solidFill>
-            <a:srgbClr val="114230"/>
-          </a:solidFill>
-          <a:ln w="15875">
-            <a:solidFill>
-              <a:srgbClr val="FFFFFF"/>
-            </a:solidFill>
-          </a:ln>
-        </p:spPr>
-        <p:txBody>
-          <a:bodyPr wrap="square" lIns="0" tIns="0" rIns="0" bIns="0" rtlCol="0" anchor="ctr"/>
-          <a:lstStyle/>
-          <a:p>
-            <a:pPr algn="ctr" indent="0" marL="0">
-              <a:buNone/>
-            </a:pPr>
-            <a:r>
-              <a:rPr lang="en-US" sz="1000" b="1" dirty="0">
-                <a:solidFill>
-                  <a:srgbClr val="FFFFFF"/>
-                </a:solidFill>
-                <a:latin typeface="Calibri" pitchFamily="34" charset="0"/>
-                <a:ea typeface="Calibri" pitchFamily="34" charset="-122"/>
-                <a:cs typeface="Calibri" pitchFamily="34" charset="-120"/>
-              </a:rPr>
-              <a:t>3</a:t>
-            </a:r>
-            <a:endParaRPr lang="en-US" sz="1000" dirty="0"/>
-          </a:p>
-        </p:txBody>
-      </p:sp>
-      <p:sp>
-        <p:nvSpPr>
-          <p:cNvPr id="23" name="Text 20"/>
-          <p:cNvSpPr txBox="1"/>
-          <p:nvPr/>
-        </p:nvSpPr>
-        <p:spPr>
-          <a:xfrm>
-            <a:off x="9960559" y="4460418"/>
-            <a:ext cx="1728216" cy="1024128"/>
-          </a:xfrm>
-          <a:prstGeom prst="rect">
-            <a:avLst/>
-          </a:prstGeom>
-          <a:noFill/>
-          <a:ln/>
-        </p:spPr>
-        <p:txBody>
-          <a:bodyPr wrap="square" lIns="0" tIns="0" rIns="0" bIns="0" rtlCol="0" anchor="t"/>
-          <a:lstStyle/>
-          <a:p>
-            <a:pPr indent="0" marL="0">
-              <a:spcAft>
-                <a:spcPts val="200"/>
-              </a:spcAft>
-              <a:buNone/>
-            </a:pPr>
-            <a:r>
-              <a:rPr lang="en-US" sz="1300" b="1" dirty="0">
-                <a:solidFill>
-                  <a:srgbClr val="0D1411"/>
-                </a:solidFill>
-                <a:latin typeface="Calibri" pitchFamily="34" charset="0"/>
-                <a:ea typeface="Calibri" pitchFamily="34" charset="-122"/>
-                <a:cs typeface="Calibri" pitchFamily="34" charset="-120"/>
-              </a:rPr>
-              <a:t>Hər bitkinin torpağı</a:t>
-            </a:r>
-            <a:endParaRPr lang="en-US" sz="1300" dirty="0"/>
-          </a:p>
-          <a:p>
-            <a:pPr indent="0" marL="0">
-              <a:buNone/>
-            </a:pPr>
-            <a:r>
-              <a:rPr lang="en-US" sz="1150" dirty="0">
-                <a:solidFill>
-                  <a:srgbClr val="4A5852"/>
-                </a:solidFill>
-                <a:latin typeface="Calibri" pitchFamily="34" charset="0"/>
-                <a:ea typeface="Calibri" pitchFamily="34" charset="-122"/>
-                <a:cs typeface="Calibri" pitchFamily="34" charset="-120"/>
-              </a:rPr>
-              <a:t>Dönüm və pay. Bitkiləri görmək üçün qrupa klikləyin.</a:t>
-            </a:r>
-            <a:endParaRPr lang="en-US" sz="1300" dirty="0"/>
-          </a:p>
-        </p:txBody>
-      </p:sp>
-      <p:sp>
-        <p:nvSpPr>
-          <p:cNvPr id="25" name="Text 21"/>
+          <p:cNvPr id="20" name="Text 16"/>
           <p:cNvSpPr txBox="1"/>
           <p:nvPr/>
         </p:nvSpPr>
@@ -4590,7 +4329,124 @@
         </p:nvSpPr>
         <p:spPr>
           <a:xfrm>
-            <a:off x="4136670" y="3458584"/>
+            <a:off x="502920" y="457200"/>
+            <a:ext cx="5410048" cy="237744"/>
+          </a:xfrm>
+          <a:prstGeom prst="rect">
+            <a:avLst/>
+          </a:prstGeom>
+          <a:noFill/>
+          <a:ln/>
+        </p:spPr>
+        <p:txBody>
+          <a:bodyPr wrap="square" lIns="0" tIns="0" rIns="0" bIns="0" rtlCol="0" anchor="ctr"/>
+          <a:lstStyle/>
+          <a:p>
+            <a:pPr indent="0" marL="0">
+              <a:buNone/>
+            </a:pPr>
+            <a:r>
+              <a:rPr lang="en-US" sz="1000" b="1" spc="200" kern="0" dirty="0">
+                <a:solidFill>
+                  <a:srgbClr val="1B7350"/>
+                </a:solidFill>
+                <a:latin typeface="Calibri" pitchFamily="34" charset="0"/>
+                <a:ea typeface="Calibri" pitchFamily="34" charset="-122"/>
+                <a:cs typeface="Calibri" pitchFamily="34" charset="-120"/>
+              </a:rPr>
+              <a:t>ENGLISH</a:t>
+            </a:r>
+            <a:endParaRPr lang="en-US" sz="1000" dirty="0"/>
+          </a:p>
+        </p:txBody>
+      </p:sp>
+      <p:sp>
+        <p:nvSpPr>
+          <p:cNvPr id="6" name="Text 3"/>
+          <p:cNvSpPr txBox="1"/>
+          <p:nvPr/>
+        </p:nvSpPr>
+        <p:spPr>
+          <a:xfrm>
+            <a:off x="502920" y="731520"/>
+            <a:ext cx="5410048" cy="457200"/>
+          </a:xfrm>
+          <a:prstGeom prst="rect">
+            <a:avLst/>
+          </a:prstGeom>
+          <a:noFill/>
+          <a:ln/>
+        </p:spPr>
+        <p:txBody>
+          <a:bodyPr wrap="square" lIns="0" tIns="0" rIns="0" bIns="0" rtlCol="0" anchor="t"/>
+          <a:lstStyle/>
+          <a:p>
+            <a:pPr indent="0" marL="0">
+              <a:buNone/>
+            </a:pPr>
+            <a:r>
+              <a:rPr lang="en-US" sz="2400" b="1" dirty="0">
+                <a:solidFill>
+                  <a:srgbClr val="0D1411"/>
+                </a:solidFill>
+                <a:latin typeface="Calibri" pitchFamily="34" charset="0"/>
+                <a:ea typeface="Calibri" pitchFamily="34" charset="-122"/>
+                <a:cs typeface="Calibri" pitchFamily="34" charset="-120"/>
+              </a:rPr>
+              <a:t>Every tree, in every orchard</a:t>
+            </a:r>
+            <a:endParaRPr lang="en-US" sz="2400" dirty="0"/>
+          </a:p>
+        </p:txBody>
+      </p:sp>
+      <p:sp>
+        <p:nvSpPr>
+          <p:cNvPr id="7" name="Text 4"/>
+          <p:cNvSpPr txBox="1"/>
+          <p:nvPr/>
+        </p:nvSpPr>
+        <p:spPr>
+          <a:xfrm>
+            <a:off x="502920" y="1225296"/>
+            <a:ext cx="5410048" cy="585216"/>
+          </a:xfrm>
+          <a:prstGeom prst="rect">
+            <a:avLst/>
+          </a:prstGeom>
+          <a:noFill/>
+          <a:ln/>
+        </p:spPr>
+        <p:txBody>
+          <a:bodyPr wrap="square" lIns="0" tIns="0" rIns="0" bIns="0" rtlCol="0" anchor="t"/>
+          <a:lstStyle/>
+          <a:p>
+            <a:pPr indent="0" marL="0">
+              <a:buNone/>
+            </a:pPr>
+            <a:r>
+              <a:rPr lang="en-US" sz="1400" dirty="0">
+                <a:solidFill>
+                  <a:srgbClr val="4A5852"/>
+                </a:solidFill>
+                <a:latin typeface="Calibri" pitchFamily="34" charset="0"/>
+                <a:ea typeface="Calibri" pitchFamily="34" charset="-122"/>
+                <a:cs typeface="Calibri" pitchFamily="34" charset="-120"/>
+              </a:rPr>
+              <a:t>The satellite finds each tree, counts it, and tells its kind.</a:t>
+            </a:r>
+            <a:endParaRPr lang="en-US" sz="1400" dirty="0"/>
+          </a:p>
+        </p:txBody>
+      </p:sp>
+      <p:sp>
+        <p:nvSpPr>
+          <p:cNvPr id="8" name="Text 5"/>
+          <p:cNvSpPr txBox="1"/>
+          <p:nvPr/>
+        </p:nvSpPr>
+        <p:spPr>
+          <a:xfrm>
+            <a:off x="502920" y="2261286"/>
             <a:ext cx="228600" cy="228600"/>
           </a:xfrm>
           <a:prstGeom prst="ellipse">
@@ -4621,7 +4477,7 @@
                 <a:ea typeface="Calibri" pitchFamily="34" charset="-122"/>
                 <a:cs typeface="Calibri" pitchFamily="34" charset="-120"/>
               </a:rPr>
-              <a:t>3</a:t>
+              <a:t>1</a:t>
             </a:r>
             <a:endParaRPr lang="en-US" sz="1000" dirty="0"/>
           </a:p>
@@ -4629,13 +4485,72 @@
       </p:sp>
       <p:sp>
         <p:nvSpPr>
-          <p:cNvPr id="6" name="Text 3"/>
-          <p:cNvSpPr txBox="1"/>
-          <p:nvPr/>
-        </p:nvSpPr>
-        <p:spPr>
-          <a:xfrm>
-            <a:off x="3369353" y="5533519"/>
+          <p:cNvPr id="9" name="Text 6"/>
+          <p:cNvSpPr txBox="1"/>
+          <p:nvPr/>
+        </p:nvSpPr>
+        <p:spPr>
+          <a:xfrm>
+            <a:off x="832104" y="2265858"/>
+            <a:ext cx="1728216" cy="1024128"/>
+          </a:xfrm>
+          <a:prstGeom prst="rect">
+            <a:avLst/>
+          </a:prstGeom>
+          <a:noFill/>
+          <a:ln/>
+        </p:spPr>
+        <p:txBody>
+          <a:bodyPr wrap="square" lIns="0" tIns="0" rIns="0" bIns="0" rtlCol="0" anchor="t"/>
+          <a:lstStyle/>
+          <a:p>
+            <a:pPr indent="0" marL="0">
+              <a:spcAft>
+                <a:spcPts val="200"/>
+              </a:spcAft>
+              <a:buNone/>
+            </a:pPr>
+            <a:r>
+              <a:rPr lang="en-US" sz="1300" b="1" dirty="0">
+                <a:solidFill>
+                  <a:srgbClr val="0D1411"/>
+                </a:solidFill>
+                <a:latin typeface="Calibri" pitchFamily="34" charset="0"/>
+                <a:ea typeface="Calibri" pitchFamily="34" charset="-122"/>
+                <a:cs typeface="Calibri" pitchFamily="34" charset="-120"/>
+              </a:rPr>
+              <a:t>All trees, counted</a:t>
+            </a:r>
+            <a:endParaRPr lang="en-US" sz="1300" dirty="0"/>
+          </a:p>
+          <a:p>
+            <a:pPr indent="0" marL="0">
+              <a:buNone/>
+            </a:pPr>
+            <a:r>
+              <a:rPr lang="en-US" sz="1150" dirty="0">
+                <a:solidFill>
+                  <a:srgbClr val="4A5852"/>
+                </a:solidFill>
+                <a:latin typeface="Calibri" pitchFamily="34" charset="0"/>
+                <a:ea typeface="Calibri" pitchFamily="34" charset="-122"/>
+                <a:cs typeface="Calibri" pitchFamily="34" charset="-120"/>
+              </a:rPr>
+              <a:t>From fruit trees to forest trees.</a:t>
+            </a:r>
+            <a:endParaRPr lang="en-US" sz="1300" dirty="0"/>
+          </a:p>
+        </p:txBody>
+      </p:sp>
+      <p:sp>
+        <p:nvSpPr>
+          <p:cNvPr id="10" name="Text 7"/>
+          <p:cNvSpPr txBox="1"/>
+          <p:nvPr/>
+        </p:nvSpPr>
+        <p:spPr>
+          <a:xfrm>
+            <a:off x="502920" y="3358566"/>
             <a:ext cx="228600" cy="228600"/>
           </a:xfrm>
           <a:prstGeom prst="ellipse">
@@ -4666,7 +4581,7 @@
                 <a:ea typeface="Calibri" pitchFamily="34" charset="-122"/>
                 <a:cs typeface="Calibri" pitchFamily="34" charset="-120"/>
               </a:rPr>
-              <a:t>4</a:t>
+              <a:t>2</a:t>
             </a:r>
             <a:endParaRPr lang="en-US" sz="1000" dirty="0"/>
           </a:p>
@@ -4674,13 +4589,72 @@
       </p:sp>
       <p:sp>
         <p:nvSpPr>
-          <p:cNvPr id="7" name="Text 4"/>
-          <p:cNvSpPr txBox="1"/>
-          <p:nvPr/>
-        </p:nvSpPr>
-        <p:spPr>
-          <a:xfrm>
-            <a:off x="502920" y="457200"/>
+          <p:cNvPr id="11" name="Text 8"/>
+          <p:cNvSpPr txBox="1"/>
+          <p:nvPr/>
+        </p:nvSpPr>
+        <p:spPr>
+          <a:xfrm>
+            <a:off x="832104" y="3363138"/>
+            <a:ext cx="1728216" cy="1024128"/>
+          </a:xfrm>
+          <a:prstGeom prst="rect">
+            <a:avLst/>
+          </a:prstGeom>
+          <a:noFill/>
+          <a:ln/>
+        </p:spPr>
+        <p:txBody>
+          <a:bodyPr wrap="square" lIns="0" tIns="0" rIns="0" bIns="0" rtlCol="0" anchor="t"/>
+          <a:lstStyle/>
+          <a:p>
+            <a:pPr indent="0" marL="0">
+              <a:spcAft>
+                <a:spcPts val="200"/>
+              </a:spcAft>
+              <a:buNone/>
+            </a:pPr>
+            <a:r>
+              <a:rPr lang="en-US" sz="1300" b="1" dirty="0">
+                <a:solidFill>
+                  <a:srgbClr val="0D1411"/>
+                </a:solidFill>
+                <a:latin typeface="Calibri" pitchFamily="34" charset="0"/>
+                <a:ea typeface="Calibri" pitchFamily="34" charset="-122"/>
+                <a:cs typeface="Calibri" pitchFamily="34" charset="-120"/>
+              </a:rPr>
+              <a:t>One dot, one tree</a:t>
+            </a:r>
+            <a:endParaRPr lang="en-US" sz="1300" dirty="0"/>
+          </a:p>
+          <a:p>
+            <a:pPr indent="0" marL="0">
+              <a:buNone/>
+            </a:pPr>
+            <a:r>
+              <a:rPr lang="en-US" sz="1150" dirty="0">
+                <a:solidFill>
+                  <a:srgbClr val="4A5852"/>
+                </a:solidFill>
+                <a:latin typeface="Calibri" pitchFamily="34" charset="0"/>
+                <a:ea typeface="Calibri" pitchFamily="34" charset="-122"/>
+                <a:cs typeface="Calibri" pitchFamily="34" charset="-120"/>
+              </a:rPr>
+              <a:t>Zoom in to a farm. The colour of a dot is its variety.</a:t>
+            </a:r>
+            <a:endParaRPr lang="en-US" sz="1300" dirty="0"/>
+          </a:p>
+        </p:txBody>
+      </p:sp>
+      <p:sp>
+        <p:nvSpPr>
+          <p:cNvPr id="12" name="Text 9"/>
+          <p:cNvSpPr txBox="1"/>
+          <p:nvPr/>
+        </p:nvSpPr>
+        <p:spPr>
+          <a:xfrm>
+            <a:off x="6278728" y="457200"/>
             <a:ext cx="5410048" cy="237744"/>
           </a:xfrm>
           <a:prstGeom prst="rect">
@@ -4705,7 +4679,7 @@
                 <a:ea typeface="Calibri" pitchFamily="34" charset="-122"/>
                 <a:cs typeface="Calibri" pitchFamily="34" charset="-120"/>
               </a:rPr>
-              <a:t>ENGLISH</a:t>
+              <a:t>AZƏRBAYCANCA</a:t>
             </a:r>
             <a:endParaRPr lang="en-US" sz="1000" dirty="0"/>
           </a:p>
@@ -4713,13 +4687,13 @@
       </p:sp>
       <p:sp>
         <p:nvSpPr>
-          <p:cNvPr id="8" name="Text 5"/>
-          <p:cNvSpPr txBox="1"/>
-          <p:nvPr/>
-        </p:nvSpPr>
-        <p:spPr>
-          <a:xfrm>
-            <a:off x="502920" y="731520"/>
+          <p:cNvPr id="13" name="Text 10"/>
+          <p:cNvSpPr txBox="1"/>
+          <p:nvPr/>
+        </p:nvSpPr>
+        <p:spPr>
+          <a:xfrm>
+            <a:off x="6278728" y="731520"/>
             <a:ext cx="5410048" cy="457200"/>
           </a:xfrm>
           <a:prstGeom prst="rect">
@@ -4744,7 +4718,7 @@
                 <a:ea typeface="Calibri" pitchFamily="34" charset="-122"/>
                 <a:cs typeface="Calibri" pitchFamily="34" charset="-120"/>
               </a:rPr>
-              <a:t>Every tree, in every orchard</a:t>
+              <a:t>Hər bağda hər ağac</a:t>
             </a:r>
             <a:endParaRPr lang="en-US" sz="2400" dirty="0"/>
           </a:p>
@@ -4752,13 +4726,13 @@
       </p:sp>
       <p:sp>
         <p:nvSpPr>
-          <p:cNvPr id="9" name="Text 6"/>
-          <p:cNvSpPr txBox="1"/>
-          <p:nvPr/>
-        </p:nvSpPr>
-        <p:spPr>
-          <a:xfrm>
-            <a:off x="502920" y="1225296"/>
+          <p:cNvPr id="14" name="Text 11"/>
+          <p:cNvSpPr txBox="1"/>
+          <p:nvPr/>
+        </p:nvSpPr>
+        <p:spPr>
+          <a:xfrm>
+            <a:off x="6278728" y="1225296"/>
             <a:ext cx="5410048" cy="585216"/>
           </a:xfrm>
           <a:prstGeom prst="rect">
@@ -4783,7 +4757,7 @@
                 <a:ea typeface="Calibri" pitchFamily="34" charset="-122"/>
                 <a:cs typeface="Calibri" pitchFamily="34" charset="-120"/>
               </a:rPr>
-              <a:t>The satellite finds each tree, counts it, and tells its kind.</a:t>
+              <a:t>Peyk hər ağacı tapır, sayır və onun növünü deyir.</a:t>
             </a:r>
             <a:endParaRPr lang="en-US" sz="1400" dirty="0"/>
           </a:p>
@@ -4791,13 +4765,13 @@
       </p:sp>
       <p:sp>
         <p:nvSpPr>
-          <p:cNvPr id="10" name="Text 7"/>
-          <p:cNvSpPr txBox="1"/>
-          <p:nvPr/>
-        </p:nvSpPr>
-        <p:spPr>
-          <a:xfrm>
-            <a:off x="502920" y="2261286"/>
+          <p:cNvPr id="15" name="Text 12"/>
+          <p:cNvSpPr txBox="1"/>
+          <p:nvPr/>
+        </p:nvSpPr>
+        <p:spPr>
+          <a:xfrm>
+            <a:off x="9631375" y="2261286"/>
             <a:ext cx="228600" cy="228600"/>
           </a:xfrm>
           <a:prstGeom prst="ellipse">
@@ -4836,14 +4810,14 @@
       </p:sp>
       <p:sp>
         <p:nvSpPr>
-          <p:cNvPr id="11" name="Text 8"/>
-          <p:cNvSpPr txBox="1"/>
-          <p:nvPr/>
-        </p:nvSpPr>
-        <p:spPr>
-          <a:xfrm>
-            <a:off x="832104" y="2265858"/>
-            <a:ext cx="1728216" cy="961726"/>
+          <p:cNvPr id="16" name="Text 13"/>
+          <p:cNvSpPr txBox="1"/>
+          <p:nvPr/>
+        </p:nvSpPr>
+        <p:spPr>
+          <a:xfrm>
+            <a:off x="9960559" y="2265858"/>
+            <a:ext cx="1728216" cy="1024128"/>
           </a:xfrm>
           <a:prstGeom prst="rect">
             <a:avLst/>
@@ -4870,7 +4844,7 @@
                 <a:ea typeface="Calibri" pitchFamily="34" charset="-122"/>
                 <a:cs typeface="Calibri" pitchFamily="34" charset="-120"/>
               </a:rPr>
-              <a:t>All trees, counted</a:t>
+              <a:t>Bütün ağaclar sayılır</a:t>
             </a:r>
             <a:endParaRPr lang="en-US" sz="1300" dirty="0"/>
           </a:p>
@@ -4887,7 +4861,7 @@
                 <a:ea typeface="Calibri" pitchFamily="34" charset="-122"/>
                 <a:cs typeface="Calibri" pitchFamily="34" charset="-120"/>
               </a:rPr>
-              <a:t>Date palms, fruit trees and forest trees.</a:t>
+              <a:t>Meyvə ağaclarından meşə ağaclarına qədər.</a:t>
             </a:r>
             <a:endParaRPr lang="en-US" sz="1300" dirty="0"/>
           </a:p>
@@ -4895,13 +4869,13 @@
       </p:sp>
       <p:sp>
         <p:nvSpPr>
-          <p:cNvPr id="12" name="Text 9"/>
-          <p:cNvSpPr txBox="1"/>
-          <p:nvPr/>
-        </p:nvSpPr>
-        <p:spPr>
-          <a:xfrm>
-            <a:off x="502920" y="3296165"/>
+          <p:cNvPr id="17" name="Text 14"/>
+          <p:cNvSpPr txBox="1"/>
+          <p:nvPr/>
+        </p:nvSpPr>
+        <p:spPr>
+          <a:xfrm>
+            <a:off x="9631375" y="3358566"/>
             <a:ext cx="228600" cy="228600"/>
           </a:xfrm>
           <a:prstGeom prst="ellipse">
@@ -4940,14 +4914,14 @@
       </p:sp>
       <p:sp>
         <p:nvSpPr>
-          <p:cNvPr id="13" name="Text 10"/>
-          <p:cNvSpPr txBox="1"/>
-          <p:nvPr/>
-        </p:nvSpPr>
-        <p:spPr>
-          <a:xfrm>
-            <a:off x="832104" y="3300737"/>
-            <a:ext cx="1728216" cy="961726"/>
+          <p:cNvPr id="18" name="Text 15"/>
+          <p:cNvSpPr txBox="1"/>
+          <p:nvPr/>
+        </p:nvSpPr>
+        <p:spPr>
+          <a:xfrm>
+            <a:off x="9960559" y="3363138"/>
+            <a:ext cx="1728216" cy="1024128"/>
           </a:xfrm>
           <a:prstGeom prst="rect">
             <a:avLst/>
@@ -4974,7 +4948,7 @@
                 <a:ea typeface="Calibri" pitchFamily="34" charset="-122"/>
                 <a:cs typeface="Calibri" pitchFamily="34" charset="-120"/>
               </a:rPr>
-              <a:t>One dot, one tree</a:t>
+              <a:t>Bir nöqtə, bir ağac</a:t>
             </a:r>
             <a:endParaRPr lang="en-US" sz="1300" dirty="0"/>
           </a:p>
@@ -4991,7 +4965,7 @@
                 <a:ea typeface="Calibri" pitchFamily="34" charset="-122"/>
                 <a:cs typeface="Calibri" pitchFamily="34" charset="-120"/>
               </a:rPr>
-              <a:t>Zoom in to a farm. The colour of a dot is its variety.</a:t>
+              <a:t>Təsərrüfata yaxınlaşın. Nöqtənin rəngi sortu göstərir.</a:t>
             </a:r>
             <a:endParaRPr lang="en-US" sz="1300" dirty="0"/>
           </a:p>
@@ -4999,748 +4973,7 @@
       </p:sp>
       <p:sp>
         <p:nvSpPr>
-          <p:cNvPr id="14" name="Text 11"/>
-          <p:cNvSpPr txBox="1"/>
-          <p:nvPr/>
-        </p:nvSpPr>
-        <p:spPr>
-          <a:xfrm>
-            <a:off x="502920" y="4331043"/>
-            <a:ext cx="228600" cy="228600"/>
-          </a:xfrm>
-          <a:prstGeom prst="ellipse">
-            <a:avLst/>
-          </a:prstGeom>
-          <a:solidFill>
-            <a:srgbClr val="114230"/>
-          </a:solidFill>
-          <a:ln w="15875">
-            <a:solidFill>
-              <a:srgbClr val="FFFFFF"/>
-            </a:solidFill>
-          </a:ln>
-        </p:spPr>
-        <p:txBody>
-          <a:bodyPr wrap="square" lIns="0" tIns="0" rIns="0" bIns="0" rtlCol="0" anchor="ctr"/>
-          <a:lstStyle/>
-          <a:p>
-            <a:pPr algn="ctr" indent="0" marL="0">
-              <a:buNone/>
-            </a:pPr>
-            <a:r>
-              <a:rPr lang="en-US" sz="1000" b="1" dirty="0">
-                <a:solidFill>
-                  <a:srgbClr val="FFFFFF"/>
-                </a:solidFill>
-                <a:latin typeface="Calibri" pitchFamily="34" charset="0"/>
-                <a:ea typeface="Calibri" pitchFamily="34" charset="-122"/>
-                <a:cs typeface="Calibri" pitchFamily="34" charset="-120"/>
-              </a:rPr>
-              <a:t>3</a:t>
-            </a:r>
-            <a:endParaRPr lang="en-US" sz="1000" dirty="0"/>
-          </a:p>
-        </p:txBody>
-      </p:sp>
-      <p:sp>
-        <p:nvSpPr>
-          <p:cNvPr id="15" name="Text 12"/>
-          <p:cNvSpPr txBox="1"/>
-          <p:nvPr/>
-        </p:nvSpPr>
-        <p:spPr>
-          <a:xfrm>
-            <a:off x="832104" y="4335615"/>
-            <a:ext cx="1728216" cy="961726"/>
-          </a:xfrm>
-          <a:prstGeom prst="rect">
-            <a:avLst/>
-          </a:prstGeom>
-          <a:noFill/>
-          <a:ln/>
-        </p:spPr>
-        <p:txBody>
-          <a:bodyPr wrap="square" lIns="0" tIns="0" rIns="0" bIns="0" rtlCol="0" anchor="t"/>
-          <a:lstStyle/>
-          <a:p>
-            <a:pPr indent="0" marL="0">
-              <a:spcAft>
-                <a:spcPts val="200"/>
-              </a:spcAft>
-              <a:buNone/>
-            </a:pPr>
-            <a:r>
-              <a:rPr lang="en-US" sz="1300" b="1" dirty="0">
-                <a:solidFill>
-                  <a:srgbClr val="0D1411"/>
-                </a:solidFill>
-                <a:latin typeface="Calibri" pitchFamily="34" charset="0"/>
-                <a:ea typeface="Calibri" pitchFamily="34" charset="-122"/>
-                <a:cs typeface="Calibri" pitchFamily="34" charset="-120"/>
-              </a:rPr>
-              <a:t>Which variety</a:t>
-            </a:r>
-            <a:endParaRPr lang="en-US" sz="1300" dirty="0"/>
-          </a:p>
-          <a:p>
-            <a:pPr indent="0" marL="0">
-              <a:buNone/>
-            </a:pPr>
-            <a:r>
-              <a:rPr lang="en-US" sz="1150" dirty="0">
-                <a:solidFill>
-                  <a:srgbClr val="4A5852"/>
-                </a:solidFill>
-                <a:latin typeface="Calibri" pitchFamily="34" charset="0"/>
-                <a:ea typeface="Calibri" pitchFamily="34" charset="-122"/>
-                <a:cs typeface="Calibri" pitchFamily="34" charset="-120"/>
-              </a:rPr>
-              <a:t>Each colour is one variety of palm or fruit tree.</a:t>
-            </a:r>
-            <a:endParaRPr lang="en-US" sz="1300" dirty="0"/>
-          </a:p>
-        </p:txBody>
-      </p:sp>
-      <p:sp>
-        <p:nvSpPr>
-          <p:cNvPr id="16" name="Text 13"/>
-          <p:cNvSpPr txBox="1"/>
-          <p:nvPr/>
-        </p:nvSpPr>
-        <p:spPr>
-          <a:xfrm>
-            <a:off x="502920" y="5365922"/>
-            <a:ext cx="228600" cy="228600"/>
-          </a:xfrm>
-          <a:prstGeom prst="ellipse">
-            <a:avLst/>
-          </a:prstGeom>
-          <a:solidFill>
-            <a:srgbClr val="114230"/>
-          </a:solidFill>
-          <a:ln w="15875">
-            <a:solidFill>
-              <a:srgbClr val="FFFFFF"/>
-            </a:solidFill>
-          </a:ln>
-        </p:spPr>
-        <p:txBody>
-          <a:bodyPr wrap="square" lIns="0" tIns="0" rIns="0" bIns="0" rtlCol="0" anchor="ctr"/>
-          <a:lstStyle/>
-          <a:p>
-            <a:pPr algn="ctr" indent="0" marL="0">
-              <a:buNone/>
-            </a:pPr>
-            <a:r>
-              <a:rPr lang="en-US" sz="1000" b="1" dirty="0">
-                <a:solidFill>
-                  <a:srgbClr val="FFFFFF"/>
-                </a:solidFill>
-                <a:latin typeface="Calibri" pitchFamily="34" charset="0"/>
-                <a:ea typeface="Calibri" pitchFamily="34" charset="-122"/>
-                <a:cs typeface="Calibri" pitchFamily="34" charset="-120"/>
-              </a:rPr>
-              <a:t>4</a:t>
-            </a:r>
-            <a:endParaRPr lang="en-US" sz="1000" dirty="0"/>
-          </a:p>
-        </p:txBody>
-      </p:sp>
-      <p:sp>
-        <p:nvSpPr>
-          <p:cNvPr id="17" name="Text 14"/>
-          <p:cNvSpPr txBox="1"/>
-          <p:nvPr/>
-        </p:nvSpPr>
-        <p:spPr>
-          <a:xfrm>
-            <a:off x="832104" y="5370494"/>
-            <a:ext cx="1728216" cy="961726"/>
-          </a:xfrm>
-          <a:prstGeom prst="rect">
-            <a:avLst/>
-          </a:prstGeom>
-          <a:noFill/>
-          <a:ln/>
-        </p:spPr>
-        <p:txBody>
-          <a:bodyPr wrap="square" lIns="0" tIns="0" rIns="0" bIns="0" rtlCol="0" anchor="t"/>
-          <a:lstStyle/>
-          <a:p>
-            <a:pPr indent="0" marL="0">
-              <a:spcAft>
-                <a:spcPts val="200"/>
-              </a:spcAft>
-              <a:buNone/>
-            </a:pPr>
-            <a:r>
-              <a:rPr lang="en-US" sz="1300" b="1" dirty="0">
-                <a:solidFill>
-                  <a:srgbClr val="0D1411"/>
-                </a:solidFill>
-                <a:latin typeface="Calibri" pitchFamily="34" charset="0"/>
-                <a:ea typeface="Calibri" pitchFamily="34" charset="-122"/>
-                <a:cs typeface="Calibri" pitchFamily="34" charset="-120"/>
-              </a:rPr>
-              <a:t>Land under trees</a:t>
-            </a:r>
-            <a:endParaRPr lang="en-US" sz="1300" dirty="0"/>
-          </a:p>
-          <a:p>
-            <a:pPr indent="0" marL="0">
-              <a:buNone/>
-            </a:pPr>
-            <a:r>
-              <a:rPr lang="en-US" sz="1150" dirty="0">
-                <a:solidFill>
-                  <a:srgbClr val="4A5852"/>
-                </a:solidFill>
-                <a:latin typeface="Calibri" pitchFamily="34" charset="0"/>
-                <a:ea typeface="Calibri" pitchFamily="34" charset="-122"/>
-                <a:cs typeface="Calibri" pitchFamily="34" charset="-120"/>
-              </a:rPr>
-              <a:t>Dunums of palms, fruit trees and forest trees.</a:t>
-            </a:r>
-            <a:endParaRPr lang="en-US" sz="1300" dirty="0"/>
-          </a:p>
-        </p:txBody>
-      </p:sp>
-      <p:sp>
-        <p:nvSpPr>
-          <p:cNvPr id="18" name="Text 15"/>
-          <p:cNvSpPr txBox="1"/>
-          <p:nvPr/>
-        </p:nvSpPr>
-        <p:spPr>
-          <a:xfrm>
-            <a:off x="6278728" y="457200"/>
-            <a:ext cx="5410048" cy="237744"/>
-          </a:xfrm>
-          <a:prstGeom prst="rect">
-            <a:avLst/>
-          </a:prstGeom>
-          <a:noFill/>
-          <a:ln/>
-        </p:spPr>
-        <p:txBody>
-          <a:bodyPr wrap="square" lIns="0" tIns="0" rIns="0" bIns="0" rtlCol="0" anchor="ctr"/>
-          <a:lstStyle/>
-          <a:p>
-            <a:pPr indent="0" marL="0">
-              <a:buNone/>
-            </a:pPr>
-            <a:r>
-              <a:rPr lang="en-US" sz="1000" b="1" spc="200" kern="0" dirty="0">
-                <a:solidFill>
-                  <a:srgbClr val="1B7350"/>
-                </a:solidFill>
-                <a:latin typeface="Calibri" pitchFamily="34" charset="0"/>
-                <a:ea typeface="Calibri" pitchFamily="34" charset="-122"/>
-                <a:cs typeface="Calibri" pitchFamily="34" charset="-120"/>
-              </a:rPr>
-              <a:t>AZƏRBAYCANCA</a:t>
-            </a:r>
-            <a:endParaRPr lang="en-US" sz="1000" dirty="0"/>
-          </a:p>
-        </p:txBody>
-      </p:sp>
-      <p:sp>
-        <p:nvSpPr>
-          <p:cNvPr id="19" name="Text 16"/>
-          <p:cNvSpPr txBox="1"/>
-          <p:nvPr/>
-        </p:nvSpPr>
-        <p:spPr>
-          <a:xfrm>
-            <a:off x="6278728" y="731520"/>
-            <a:ext cx="5410048" cy="457200"/>
-          </a:xfrm>
-          <a:prstGeom prst="rect">
-            <a:avLst/>
-          </a:prstGeom>
-          <a:noFill/>
-          <a:ln/>
-        </p:spPr>
-        <p:txBody>
-          <a:bodyPr wrap="square" lIns="0" tIns="0" rIns="0" bIns="0" rtlCol="0" anchor="t"/>
-          <a:lstStyle/>
-          <a:p>
-            <a:pPr indent="0" marL="0">
-              <a:buNone/>
-            </a:pPr>
-            <a:r>
-              <a:rPr lang="en-US" sz="2400" b="1" dirty="0">
-                <a:solidFill>
-                  <a:srgbClr val="0D1411"/>
-                </a:solidFill>
-                <a:latin typeface="Calibri" pitchFamily="34" charset="0"/>
-                <a:ea typeface="Calibri" pitchFamily="34" charset="-122"/>
-                <a:cs typeface="Calibri" pitchFamily="34" charset="-120"/>
-              </a:rPr>
-              <a:t>Hər bağda hər ağac</a:t>
-            </a:r>
-            <a:endParaRPr lang="en-US" sz="2400" dirty="0"/>
-          </a:p>
-        </p:txBody>
-      </p:sp>
-      <p:sp>
-        <p:nvSpPr>
-          <p:cNvPr id="20" name="Text 17"/>
-          <p:cNvSpPr txBox="1"/>
-          <p:nvPr/>
-        </p:nvSpPr>
-        <p:spPr>
-          <a:xfrm>
-            <a:off x="6278728" y="1225296"/>
-            <a:ext cx="5410048" cy="585216"/>
-          </a:xfrm>
-          <a:prstGeom prst="rect">
-            <a:avLst/>
-          </a:prstGeom>
-          <a:noFill/>
-          <a:ln/>
-        </p:spPr>
-        <p:txBody>
-          <a:bodyPr wrap="square" lIns="0" tIns="0" rIns="0" bIns="0" rtlCol="0" anchor="t"/>
-          <a:lstStyle/>
-          <a:p>
-            <a:pPr indent="0" marL="0">
-              <a:buNone/>
-            </a:pPr>
-            <a:r>
-              <a:rPr lang="en-US" sz="1400" dirty="0">
-                <a:solidFill>
-                  <a:srgbClr val="4A5852"/>
-                </a:solidFill>
-                <a:latin typeface="Calibri" pitchFamily="34" charset="0"/>
-                <a:ea typeface="Calibri" pitchFamily="34" charset="-122"/>
-                <a:cs typeface="Calibri" pitchFamily="34" charset="-120"/>
-              </a:rPr>
-              <a:t>Peyk hər ağacı tapır, sayır və onun növünü deyir.</a:t>
-            </a:r>
-            <a:endParaRPr lang="en-US" sz="1400" dirty="0"/>
-          </a:p>
-        </p:txBody>
-      </p:sp>
-      <p:sp>
-        <p:nvSpPr>
-          <p:cNvPr id="21" name="Text 18"/>
-          <p:cNvSpPr txBox="1"/>
-          <p:nvPr/>
-        </p:nvSpPr>
-        <p:spPr>
-          <a:xfrm>
-            <a:off x="9631375" y="2261286"/>
-            <a:ext cx="228600" cy="228600"/>
-          </a:xfrm>
-          <a:prstGeom prst="ellipse">
-            <a:avLst/>
-          </a:prstGeom>
-          <a:solidFill>
-            <a:srgbClr val="114230"/>
-          </a:solidFill>
-          <a:ln w="15875">
-            <a:solidFill>
-              <a:srgbClr val="FFFFFF"/>
-            </a:solidFill>
-          </a:ln>
-        </p:spPr>
-        <p:txBody>
-          <a:bodyPr wrap="square" lIns="0" tIns="0" rIns="0" bIns="0" rtlCol="0" anchor="ctr"/>
-          <a:lstStyle/>
-          <a:p>
-            <a:pPr algn="ctr" indent="0" marL="0">
-              <a:buNone/>
-            </a:pPr>
-            <a:r>
-              <a:rPr lang="en-US" sz="1000" b="1" dirty="0">
-                <a:solidFill>
-                  <a:srgbClr val="FFFFFF"/>
-                </a:solidFill>
-                <a:latin typeface="Calibri" pitchFamily="34" charset="0"/>
-                <a:ea typeface="Calibri" pitchFamily="34" charset="-122"/>
-                <a:cs typeface="Calibri" pitchFamily="34" charset="-120"/>
-              </a:rPr>
-              <a:t>1</a:t>
-            </a:r>
-            <a:endParaRPr lang="en-US" sz="1000" dirty="0"/>
-          </a:p>
-        </p:txBody>
-      </p:sp>
-      <p:sp>
-        <p:nvSpPr>
-          <p:cNvPr id="22" name="Text 19"/>
-          <p:cNvSpPr txBox="1"/>
-          <p:nvPr/>
-        </p:nvSpPr>
-        <p:spPr>
-          <a:xfrm>
-            <a:off x="9960559" y="2265858"/>
-            <a:ext cx="1728216" cy="961726"/>
-          </a:xfrm>
-          <a:prstGeom prst="rect">
-            <a:avLst/>
-          </a:prstGeom>
-          <a:noFill/>
-          <a:ln/>
-        </p:spPr>
-        <p:txBody>
-          <a:bodyPr wrap="square" lIns="0" tIns="0" rIns="0" bIns="0" rtlCol="0" anchor="t"/>
-          <a:lstStyle/>
-          <a:p>
-            <a:pPr indent="0" marL="0">
-              <a:spcAft>
-                <a:spcPts val="200"/>
-              </a:spcAft>
-              <a:buNone/>
-            </a:pPr>
-            <a:r>
-              <a:rPr lang="en-US" sz="1300" b="1" dirty="0">
-                <a:solidFill>
-                  <a:srgbClr val="0D1411"/>
-                </a:solidFill>
-                <a:latin typeface="Calibri" pitchFamily="34" charset="0"/>
-                <a:ea typeface="Calibri" pitchFamily="34" charset="-122"/>
-                <a:cs typeface="Calibri" pitchFamily="34" charset="-120"/>
-              </a:rPr>
-              <a:t>Bütün ağaclar sayılır</a:t>
-            </a:r>
-            <a:endParaRPr lang="en-US" sz="1300" dirty="0"/>
-          </a:p>
-          <a:p>
-            <a:pPr indent="0" marL="0">
-              <a:buNone/>
-            </a:pPr>
-            <a:r>
-              <a:rPr lang="en-US" sz="1150" dirty="0">
-                <a:solidFill>
-                  <a:srgbClr val="4A5852"/>
-                </a:solidFill>
-                <a:latin typeface="Calibri" pitchFamily="34" charset="0"/>
-                <a:ea typeface="Calibri" pitchFamily="34" charset="-122"/>
-                <a:cs typeface="Calibri" pitchFamily="34" charset="-120"/>
-              </a:rPr>
-              <a:t>Xurma palmaları, meyvə və meşə ağacları.</a:t>
-            </a:r>
-            <a:endParaRPr lang="en-US" sz="1300" dirty="0"/>
-          </a:p>
-        </p:txBody>
-      </p:sp>
-      <p:sp>
-        <p:nvSpPr>
-          <p:cNvPr id="23" name="Text 20"/>
-          <p:cNvSpPr txBox="1"/>
-          <p:nvPr/>
-        </p:nvSpPr>
-        <p:spPr>
-          <a:xfrm>
-            <a:off x="9631375" y="3296165"/>
-            <a:ext cx="228600" cy="228600"/>
-          </a:xfrm>
-          <a:prstGeom prst="ellipse">
-            <a:avLst/>
-          </a:prstGeom>
-          <a:solidFill>
-            <a:srgbClr val="114230"/>
-          </a:solidFill>
-          <a:ln w="15875">
-            <a:solidFill>
-              <a:srgbClr val="FFFFFF"/>
-            </a:solidFill>
-          </a:ln>
-        </p:spPr>
-        <p:txBody>
-          <a:bodyPr wrap="square" lIns="0" tIns="0" rIns="0" bIns="0" rtlCol="0" anchor="ctr"/>
-          <a:lstStyle/>
-          <a:p>
-            <a:pPr algn="ctr" indent="0" marL="0">
-              <a:buNone/>
-            </a:pPr>
-            <a:r>
-              <a:rPr lang="en-US" sz="1000" b="1" dirty="0">
-                <a:solidFill>
-                  <a:srgbClr val="FFFFFF"/>
-                </a:solidFill>
-                <a:latin typeface="Calibri" pitchFamily="34" charset="0"/>
-                <a:ea typeface="Calibri" pitchFamily="34" charset="-122"/>
-                <a:cs typeface="Calibri" pitchFamily="34" charset="-120"/>
-              </a:rPr>
-              <a:t>2</a:t>
-            </a:r>
-            <a:endParaRPr lang="en-US" sz="1000" dirty="0"/>
-          </a:p>
-        </p:txBody>
-      </p:sp>
-      <p:sp>
-        <p:nvSpPr>
-          <p:cNvPr id="24" name="Text 21"/>
-          <p:cNvSpPr txBox="1"/>
-          <p:nvPr/>
-        </p:nvSpPr>
-        <p:spPr>
-          <a:xfrm>
-            <a:off x="9960559" y="3300737"/>
-            <a:ext cx="1728216" cy="961726"/>
-          </a:xfrm>
-          <a:prstGeom prst="rect">
-            <a:avLst/>
-          </a:prstGeom>
-          <a:noFill/>
-          <a:ln/>
-        </p:spPr>
-        <p:txBody>
-          <a:bodyPr wrap="square" lIns="0" tIns="0" rIns="0" bIns="0" rtlCol="0" anchor="t"/>
-          <a:lstStyle/>
-          <a:p>
-            <a:pPr indent="0" marL="0">
-              <a:spcAft>
-                <a:spcPts val="200"/>
-              </a:spcAft>
-              <a:buNone/>
-            </a:pPr>
-            <a:r>
-              <a:rPr lang="en-US" sz="1300" b="1" dirty="0">
-                <a:solidFill>
-                  <a:srgbClr val="0D1411"/>
-                </a:solidFill>
-                <a:latin typeface="Calibri" pitchFamily="34" charset="0"/>
-                <a:ea typeface="Calibri" pitchFamily="34" charset="-122"/>
-                <a:cs typeface="Calibri" pitchFamily="34" charset="-120"/>
-              </a:rPr>
-              <a:t>Bir nöqtə, bir ağac</a:t>
-            </a:r>
-            <a:endParaRPr lang="en-US" sz="1300" dirty="0"/>
-          </a:p>
-          <a:p>
-            <a:pPr indent="0" marL="0">
-              <a:buNone/>
-            </a:pPr>
-            <a:r>
-              <a:rPr lang="en-US" sz="1150" dirty="0">
-                <a:solidFill>
-                  <a:srgbClr val="4A5852"/>
-                </a:solidFill>
-                <a:latin typeface="Calibri" pitchFamily="34" charset="0"/>
-                <a:ea typeface="Calibri" pitchFamily="34" charset="-122"/>
-                <a:cs typeface="Calibri" pitchFamily="34" charset="-120"/>
-              </a:rPr>
-              <a:t>Təsərrüfata yaxınlaşın. Nöqtənin rəngi sortu göstərir.</a:t>
-            </a:r>
-            <a:endParaRPr lang="en-US" sz="1300" dirty="0"/>
-          </a:p>
-        </p:txBody>
-      </p:sp>
-      <p:sp>
-        <p:nvSpPr>
-          <p:cNvPr id="25" name="Text 22"/>
-          <p:cNvSpPr txBox="1"/>
-          <p:nvPr/>
-        </p:nvSpPr>
-        <p:spPr>
-          <a:xfrm>
-            <a:off x="9631375" y="4331043"/>
-            <a:ext cx="228600" cy="228600"/>
-          </a:xfrm>
-          <a:prstGeom prst="ellipse">
-            <a:avLst/>
-          </a:prstGeom>
-          <a:solidFill>
-            <a:srgbClr val="114230"/>
-          </a:solidFill>
-          <a:ln w="15875">
-            <a:solidFill>
-              <a:srgbClr val="FFFFFF"/>
-            </a:solidFill>
-          </a:ln>
-        </p:spPr>
-        <p:txBody>
-          <a:bodyPr wrap="square" lIns="0" tIns="0" rIns="0" bIns="0" rtlCol="0" anchor="ctr"/>
-          <a:lstStyle/>
-          <a:p>
-            <a:pPr algn="ctr" indent="0" marL="0">
-              <a:buNone/>
-            </a:pPr>
-            <a:r>
-              <a:rPr lang="en-US" sz="1000" b="1" dirty="0">
-                <a:solidFill>
-                  <a:srgbClr val="FFFFFF"/>
-                </a:solidFill>
-                <a:latin typeface="Calibri" pitchFamily="34" charset="0"/>
-                <a:ea typeface="Calibri" pitchFamily="34" charset="-122"/>
-                <a:cs typeface="Calibri" pitchFamily="34" charset="-120"/>
-              </a:rPr>
-              <a:t>3</a:t>
-            </a:r>
-            <a:endParaRPr lang="en-US" sz="1000" dirty="0"/>
-          </a:p>
-        </p:txBody>
-      </p:sp>
-      <p:sp>
-        <p:nvSpPr>
-          <p:cNvPr id="26" name="Text 23"/>
-          <p:cNvSpPr txBox="1"/>
-          <p:nvPr/>
-        </p:nvSpPr>
-        <p:spPr>
-          <a:xfrm>
-            <a:off x="9960559" y="4335615"/>
-            <a:ext cx="1728216" cy="961726"/>
-          </a:xfrm>
-          <a:prstGeom prst="rect">
-            <a:avLst/>
-          </a:prstGeom>
-          <a:noFill/>
-          <a:ln/>
-        </p:spPr>
-        <p:txBody>
-          <a:bodyPr wrap="square" lIns="0" tIns="0" rIns="0" bIns="0" rtlCol="0" anchor="t"/>
-          <a:lstStyle/>
-          <a:p>
-            <a:pPr indent="0" marL="0">
-              <a:spcAft>
-                <a:spcPts val="200"/>
-              </a:spcAft>
-              <a:buNone/>
-            </a:pPr>
-            <a:r>
-              <a:rPr lang="en-US" sz="1300" b="1" dirty="0">
-                <a:solidFill>
-                  <a:srgbClr val="0D1411"/>
-                </a:solidFill>
-                <a:latin typeface="Calibri" pitchFamily="34" charset="0"/>
-                <a:ea typeface="Calibri" pitchFamily="34" charset="-122"/>
-                <a:cs typeface="Calibri" pitchFamily="34" charset="-120"/>
-              </a:rPr>
-              <a:t>Hansı sort</a:t>
-            </a:r>
-            <a:endParaRPr lang="en-US" sz="1300" dirty="0"/>
-          </a:p>
-          <a:p>
-            <a:pPr indent="0" marL="0">
-              <a:buNone/>
-            </a:pPr>
-            <a:r>
-              <a:rPr lang="en-US" sz="1150" dirty="0">
-                <a:solidFill>
-                  <a:srgbClr val="4A5852"/>
-                </a:solidFill>
-                <a:latin typeface="Calibri" pitchFamily="34" charset="0"/>
-                <a:ea typeface="Calibri" pitchFamily="34" charset="-122"/>
-                <a:cs typeface="Calibri" pitchFamily="34" charset="-120"/>
-              </a:rPr>
-              <a:t>Hər rəng bir xurma və ya meyvə ağacı sortudur.</a:t>
-            </a:r>
-            <a:endParaRPr lang="en-US" sz="1300" dirty="0"/>
-          </a:p>
-        </p:txBody>
-      </p:sp>
-      <p:sp>
-        <p:nvSpPr>
-          <p:cNvPr id="27" name="Text 24"/>
-          <p:cNvSpPr txBox="1"/>
-          <p:nvPr/>
-        </p:nvSpPr>
-        <p:spPr>
-          <a:xfrm>
-            <a:off x="9631375" y="5365922"/>
-            <a:ext cx="228600" cy="228600"/>
-          </a:xfrm>
-          <a:prstGeom prst="ellipse">
-            <a:avLst/>
-          </a:prstGeom>
-          <a:solidFill>
-            <a:srgbClr val="114230"/>
-          </a:solidFill>
-          <a:ln w="15875">
-            <a:solidFill>
-              <a:srgbClr val="FFFFFF"/>
-            </a:solidFill>
-          </a:ln>
-        </p:spPr>
-        <p:txBody>
-          <a:bodyPr wrap="square" lIns="0" tIns="0" rIns="0" bIns="0" rtlCol="0" anchor="ctr"/>
-          <a:lstStyle/>
-          <a:p>
-            <a:pPr algn="ctr" indent="0" marL="0">
-              <a:buNone/>
-            </a:pPr>
-            <a:r>
-              <a:rPr lang="en-US" sz="1000" b="1" dirty="0">
-                <a:solidFill>
-                  <a:srgbClr val="FFFFFF"/>
-                </a:solidFill>
-                <a:latin typeface="Calibri" pitchFamily="34" charset="0"/>
-                <a:ea typeface="Calibri" pitchFamily="34" charset="-122"/>
-                <a:cs typeface="Calibri" pitchFamily="34" charset="-120"/>
-              </a:rPr>
-              <a:t>4</a:t>
-            </a:r>
-            <a:endParaRPr lang="en-US" sz="1000" dirty="0"/>
-          </a:p>
-        </p:txBody>
-      </p:sp>
-      <p:sp>
-        <p:nvSpPr>
-          <p:cNvPr id="28" name="Text 25"/>
-          <p:cNvSpPr txBox="1"/>
-          <p:nvPr/>
-        </p:nvSpPr>
-        <p:spPr>
-          <a:xfrm>
-            <a:off x="9960559" y="5370494"/>
-            <a:ext cx="1728216" cy="961726"/>
-          </a:xfrm>
-          <a:prstGeom prst="rect">
-            <a:avLst/>
-          </a:prstGeom>
-          <a:noFill/>
-          <a:ln/>
-        </p:spPr>
-        <p:txBody>
-          <a:bodyPr wrap="square" lIns="0" tIns="0" rIns="0" bIns="0" rtlCol="0" anchor="t"/>
-          <a:lstStyle/>
-          <a:p>
-            <a:pPr indent="0" marL="0">
-              <a:spcAft>
-                <a:spcPts val="200"/>
-              </a:spcAft>
-              <a:buNone/>
-            </a:pPr>
-            <a:r>
-              <a:rPr lang="en-US" sz="1300" b="1" dirty="0">
-                <a:solidFill>
-                  <a:srgbClr val="0D1411"/>
-                </a:solidFill>
-                <a:latin typeface="Calibri" pitchFamily="34" charset="0"/>
-                <a:ea typeface="Calibri" pitchFamily="34" charset="-122"/>
-                <a:cs typeface="Calibri" pitchFamily="34" charset="-120"/>
-              </a:rPr>
-              <a:t>Ağacların torpağı</a:t>
-            </a:r>
-            <a:endParaRPr lang="en-US" sz="1300" dirty="0"/>
-          </a:p>
-          <a:p>
-            <a:pPr indent="0" marL="0">
-              <a:buNone/>
-            </a:pPr>
-            <a:r>
-              <a:rPr lang="en-US" sz="1150" dirty="0">
-                <a:solidFill>
-                  <a:srgbClr val="4A5852"/>
-                </a:solidFill>
-                <a:latin typeface="Calibri" pitchFamily="34" charset="0"/>
-                <a:ea typeface="Calibri" pitchFamily="34" charset="-122"/>
-                <a:cs typeface="Calibri" pitchFamily="34" charset="-120"/>
-              </a:rPr>
-              <a:t>Xurma, meyvə və meşə ağaclarının dönümü.</a:t>
-            </a:r>
-            <a:endParaRPr lang="en-US" sz="1300" dirty="0"/>
-          </a:p>
-        </p:txBody>
-      </p:sp>
-      <p:sp>
-        <p:nvSpPr>
-          <p:cNvPr id="30" name="Text 26"/>
+          <p:cNvPr id="20" name="Text 16"/>
           <p:cNvSpPr txBox="1"/>
           <p:nvPr/>
         </p:nvSpPr>
@@ -6228,7 +5461,7 @@
                 <a:ea typeface="Calibri" pitchFamily="34" charset="-122"/>
                 <a:cs typeface="Calibri" pitchFamily="34" charset="-120"/>
               </a:rPr>
-              <a:t>For palms and fruit trees. 80 or more is healthy.</a:t>
+              <a:t>For crops and fruit trees.</a:t>
             </a:r>
             <a:endParaRPr lang="en-US" sz="1300" dirty="0"/>
           </a:p>
@@ -6332,7 +5565,7 @@
                 <a:ea typeface="Calibri" pitchFamily="34" charset="-122"/>
                 <a:cs typeface="Calibri" pitchFamily="34" charset="-120"/>
               </a:rPr>
-              <a:t>Here: 6 farms have very stressed trees.</a:t>
+              <a:t>Here: 6 farms have very stressed crops.</a:t>
             </a:r>
             <a:endParaRPr lang="en-US" sz="1300" dirty="0"/>
           </a:p>
@@ -6761,7 +5994,7 @@
                 <a:ea typeface="Calibri" pitchFamily="34" charset="-122"/>
                 <a:cs typeface="Calibri" pitchFamily="34" charset="-120"/>
               </a:rPr>
-              <a:t>Xurma və meyvə ağacları üçün. 80 və yuxarı sağlamdır.</a:t>
+              <a:t>Əkinlər və meyvə ağacları üçün.</a:t>
             </a:r>
             <a:endParaRPr lang="en-US" sz="1300" dirty="0"/>
           </a:p>
@@ -6865,7 +6098,7 @@
                 <a:ea typeface="Calibri" pitchFamily="34" charset="-122"/>
                 <a:cs typeface="Calibri" pitchFamily="34" charset="-120"/>
               </a:rPr>
-              <a:t>Burada: 6 təsərrüfatda ağaclar çox zəifdir.</a:t>
+              <a:t>Burada: 6 təsərrüfatda əkinlər çox zəifdir.</a:t>
             </a:r>
             <a:endParaRPr lang="en-US" sz="1300" dirty="0"/>
           </a:p>
@@ -8658,7 +7891,124 @@
         </p:nvSpPr>
         <p:spPr>
           <a:xfrm>
-            <a:off x="3369353" y="4345526"/>
+            <a:off x="502920" y="457200"/>
+            <a:ext cx="5410048" cy="237744"/>
+          </a:xfrm>
+          <a:prstGeom prst="rect">
+            <a:avLst/>
+          </a:prstGeom>
+          <a:noFill/>
+          <a:ln/>
+        </p:spPr>
+        <p:txBody>
+          <a:bodyPr wrap="square" lIns="0" tIns="0" rIns="0" bIns="0" rtlCol="0" anchor="ctr"/>
+          <a:lstStyle/>
+          <a:p>
+            <a:pPr indent="0" marL="0">
+              <a:buNone/>
+            </a:pPr>
+            <a:r>
+              <a:rPr lang="en-US" sz="1000" b="1" spc="200" kern="0" dirty="0">
+                <a:solidFill>
+                  <a:srgbClr val="1B7350"/>
+                </a:solidFill>
+                <a:latin typeface="Calibri" pitchFamily="34" charset="0"/>
+                <a:ea typeface="Calibri" pitchFamily="34" charset="-122"/>
+                <a:cs typeface="Calibri" pitchFamily="34" charset="-120"/>
+              </a:rPr>
+              <a:t>ENGLISH</a:t>
+            </a:r>
+            <a:endParaRPr lang="en-US" sz="1000" dirty="0"/>
+          </a:p>
+        </p:txBody>
+      </p:sp>
+      <p:sp>
+        <p:nvSpPr>
+          <p:cNvPr id="7" name="Text 4"/>
+          <p:cNvSpPr txBox="1"/>
+          <p:nvPr/>
+        </p:nvSpPr>
+        <p:spPr>
+          <a:xfrm>
+            <a:off x="502920" y="731520"/>
+            <a:ext cx="5410048" cy="457200"/>
+          </a:xfrm>
+          <a:prstGeom prst="rect">
+            <a:avLst/>
+          </a:prstGeom>
+          <a:noFill/>
+          <a:ln/>
+        </p:spPr>
+        <p:txBody>
+          <a:bodyPr wrap="square" lIns="0" tIns="0" rIns="0" bIns="0" rtlCol="0" anchor="t"/>
+          <a:lstStyle/>
+          <a:p>
+            <a:pPr indent="0" marL="0">
+              <a:buNone/>
+            </a:pPr>
+            <a:r>
+              <a:rPr lang="en-US" sz="2400" b="1" dirty="0">
+                <a:solidFill>
+                  <a:srgbClr val="0D1411"/>
+                </a:solidFill>
+                <a:latin typeface="Calibri" pitchFamily="34" charset="0"/>
+                <a:ea typeface="Calibri" pitchFamily="34" charset="-122"/>
+                <a:cs typeface="Calibri" pitchFamily="34" charset="-120"/>
+              </a:rPr>
+              <a:t>From a score to a farm visit</a:t>
+            </a:r>
+            <a:endParaRPr lang="en-US" sz="2400" dirty="0"/>
+          </a:p>
+        </p:txBody>
+      </p:sp>
+      <p:sp>
+        <p:nvSpPr>
+          <p:cNvPr id="8" name="Text 5"/>
+          <p:cNvSpPr txBox="1"/>
+          <p:nvPr/>
+        </p:nvSpPr>
+        <p:spPr>
+          <a:xfrm>
+            <a:off x="502920" y="1225296"/>
+            <a:ext cx="5410048" cy="585216"/>
+          </a:xfrm>
+          <a:prstGeom prst="rect">
+            <a:avLst/>
+          </a:prstGeom>
+          <a:noFill/>
+          <a:ln/>
+        </p:spPr>
+        <p:txBody>
+          <a:bodyPr wrap="square" lIns="0" tIns="0" rIns="0" bIns="0" rtlCol="0" anchor="t"/>
+          <a:lstStyle/>
+          <a:p>
+            <a:pPr indent="0" marL="0">
+              <a:buNone/>
+            </a:pPr>
+            <a:r>
+              <a:rPr lang="en-US" sz="1400" dirty="0">
+                <a:solidFill>
+                  <a:srgbClr val="4A5852"/>
+                </a:solidFill>
+                <a:latin typeface="Calibri" pitchFamily="34" charset="0"/>
+                <a:ea typeface="Calibri" pitchFamily="34" charset="-122"/>
+                <a:cs typeface="Calibri" pitchFamily="34" charset="-120"/>
+              </a:rPr>
+              <a:t>What to check on this farm. The website does not name the disease. It shows where to look.</a:t>
+            </a:r>
+            <a:endParaRPr lang="en-US" sz="1400" dirty="0"/>
+          </a:p>
+        </p:txBody>
+      </p:sp>
+      <p:sp>
+        <p:nvSpPr>
+          <p:cNvPr id="9" name="Text 6"/>
+          <p:cNvSpPr txBox="1"/>
+          <p:nvPr/>
+        </p:nvSpPr>
+        <p:spPr>
+          <a:xfrm>
+            <a:off x="502920" y="2261286"/>
             <a:ext cx="228600" cy="228600"/>
           </a:xfrm>
           <a:prstGeom prst="ellipse">
@@ -8689,7 +8039,7 @@
                 <a:ea typeface="Calibri" pitchFamily="34" charset="-122"/>
                 <a:cs typeface="Calibri" pitchFamily="34" charset="-120"/>
               </a:rPr>
-              <a:t>4</a:t>
+              <a:t>1</a:t>
             </a:r>
             <a:endParaRPr lang="en-US" sz="1000" dirty="0"/>
           </a:p>
@@ -8697,53 +8047,14 @@
       </p:sp>
       <p:sp>
         <p:nvSpPr>
-          <p:cNvPr id="7" name="Text 4"/>
-          <p:cNvSpPr txBox="1"/>
-          <p:nvPr/>
-        </p:nvSpPr>
-        <p:spPr>
-          <a:xfrm>
-            <a:off x="502920" y="457200"/>
-            <a:ext cx="5410048" cy="237744"/>
-          </a:xfrm>
-          <a:prstGeom prst="rect">
-            <a:avLst/>
-          </a:prstGeom>
-          <a:noFill/>
-          <a:ln/>
-        </p:spPr>
-        <p:txBody>
-          <a:bodyPr wrap="square" lIns="0" tIns="0" rIns="0" bIns="0" rtlCol="0" anchor="ctr"/>
-          <a:lstStyle/>
-          <a:p>
-            <a:pPr indent="0" marL="0">
-              <a:buNone/>
-            </a:pPr>
-            <a:r>
-              <a:rPr lang="en-US" sz="1000" b="1" spc="200" kern="0" dirty="0">
-                <a:solidFill>
-                  <a:srgbClr val="1B7350"/>
-                </a:solidFill>
-                <a:latin typeface="Calibri" pitchFamily="34" charset="0"/>
-                <a:ea typeface="Calibri" pitchFamily="34" charset="-122"/>
-                <a:cs typeface="Calibri" pitchFamily="34" charset="-120"/>
-              </a:rPr>
-              <a:t>ENGLISH</a:t>
-            </a:r>
-            <a:endParaRPr lang="en-US" sz="1000" dirty="0"/>
-          </a:p>
-        </p:txBody>
-      </p:sp>
-      <p:sp>
-        <p:nvSpPr>
-          <p:cNvPr id="8" name="Text 5"/>
-          <p:cNvSpPr txBox="1"/>
-          <p:nvPr/>
-        </p:nvSpPr>
-        <p:spPr>
-          <a:xfrm>
-            <a:off x="502920" y="731520"/>
-            <a:ext cx="5410048" cy="457200"/>
+          <p:cNvPr id="10" name="Text 7"/>
+          <p:cNvSpPr txBox="1"/>
+          <p:nvPr/>
+        </p:nvSpPr>
+        <p:spPr>
+          <a:xfrm>
+            <a:off x="832104" y="2265858"/>
+            <a:ext cx="1728216" cy="1024128"/>
           </a:xfrm>
           <a:prstGeom prst="rect">
             <a:avLst/>
@@ -8756,10 +8067,13 @@
           <a:lstStyle/>
           <a:p>
             <a:pPr indent="0" marL="0">
-              <a:buNone/>
-            </a:pPr>
-            <a:r>
-              <a:rPr lang="en-US" sz="2400" b="1" dirty="0">
+              <a:spcAft>
+                <a:spcPts val="200"/>
+              </a:spcAft>
+              <a:buNone/>
+            </a:pPr>
+            <a:r>
+              <a:rPr lang="en-US" sz="1300" b="1" dirty="0">
                 <a:solidFill>
                   <a:srgbClr val="0D1411"/>
                 </a:solidFill>
@@ -8767,38 +8081,16 @@
                 <a:ea typeface="Calibri" pitchFamily="34" charset="-122"/>
                 <a:cs typeface="Calibri" pitchFamily="34" charset="-120"/>
               </a:rPr>
-              <a:t>From a score to a farm visit</a:t>
-            </a:r>
-            <a:endParaRPr lang="en-US" sz="2400" dirty="0"/>
-          </a:p>
-        </p:txBody>
-      </p:sp>
-      <p:sp>
-        <p:nvSpPr>
-          <p:cNvPr id="9" name="Text 6"/>
-          <p:cNvSpPr txBox="1"/>
-          <p:nvPr/>
-        </p:nvSpPr>
-        <p:spPr>
-          <a:xfrm>
-            <a:off x="502920" y="1225296"/>
-            <a:ext cx="5410048" cy="585216"/>
-          </a:xfrm>
-          <a:prstGeom prst="rect">
-            <a:avLst/>
-          </a:prstGeom>
-          <a:noFill/>
-          <a:ln/>
-        </p:spPr>
-        <p:txBody>
-          <a:bodyPr wrap="square" lIns="0" tIns="0" rIns="0" bIns="0" rtlCol="0" anchor="t"/>
-          <a:lstStyle/>
-          <a:p>
-            <a:pPr indent="0" marL="0">
-              <a:buNone/>
-            </a:pPr>
-            <a:r>
-              <a:rPr lang="en-US" sz="1400" dirty="0">
+              <a:t>Most urgent first</a:t>
+            </a:r>
+            <a:endParaRPr lang="en-US" sz="1300" dirty="0"/>
+          </a:p>
+          <a:p>
+            <a:pPr indent="0" marL="0">
+              <a:buNone/>
+            </a:pPr>
+            <a:r>
+              <a:rPr lang="en-US" sz="1150" dirty="0">
                 <a:solidFill>
                   <a:srgbClr val="4A5852"/>
                 </a:solidFill>
@@ -8806,21 +8098,21 @@
                 <a:ea typeface="Calibri" pitchFamily="34" charset="-122"/>
                 <a:cs typeface="Calibri" pitchFamily="34" charset="-120"/>
               </a:rPr>
-              <a:t>What to check on this farm. The website does not name the disease. It shows where to look.</a:t>
-            </a:r>
-            <a:endParaRPr lang="en-US" sz="1400" dirty="0"/>
-          </a:p>
-        </p:txBody>
-      </p:sp>
-      <p:sp>
-        <p:nvSpPr>
-          <p:cNvPr id="10" name="Text 7"/>
-          <p:cNvSpPr txBox="1"/>
-          <p:nvPr/>
-        </p:nvSpPr>
-        <p:spPr>
-          <a:xfrm>
-            <a:off x="502920" y="2261286"/>
+              <a:t>Each problem, with a short reason.</a:t>
+            </a:r>
+            <a:endParaRPr lang="en-US" sz="1300" dirty="0"/>
+          </a:p>
+        </p:txBody>
+      </p:sp>
+      <p:sp>
+        <p:nvSpPr>
+          <p:cNvPr id="11" name="Text 8"/>
+          <p:cNvSpPr txBox="1"/>
+          <p:nvPr/>
+        </p:nvSpPr>
+        <p:spPr>
+          <a:xfrm>
+            <a:off x="502920" y="3358566"/>
             <a:ext cx="228600" cy="228600"/>
           </a:xfrm>
           <a:prstGeom prst="ellipse">
@@ -8851,7 +8143,7 @@
                 <a:ea typeface="Calibri" pitchFamily="34" charset="-122"/>
                 <a:cs typeface="Calibri" pitchFamily="34" charset="-120"/>
               </a:rPr>
-              <a:t>1</a:t>
+              <a:t>2</a:t>
             </a:r>
             <a:endParaRPr lang="en-US" sz="1000" dirty="0"/>
           </a:p>
@@ -8859,14 +8151,14 @@
       </p:sp>
       <p:sp>
         <p:nvSpPr>
-          <p:cNvPr id="11" name="Text 8"/>
-          <p:cNvSpPr txBox="1"/>
-          <p:nvPr/>
-        </p:nvSpPr>
-        <p:spPr>
-          <a:xfrm>
-            <a:off x="832104" y="2265858"/>
-            <a:ext cx="1728216" cy="961726"/>
+          <p:cNvPr id="12" name="Text 9"/>
+          <p:cNvSpPr txBox="1"/>
+          <p:nvPr/>
+        </p:nvSpPr>
+        <p:spPr>
+          <a:xfrm>
+            <a:off x="832104" y="3363138"/>
+            <a:ext cx="1728216" cy="1024128"/>
           </a:xfrm>
           <a:prstGeom prst="rect">
             <a:avLst/>
@@ -8893,7 +8185,7 @@
                 <a:ea typeface="Calibri" pitchFamily="34" charset="-122"/>
                 <a:cs typeface="Calibri" pitchFamily="34" charset="-120"/>
               </a:rPr>
-              <a:t>Most urgent first</a:t>
+              <a:t>What to do</a:t>
             </a:r>
             <a:endParaRPr lang="en-US" sz="1300" dirty="0"/>
           </a:p>
@@ -8910,7 +8202,7 @@
                 <a:ea typeface="Calibri" pitchFamily="34" charset="-122"/>
                 <a:cs typeface="Calibri" pitchFamily="34" charset="-120"/>
               </a:rPr>
-              <a:t>Each problem, with a short reason.</a:t>
+              <a:t>Look for lack of water, salt in the soil, or pests.</a:t>
             </a:r>
             <a:endParaRPr lang="en-US" sz="1300" dirty="0"/>
           </a:p>
@@ -8918,13 +8210,13 @@
       </p:sp>
       <p:sp>
         <p:nvSpPr>
-          <p:cNvPr id="12" name="Text 9"/>
-          <p:cNvSpPr txBox="1"/>
-          <p:nvPr/>
-        </p:nvSpPr>
-        <p:spPr>
-          <a:xfrm>
-            <a:off x="502920" y="3296165"/>
+          <p:cNvPr id="13" name="Text 10"/>
+          <p:cNvSpPr txBox="1"/>
+          <p:nvPr/>
+        </p:nvSpPr>
+        <p:spPr>
+          <a:xfrm>
+            <a:off x="502920" y="4455846"/>
             <a:ext cx="228600" cy="228600"/>
           </a:xfrm>
           <a:prstGeom prst="ellipse">
@@ -8955,7 +8247,7 @@
                 <a:ea typeface="Calibri" pitchFamily="34" charset="-122"/>
                 <a:cs typeface="Calibri" pitchFamily="34" charset="-120"/>
               </a:rPr>
-              <a:t>2</a:t>
+              <a:t>3</a:t>
             </a:r>
             <a:endParaRPr lang="en-US" sz="1000" dirty="0"/>
           </a:p>
@@ -8963,14 +8255,14 @@
       </p:sp>
       <p:sp>
         <p:nvSpPr>
-          <p:cNvPr id="13" name="Text 10"/>
-          <p:cNvSpPr txBox="1"/>
-          <p:nvPr/>
-        </p:nvSpPr>
-        <p:spPr>
-          <a:xfrm>
-            <a:off x="832104" y="3300737"/>
-            <a:ext cx="1728216" cy="961726"/>
+          <p:cNvPr id="14" name="Text 11"/>
+          <p:cNvSpPr txBox="1"/>
+          <p:nvPr/>
+        </p:nvSpPr>
+        <p:spPr>
+          <a:xfrm>
+            <a:off x="832104" y="4460418"/>
+            <a:ext cx="1728216" cy="1024128"/>
           </a:xfrm>
           <a:prstGeom prst="rect">
             <a:avLst/>
@@ -8997,7 +8289,7 @@
                 <a:ea typeface="Calibri" pitchFamily="34" charset="-122"/>
                 <a:cs typeface="Calibri" pitchFamily="34" charset="-120"/>
               </a:rPr>
-              <a:t>What to do</a:t>
+              <a:t>Take it to the farm</a:t>
             </a:r>
             <a:endParaRPr lang="en-US" sz="1300" dirty="0"/>
           </a:p>
@@ -9014,7 +8306,7 @@
                 <a:ea typeface="Calibri" pitchFamily="34" charset="-122"/>
                 <a:cs typeface="Calibri" pitchFamily="34" charset="-120"/>
               </a:rPr>
-              <a:t>Look for lack of water, salt in the soil, or pests.</a:t>
+              <a:t>Print one page for the visit.</a:t>
             </a:r>
             <a:endParaRPr lang="en-US" sz="1300" dirty="0"/>
           </a:p>
@@ -9022,13 +8314,130 @@
       </p:sp>
       <p:sp>
         <p:nvSpPr>
-          <p:cNvPr id="14" name="Text 11"/>
-          <p:cNvSpPr txBox="1"/>
-          <p:nvPr/>
-        </p:nvSpPr>
-        <p:spPr>
-          <a:xfrm>
-            <a:off x="502920" y="4331043"/>
+          <p:cNvPr id="15" name="Text 12"/>
+          <p:cNvSpPr txBox="1"/>
+          <p:nvPr/>
+        </p:nvSpPr>
+        <p:spPr>
+          <a:xfrm>
+            <a:off x="6278728" y="457200"/>
+            <a:ext cx="5410048" cy="237744"/>
+          </a:xfrm>
+          <a:prstGeom prst="rect">
+            <a:avLst/>
+          </a:prstGeom>
+          <a:noFill/>
+          <a:ln/>
+        </p:spPr>
+        <p:txBody>
+          <a:bodyPr wrap="square" lIns="0" tIns="0" rIns="0" bIns="0" rtlCol="0" anchor="ctr"/>
+          <a:lstStyle/>
+          <a:p>
+            <a:pPr indent="0" marL="0">
+              <a:buNone/>
+            </a:pPr>
+            <a:r>
+              <a:rPr lang="en-US" sz="1000" b="1" spc="200" kern="0" dirty="0">
+                <a:solidFill>
+                  <a:srgbClr val="1B7350"/>
+                </a:solidFill>
+                <a:latin typeface="Calibri" pitchFamily="34" charset="0"/>
+                <a:ea typeface="Calibri" pitchFamily="34" charset="-122"/>
+                <a:cs typeface="Calibri" pitchFamily="34" charset="-120"/>
+              </a:rPr>
+              <a:t>AZƏRBAYCANCA</a:t>
+            </a:r>
+            <a:endParaRPr lang="en-US" sz="1000" dirty="0"/>
+          </a:p>
+        </p:txBody>
+      </p:sp>
+      <p:sp>
+        <p:nvSpPr>
+          <p:cNvPr id="16" name="Text 13"/>
+          <p:cNvSpPr txBox="1"/>
+          <p:nvPr/>
+        </p:nvSpPr>
+        <p:spPr>
+          <a:xfrm>
+            <a:off x="6278728" y="731520"/>
+            <a:ext cx="5410048" cy="457200"/>
+          </a:xfrm>
+          <a:prstGeom prst="rect">
+            <a:avLst/>
+          </a:prstGeom>
+          <a:noFill/>
+          <a:ln/>
+        </p:spPr>
+        <p:txBody>
+          <a:bodyPr wrap="square" lIns="0" tIns="0" rIns="0" bIns="0" rtlCol="0" anchor="t"/>
+          <a:lstStyle/>
+          <a:p>
+            <a:pPr indent="0" marL="0">
+              <a:buNone/>
+            </a:pPr>
+            <a:r>
+              <a:rPr lang="en-US" sz="2400" b="1" dirty="0">
+                <a:solidFill>
+                  <a:srgbClr val="0D1411"/>
+                </a:solidFill>
+                <a:latin typeface="Calibri" pitchFamily="34" charset="0"/>
+                <a:ea typeface="Calibri" pitchFamily="34" charset="-122"/>
+                <a:cs typeface="Calibri" pitchFamily="34" charset="-120"/>
+              </a:rPr>
+              <a:t>Baldan təsərrüfat ziyarətinə</a:t>
+            </a:r>
+            <a:endParaRPr lang="en-US" sz="2400" dirty="0"/>
+          </a:p>
+        </p:txBody>
+      </p:sp>
+      <p:sp>
+        <p:nvSpPr>
+          <p:cNvPr id="17" name="Text 14"/>
+          <p:cNvSpPr txBox="1"/>
+          <p:nvPr/>
+        </p:nvSpPr>
+        <p:spPr>
+          <a:xfrm>
+            <a:off x="6278728" y="1225296"/>
+            <a:ext cx="5410048" cy="585216"/>
+          </a:xfrm>
+          <a:prstGeom prst="rect">
+            <a:avLst/>
+          </a:prstGeom>
+          <a:noFill/>
+          <a:ln/>
+        </p:spPr>
+        <p:txBody>
+          <a:bodyPr wrap="square" lIns="0" tIns="0" rIns="0" bIns="0" rtlCol="0" anchor="t"/>
+          <a:lstStyle/>
+          <a:p>
+            <a:pPr indent="0" marL="0">
+              <a:buNone/>
+            </a:pPr>
+            <a:r>
+              <a:rPr lang="en-US" sz="1400" dirty="0">
+                <a:solidFill>
+                  <a:srgbClr val="4A5852"/>
+                </a:solidFill>
+                <a:latin typeface="Calibri" pitchFamily="34" charset="0"/>
+                <a:ea typeface="Calibri" pitchFamily="34" charset="-122"/>
+                <a:cs typeface="Calibri" pitchFamily="34" charset="-120"/>
+              </a:rPr>
+              <a:t>Bu təsərrüfatda nəyi yoxlamaq lazımdır. Sayt xəstəliyin adını demir. Harada baxmağı göstərir.</a:t>
+            </a:r>
+            <a:endParaRPr lang="en-US" sz="1400" dirty="0"/>
+          </a:p>
+        </p:txBody>
+      </p:sp>
+      <p:sp>
+        <p:nvSpPr>
+          <p:cNvPr id="18" name="Text 15"/>
+          <p:cNvSpPr txBox="1"/>
+          <p:nvPr/>
+        </p:nvSpPr>
+        <p:spPr>
+          <a:xfrm>
+            <a:off x="9631375" y="2261286"/>
             <a:ext cx="228600" cy="228600"/>
           </a:xfrm>
           <a:prstGeom prst="ellipse">
@@ -9059,7 +8468,7 @@
                 <a:ea typeface="Calibri" pitchFamily="34" charset="-122"/>
                 <a:cs typeface="Calibri" pitchFamily="34" charset="-120"/>
               </a:rPr>
-              <a:t>3</a:t>
+              <a:t>1</a:t>
             </a:r>
             <a:endParaRPr lang="en-US" sz="1000" dirty="0"/>
           </a:p>
@@ -9067,14 +8476,14 @@
       </p:sp>
       <p:sp>
         <p:nvSpPr>
-          <p:cNvPr id="15" name="Text 12"/>
-          <p:cNvSpPr txBox="1"/>
-          <p:nvPr/>
-        </p:nvSpPr>
-        <p:spPr>
-          <a:xfrm>
-            <a:off x="832104" y="4335615"/>
-            <a:ext cx="1728216" cy="961726"/>
+          <p:cNvPr id="19" name="Text 16"/>
+          <p:cNvSpPr txBox="1"/>
+          <p:nvPr/>
+        </p:nvSpPr>
+        <p:spPr>
+          <a:xfrm>
+            <a:off x="9960559" y="2265858"/>
+            <a:ext cx="1728216" cy="1024128"/>
           </a:xfrm>
           <a:prstGeom prst="rect">
             <a:avLst/>
@@ -9101,7 +8510,7 @@
                 <a:ea typeface="Calibri" pitchFamily="34" charset="-122"/>
                 <a:cs typeface="Calibri" pitchFamily="34" charset="-120"/>
               </a:rPr>
-              <a:t>Take it to the farm</a:t>
+              <a:t>Ən təcili birinci</a:t>
             </a:r>
             <a:endParaRPr lang="en-US" sz="1300" dirty="0"/>
           </a:p>
@@ -9118,7 +8527,7 @@
                 <a:ea typeface="Calibri" pitchFamily="34" charset="-122"/>
                 <a:cs typeface="Calibri" pitchFamily="34" charset="-120"/>
               </a:rPr>
-              <a:t>Print one page for the visit.</a:t>
+              <a:t>Hər problem və qısa səbəbi.</a:t>
             </a:r>
             <a:endParaRPr lang="en-US" sz="1300" dirty="0"/>
           </a:p>
@@ -9126,13 +8535,13 @@
       </p:sp>
       <p:sp>
         <p:nvSpPr>
-          <p:cNvPr id="16" name="Text 13"/>
-          <p:cNvSpPr txBox="1"/>
-          <p:nvPr/>
-        </p:nvSpPr>
-        <p:spPr>
-          <a:xfrm>
-            <a:off x="502920" y="5365922"/>
+          <p:cNvPr id="20" name="Text 17"/>
+          <p:cNvSpPr txBox="1"/>
+          <p:nvPr/>
+        </p:nvSpPr>
+        <p:spPr>
+          <a:xfrm>
+            <a:off x="9631375" y="3358566"/>
             <a:ext cx="228600" cy="228600"/>
           </a:xfrm>
           <a:prstGeom prst="ellipse">
@@ -9163,7 +8572,7 @@
                 <a:ea typeface="Calibri" pitchFamily="34" charset="-122"/>
                 <a:cs typeface="Calibri" pitchFamily="34" charset="-120"/>
               </a:rPr>
-              <a:t>4</a:t>
+              <a:t>2</a:t>
             </a:r>
             <a:endParaRPr lang="en-US" sz="1000" dirty="0"/>
           </a:p>
@@ -9171,14 +8580,14 @@
       </p:sp>
       <p:sp>
         <p:nvSpPr>
-          <p:cNvPr id="17" name="Text 14"/>
-          <p:cNvSpPr txBox="1"/>
-          <p:nvPr/>
-        </p:nvSpPr>
-        <p:spPr>
-          <a:xfrm>
-            <a:off x="832104" y="5370494"/>
-            <a:ext cx="1728216" cy="961726"/>
+          <p:cNvPr id="21" name="Text 18"/>
+          <p:cNvSpPr txBox="1"/>
+          <p:nvPr/>
+        </p:nvSpPr>
+        <p:spPr>
+          <a:xfrm>
+            <a:off x="9960559" y="3363138"/>
+            <a:ext cx="1728216" cy="1024128"/>
           </a:xfrm>
           <a:prstGeom prst="rect">
             <a:avLst/>
@@ -9205,7 +8614,7 @@
                 <a:ea typeface="Calibri" pitchFamily="34" charset="-122"/>
                 <a:cs typeface="Calibri" pitchFamily="34" charset="-120"/>
               </a:rPr>
-              <a:t>A possible cause</a:t>
+              <a:t>Nə etməli</a:t>
             </a:r>
             <a:endParaRPr lang="en-US" sz="1300" dirty="0"/>
           </a:p>
@@ -9222,7 +8631,7 @@
                 <a:ea typeface="Calibri" pitchFamily="34" charset="-122"/>
                 <a:cs typeface="Calibri" pitchFamily="34" charset="-120"/>
               </a:rPr>
-              <a:t>The farm used only 70% of the water it is allowed.</a:t>
+              <a:t>Su çatışmazlığını, torpaqda duzu və ya zərərvericiləri axtarın.</a:t>
             </a:r>
             <a:endParaRPr lang="en-US" sz="1300" dirty="0"/>
           </a:p>
@@ -9230,130 +8639,13 @@
       </p:sp>
       <p:sp>
         <p:nvSpPr>
-          <p:cNvPr id="18" name="Text 15"/>
-          <p:cNvSpPr txBox="1"/>
-          <p:nvPr/>
-        </p:nvSpPr>
-        <p:spPr>
-          <a:xfrm>
-            <a:off x="6278728" y="457200"/>
-            <a:ext cx="5410048" cy="237744"/>
-          </a:xfrm>
-          <a:prstGeom prst="rect">
-            <a:avLst/>
-          </a:prstGeom>
-          <a:noFill/>
-          <a:ln/>
-        </p:spPr>
-        <p:txBody>
-          <a:bodyPr wrap="square" lIns="0" tIns="0" rIns="0" bIns="0" rtlCol="0" anchor="ctr"/>
-          <a:lstStyle/>
-          <a:p>
-            <a:pPr indent="0" marL="0">
-              <a:buNone/>
-            </a:pPr>
-            <a:r>
-              <a:rPr lang="en-US" sz="1000" b="1" spc="200" kern="0" dirty="0">
-                <a:solidFill>
-                  <a:srgbClr val="1B7350"/>
-                </a:solidFill>
-                <a:latin typeface="Calibri" pitchFamily="34" charset="0"/>
-                <a:ea typeface="Calibri" pitchFamily="34" charset="-122"/>
-                <a:cs typeface="Calibri" pitchFamily="34" charset="-120"/>
-              </a:rPr>
-              <a:t>AZƏRBAYCANCA</a:t>
-            </a:r>
-            <a:endParaRPr lang="en-US" sz="1000" dirty="0"/>
-          </a:p>
-        </p:txBody>
-      </p:sp>
-      <p:sp>
-        <p:nvSpPr>
-          <p:cNvPr id="19" name="Text 16"/>
-          <p:cNvSpPr txBox="1"/>
-          <p:nvPr/>
-        </p:nvSpPr>
-        <p:spPr>
-          <a:xfrm>
-            <a:off x="6278728" y="731520"/>
-            <a:ext cx="5410048" cy="457200"/>
-          </a:xfrm>
-          <a:prstGeom prst="rect">
-            <a:avLst/>
-          </a:prstGeom>
-          <a:noFill/>
-          <a:ln/>
-        </p:spPr>
-        <p:txBody>
-          <a:bodyPr wrap="square" lIns="0" tIns="0" rIns="0" bIns="0" rtlCol="0" anchor="t"/>
-          <a:lstStyle/>
-          <a:p>
-            <a:pPr indent="0" marL="0">
-              <a:buNone/>
-            </a:pPr>
-            <a:r>
-              <a:rPr lang="en-US" sz="2400" b="1" dirty="0">
-                <a:solidFill>
-                  <a:srgbClr val="0D1411"/>
-                </a:solidFill>
-                <a:latin typeface="Calibri" pitchFamily="34" charset="0"/>
-                <a:ea typeface="Calibri" pitchFamily="34" charset="-122"/>
-                <a:cs typeface="Calibri" pitchFamily="34" charset="-120"/>
-              </a:rPr>
-              <a:t>Baldan təsərrüfat ziyarətinə</a:t>
-            </a:r>
-            <a:endParaRPr lang="en-US" sz="2400" dirty="0"/>
-          </a:p>
-        </p:txBody>
-      </p:sp>
-      <p:sp>
-        <p:nvSpPr>
-          <p:cNvPr id="20" name="Text 17"/>
-          <p:cNvSpPr txBox="1"/>
-          <p:nvPr/>
-        </p:nvSpPr>
-        <p:spPr>
-          <a:xfrm>
-            <a:off x="6278728" y="1225296"/>
-            <a:ext cx="5410048" cy="585216"/>
-          </a:xfrm>
-          <a:prstGeom prst="rect">
-            <a:avLst/>
-          </a:prstGeom>
-          <a:noFill/>
-          <a:ln/>
-        </p:spPr>
-        <p:txBody>
-          <a:bodyPr wrap="square" lIns="0" tIns="0" rIns="0" bIns="0" rtlCol="0" anchor="t"/>
-          <a:lstStyle/>
-          <a:p>
-            <a:pPr indent="0" marL="0">
-              <a:buNone/>
-            </a:pPr>
-            <a:r>
-              <a:rPr lang="en-US" sz="1400" dirty="0">
-                <a:solidFill>
-                  <a:srgbClr val="4A5852"/>
-                </a:solidFill>
-                <a:latin typeface="Calibri" pitchFamily="34" charset="0"/>
-                <a:ea typeface="Calibri" pitchFamily="34" charset="-122"/>
-                <a:cs typeface="Calibri" pitchFamily="34" charset="-120"/>
-              </a:rPr>
-              <a:t>Bu təsərrüfatda nəyi yoxlamaq lazımdır. Sayt xəstəliyin adını demir. Harada baxmağı göstərir.</a:t>
-            </a:r>
-            <a:endParaRPr lang="en-US" sz="1400" dirty="0"/>
-          </a:p>
-        </p:txBody>
-      </p:sp>
-      <p:sp>
-        <p:nvSpPr>
-          <p:cNvPr id="21" name="Text 18"/>
-          <p:cNvSpPr txBox="1"/>
-          <p:nvPr/>
-        </p:nvSpPr>
-        <p:spPr>
-          <a:xfrm>
-            <a:off x="9631375" y="2261286"/>
+          <p:cNvPr id="22" name="Text 19"/>
+          <p:cNvSpPr txBox="1"/>
+          <p:nvPr/>
+        </p:nvSpPr>
+        <p:spPr>
+          <a:xfrm>
+            <a:off x="9631375" y="4455846"/>
             <a:ext cx="228600" cy="228600"/>
           </a:xfrm>
           <a:prstGeom prst="ellipse">
@@ -9384,7 +8676,7 @@
                 <a:ea typeface="Calibri" pitchFamily="34" charset="-122"/>
                 <a:cs typeface="Calibri" pitchFamily="34" charset="-120"/>
               </a:rPr>
-              <a:t>1</a:t>
+              <a:t>3</a:t>
             </a:r>
             <a:endParaRPr lang="en-US" sz="1000" dirty="0"/>
           </a:p>
@@ -9392,14 +8684,14 @@
       </p:sp>
       <p:sp>
         <p:nvSpPr>
-          <p:cNvPr id="22" name="Text 19"/>
-          <p:cNvSpPr txBox="1"/>
-          <p:nvPr/>
-        </p:nvSpPr>
-        <p:spPr>
-          <a:xfrm>
-            <a:off x="9960559" y="2265858"/>
-            <a:ext cx="1728216" cy="961726"/>
+          <p:cNvPr id="23" name="Text 20"/>
+          <p:cNvSpPr txBox="1"/>
+          <p:nvPr/>
+        </p:nvSpPr>
+        <p:spPr>
+          <a:xfrm>
+            <a:off x="9960559" y="4460418"/>
+            <a:ext cx="1728216" cy="1024128"/>
           </a:xfrm>
           <a:prstGeom prst="rect">
             <a:avLst/>
@@ -9426,7 +8718,7 @@
                 <a:ea typeface="Calibri" pitchFamily="34" charset="-122"/>
                 <a:cs typeface="Calibri" pitchFamily="34" charset="-120"/>
               </a:rPr>
-              <a:t>Ən təcili birinci</a:t>
+              <a:t>Təsərrüfata aparın</a:t>
             </a:r>
             <a:endParaRPr lang="en-US" sz="1300" dirty="0"/>
           </a:p>
@@ -9443,7 +8735,7 @@
                 <a:ea typeface="Calibri" pitchFamily="34" charset="-122"/>
                 <a:cs typeface="Calibri" pitchFamily="34" charset="-120"/>
               </a:rPr>
-              <a:t>Hər problem və qısa səbəbi.</a:t>
+              <a:t>Ziyarət üçün bir səhifə çap edin.</a:t>
             </a:r>
             <a:endParaRPr lang="en-US" sz="1300" dirty="0"/>
           </a:p>
@@ -9451,319 +8743,7 @@
       </p:sp>
       <p:sp>
         <p:nvSpPr>
-          <p:cNvPr id="23" name="Text 20"/>
-          <p:cNvSpPr txBox="1"/>
-          <p:nvPr/>
-        </p:nvSpPr>
-        <p:spPr>
-          <a:xfrm>
-            <a:off x="9631375" y="3296165"/>
-            <a:ext cx="228600" cy="228600"/>
-          </a:xfrm>
-          <a:prstGeom prst="ellipse">
-            <a:avLst/>
-          </a:prstGeom>
-          <a:solidFill>
-            <a:srgbClr val="114230"/>
-          </a:solidFill>
-          <a:ln w="15875">
-            <a:solidFill>
-              <a:srgbClr val="FFFFFF"/>
-            </a:solidFill>
-          </a:ln>
-        </p:spPr>
-        <p:txBody>
-          <a:bodyPr wrap="square" lIns="0" tIns="0" rIns="0" bIns="0" rtlCol="0" anchor="ctr"/>
-          <a:lstStyle/>
-          <a:p>
-            <a:pPr algn="ctr" indent="0" marL="0">
-              <a:buNone/>
-            </a:pPr>
-            <a:r>
-              <a:rPr lang="en-US" sz="1000" b="1" dirty="0">
-                <a:solidFill>
-                  <a:srgbClr val="FFFFFF"/>
-                </a:solidFill>
-                <a:latin typeface="Calibri" pitchFamily="34" charset="0"/>
-                <a:ea typeface="Calibri" pitchFamily="34" charset="-122"/>
-                <a:cs typeface="Calibri" pitchFamily="34" charset="-120"/>
-              </a:rPr>
-              <a:t>2</a:t>
-            </a:r>
-            <a:endParaRPr lang="en-US" sz="1000" dirty="0"/>
-          </a:p>
-        </p:txBody>
-      </p:sp>
-      <p:sp>
-        <p:nvSpPr>
-          <p:cNvPr id="24" name="Text 21"/>
-          <p:cNvSpPr txBox="1"/>
-          <p:nvPr/>
-        </p:nvSpPr>
-        <p:spPr>
-          <a:xfrm>
-            <a:off x="9960559" y="3300737"/>
-            <a:ext cx="1728216" cy="961726"/>
-          </a:xfrm>
-          <a:prstGeom prst="rect">
-            <a:avLst/>
-          </a:prstGeom>
-          <a:noFill/>
-          <a:ln/>
-        </p:spPr>
-        <p:txBody>
-          <a:bodyPr wrap="square" lIns="0" tIns="0" rIns="0" bIns="0" rtlCol="0" anchor="t"/>
-          <a:lstStyle/>
-          <a:p>
-            <a:pPr indent="0" marL="0">
-              <a:spcAft>
-                <a:spcPts val="200"/>
-              </a:spcAft>
-              <a:buNone/>
-            </a:pPr>
-            <a:r>
-              <a:rPr lang="en-US" sz="1300" b="1" dirty="0">
-                <a:solidFill>
-                  <a:srgbClr val="0D1411"/>
-                </a:solidFill>
-                <a:latin typeface="Calibri" pitchFamily="34" charset="0"/>
-                <a:ea typeface="Calibri" pitchFamily="34" charset="-122"/>
-                <a:cs typeface="Calibri" pitchFamily="34" charset="-120"/>
-              </a:rPr>
-              <a:t>Nə etməli</a:t>
-            </a:r>
-            <a:endParaRPr lang="en-US" sz="1300" dirty="0"/>
-          </a:p>
-          <a:p>
-            <a:pPr indent="0" marL="0">
-              <a:buNone/>
-            </a:pPr>
-            <a:r>
-              <a:rPr lang="en-US" sz="1150" dirty="0">
-                <a:solidFill>
-                  <a:srgbClr val="4A5852"/>
-                </a:solidFill>
-                <a:latin typeface="Calibri" pitchFamily="34" charset="0"/>
-                <a:ea typeface="Calibri" pitchFamily="34" charset="-122"/>
-                <a:cs typeface="Calibri" pitchFamily="34" charset="-120"/>
-              </a:rPr>
-              <a:t>Su çatışmazlığını, torpaqda duzu və ya zərərvericiləri axtarın.</a:t>
-            </a:r>
-            <a:endParaRPr lang="en-US" sz="1300" dirty="0"/>
-          </a:p>
-        </p:txBody>
-      </p:sp>
-      <p:sp>
-        <p:nvSpPr>
-          <p:cNvPr id="25" name="Text 22"/>
-          <p:cNvSpPr txBox="1"/>
-          <p:nvPr/>
-        </p:nvSpPr>
-        <p:spPr>
-          <a:xfrm>
-            <a:off x="9631375" y="4331043"/>
-            <a:ext cx="228600" cy="228600"/>
-          </a:xfrm>
-          <a:prstGeom prst="ellipse">
-            <a:avLst/>
-          </a:prstGeom>
-          <a:solidFill>
-            <a:srgbClr val="114230"/>
-          </a:solidFill>
-          <a:ln w="15875">
-            <a:solidFill>
-              <a:srgbClr val="FFFFFF"/>
-            </a:solidFill>
-          </a:ln>
-        </p:spPr>
-        <p:txBody>
-          <a:bodyPr wrap="square" lIns="0" tIns="0" rIns="0" bIns="0" rtlCol="0" anchor="ctr"/>
-          <a:lstStyle/>
-          <a:p>
-            <a:pPr algn="ctr" indent="0" marL="0">
-              <a:buNone/>
-            </a:pPr>
-            <a:r>
-              <a:rPr lang="en-US" sz="1000" b="1" dirty="0">
-                <a:solidFill>
-                  <a:srgbClr val="FFFFFF"/>
-                </a:solidFill>
-                <a:latin typeface="Calibri" pitchFamily="34" charset="0"/>
-                <a:ea typeface="Calibri" pitchFamily="34" charset="-122"/>
-                <a:cs typeface="Calibri" pitchFamily="34" charset="-120"/>
-              </a:rPr>
-              <a:t>3</a:t>
-            </a:r>
-            <a:endParaRPr lang="en-US" sz="1000" dirty="0"/>
-          </a:p>
-        </p:txBody>
-      </p:sp>
-      <p:sp>
-        <p:nvSpPr>
-          <p:cNvPr id="26" name="Text 23"/>
-          <p:cNvSpPr txBox="1"/>
-          <p:nvPr/>
-        </p:nvSpPr>
-        <p:spPr>
-          <a:xfrm>
-            <a:off x="9960559" y="4335615"/>
-            <a:ext cx="1728216" cy="961726"/>
-          </a:xfrm>
-          <a:prstGeom prst="rect">
-            <a:avLst/>
-          </a:prstGeom>
-          <a:noFill/>
-          <a:ln/>
-        </p:spPr>
-        <p:txBody>
-          <a:bodyPr wrap="square" lIns="0" tIns="0" rIns="0" bIns="0" rtlCol="0" anchor="t"/>
-          <a:lstStyle/>
-          <a:p>
-            <a:pPr indent="0" marL="0">
-              <a:spcAft>
-                <a:spcPts val="200"/>
-              </a:spcAft>
-              <a:buNone/>
-            </a:pPr>
-            <a:r>
-              <a:rPr lang="en-US" sz="1300" b="1" dirty="0">
-                <a:solidFill>
-                  <a:srgbClr val="0D1411"/>
-                </a:solidFill>
-                <a:latin typeface="Calibri" pitchFamily="34" charset="0"/>
-                <a:ea typeface="Calibri" pitchFamily="34" charset="-122"/>
-                <a:cs typeface="Calibri" pitchFamily="34" charset="-120"/>
-              </a:rPr>
-              <a:t>Təsərrüfata aparın</a:t>
-            </a:r>
-            <a:endParaRPr lang="en-US" sz="1300" dirty="0"/>
-          </a:p>
-          <a:p>
-            <a:pPr indent="0" marL="0">
-              <a:buNone/>
-            </a:pPr>
-            <a:r>
-              <a:rPr lang="en-US" sz="1150" dirty="0">
-                <a:solidFill>
-                  <a:srgbClr val="4A5852"/>
-                </a:solidFill>
-                <a:latin typeface="Calibri" pitchFamily="34" charset="0"/>
-                <a:ea typeface="Calibri" pitchFamily="34" charset="-122"/>
-                <a:cs typeface="Calibri" pitchFamily="34" charset="-120"/>
-              </a:rPr>
-              <a:t>Ziyarət üçün bir səhifə çap edin.</a:t>
-            </a:r>
-            <a:endParaRPr lang="en-US" sz="1300" dirty="0"/>
-          </a:p>
-        </p:txBody>
-      </p:sp>
-      <p:sp>
-        <p:nvSpPr>
-          <p:cNvPr id="27" name="Text 24"/>
-          <p:cNvSpPr txBox="1"/>
-          <p:nvPr/>
-        </p:nvSpPr>
-        <p:spPr>
-          <a:xfrm>
-            <a:off x="9631375" y="5365922"/>
-            <a:ext cx="228600" cy="228600"/>
-          </a:xfrm>
-          <a:prstGeom prst="ellipse">
-            <a:avLst/>
-          </a:prstGeom>
-          <a:solidFill>
-            <a:srgbClr val="114230"/>
-          </a:solidFill>
-          <a:ln w="15875">
-            <a:solidFill>
-              <a:srgbClr val="FFFFFF"/>
-            </a:solidFill>
-          </a:ln>
-        </p:spPr>
-        <p:txBody>
-          <a:bodyPr wrap="square" lIns="0" tIns="0" rIns="0" bIns="0" rtlCol="0" anchor="ctr"/>
-          <a:lstStyle/>
-          <a:p>
-            <a:pPr algn="ctr" indent="0" marL="0">
-              <a:buNone/>
-            </a:pPr>
-            <a:r>
-              <a:rPr lang="en-US" sz="1000" b="1" dirty="0">
-                <a:solidFill>
-                  <a:srgbClr val="FFFFFF"/>
-                </a:solidFill>
-                <a:latin typeface="Calibri" pitchFamily="34" charset="0"/>
-                <a:ea typeface="Calibri" pitchFamily="34" charset="-122"/>
-                <a:cs typeface="Calibri" pitchFamily="34" charset="-120"/>
-              </a:rPr>
-              <a:t>4</a:t>
-            </a:r>
-            <a:endParaRPr lang="en-US" sz="1000" dirty="0"/>
-          </a:p>
-        </p:txBody>
-      </p:sp>
-      <p:sp>
-        <p:nvSpPr>
-          <p:cNvPr id="28" name="Text 25"/>
-          <p:cNvSpPr txBox="1"/>
-          <p:nvPr/>
-        </p:nvSpPr>
-        <p:spPr>
-          <a:xfrm>
-            <a:off x="9960559" y="5370494"/>
-            <a:ext cx="1728216" cy="961726"/>
-          </a:xfrm>
-          <a:prstGeom prst="rect">
-            <a:avLst/>
-          </a:prstGeom>
-          <a:noFill/>
-          <a:ln/>
-        </p:spPr>
-        <p:txBody>
-          <a:bodyPr wrap="square" lIns="0" tIns="0" rIns="0" bIns="0" rtlCol="0" anchor="t"/>
-          <a:lstStyle/>
-          <a:p>
-            <a:pPr indent="0" marL="0">
-              <a:spcAft>
-                <a:spcPts val="200"/>
-              </a:spcAft>
-              <a:buNone/>
-            </a:pPr>
-            <a:r>
-              <a:rPr lang="en-US" sz="1300" b="1" dirty="0">
-                <a:solidFill>
-                  <a:srgbClr val="0D1411"/>
-                </a:solidFill>
-                <a:latin typeface="Calibri" pitchFamily="34" charset="0"/>
-                <a:ea typeface="Calibri" pitchFamily="34" charset="-122"/>
-                <a:cs typeface="Calibri" pitchFamily="34" charset="-120"/>
-              </a:rPr>
-              <a:t>Mümkün səbəb</a:t>
-            </a:r>
-            <a:endParaRPr lang="en-US" sz="1300" dirty="0"/>
-          </a:p>
-          <a:p>
-            <a:pPr indent="0" marL="0">
-              <a:buNone/>
-            </a:pPr>
-            <a:r>
-              <a:rPr lang="en-US" sz="1150" dirty="0">
-                <a:solidFill>
-                  <a:srgbClr val="4A5852"/>
-                </a:solidFill>
-                <a:latin typeface="Calibri" pitchFamily="34" charset="0"/>
-                <a:ea typeface="Calibri" pitchFamily="34" charset="-122"/>
-                <a:cs typeface="Calibri" pitchFamily="34" charset="-120"/>
-              </a:rPr>
-              <a:t>Təsərrüfat ona ayrılan suyun yalnız 70 faizini istifadə edib.</a:t>
-            </a:r>
-            <a:endParaRPr lang="en-US" sz="1300" dirty="0"/>
-          </a:p>
-        </p:txBody>
-      </p:sp>
-      <p:sp>
-        <p:nvSpPr>
-          <p:cNvPr id="30" name="Text 26"/>
+          <p:cNvPr id="25" name="Text 21"/>
           <p:cNvSpPr txBox="1"/>
           <p:nvPr/>
         </p:nvSpPr>
@@ -10075,7 +9055,7 @@
                 <a:ea typeface="Calibri" pitchFamily="34" charset="-122"/>
                 <a:cs typeface="Calibri" pitchFamily="34" charset="-120"/>
               </a:rPr>
-              <a:t>From the satellite, every season.</a:t>
+              <a:t>From the satellite imagery.</a:t>
             </a:r>
             <a:endParaRPr lang="en-US" sz="1500" dirty="0"/>
           </a:p>
@@ -10131,7 +9111,7 @@
                 <a:ea typeface="Calibri" pitchFamily="34" charset="-122"/>
                 <a:cs typeface="Calibri" pitchFamily="34" charset="-120"/>
               </a:rPr>
-              <a:t>Peykdən, hər mövsüm.</a:t>
+              <a:t>Peyk şəkillərindən.</a:t>
             </a:r>
             <a:endParaRPr lang="en-US" sz="1400" dirty="0"/>
           </a:p>
@@ -10811,7 +9791,7 @@
                 <a:ea typeface="Calibri" pitchFamily="34" charset="-122"/>
                 <a:cs typeface="Calibri" pitchFamily="34" charset="-120"/>
               </a:rPr>
-              <a:t>Your team visits</a:t>
+              <a:t>Your team reaches out</a:t>
             </a:r>
             <a:endParaRPr lang="en-US" sz="1500" dirty="0"/>
           </a:p>
@@ -10828,7 +9808,7 @@
                 <a:ea typeface="Calibri" pitchFamily="34" charset="-122"/>
                 <a:cs typeface="Calibri" pitchFamily="34" charset="-120"/>
               </a:rPr>
-              <a:t>With one page: what to check.</a:t>
+              <a:t>With relevant suggestions and a plan of action.</a:t>
             </a:r>
             <a:endParaRPr lang="en-US" sz="1500" dirty="0"/>
           </a:p>
@@ -10867,7 +9847,7 @@
                 <a:ea typeface="Calibri" pitchFamily="34" charset="-122"/>
                 <a:cs typeface="Calibri" pitchFamily="34" charset="-120"/>
               </a:rPr>
-              <a:t>Komandanız baş çəkir</a:t>
+              <a:t>Komandanız əlaqə saxlayır</a:t>
             </a:r>
             <a:endParaRPr lang="en-US" sz="1400" dirty="0"/>
           </a:p>
@@ -10884,7 +9864,7 @@
                 <a:ea typeface="Calibri" pitchFamily="34" charset="-122"/>
                 <a:cs typeface="Calibri" pitchFamily="34" charset="-120"/>
               </a:rPr>
-              <a:t>Bir səhifə ilə: nəyi yoxlamaq lazımdır.</a:t>
+              <a:t>Uyğun tövsiyələr və fəaliyyət planı ilə.</a:t>
             </a:r>
             <a:endParaRPr lang="en-US" sz="1400" dirty="0"/>
           </a:p>
@@ -10892,63 +9872,7 @@
       </p:sp>
       <p:sp>
         <p:nvSpPr>
-          <p:cNvPr id="31" name="Text 22"/>
-          <p:cNvSpPr txBox="1"/>
-          <p:nvPr/>
-        </p:nvSpPr>
-        <p:spPr>
-          <a:xfrm>
-            <a:off x="685800" y="5760720"/>
-            <a:ext cx="9601200" cy="685800"/>
-          </a:xfrm>
-          <a:prstGeom prst="rect">
-            <a:avLst/>
-          </a:prstGeom>
-          <a:noFill/>
-          <a:ln/>
-        </p:spPr>
-        <p:txBody>
-          <a:bodyPr wrap="square" lIns="0" tIns="0" rIns="0" bIns="0" rtlCol="0" anchor="t"/>
-          <a:lstStyle/>
-          <a:p>
-            <a:pPr indent="0" marL="0">
-              <a:buNone/>
-            </a:pPr>
-            <a:r>
-              <a:rPr lang="en-US" sz="1500" b="1" dirty="0">
-                <a:solidFill>
-                  <a:srgbClr val="FFFFFF"/>
-                </a:solidFill>
-                <a:latin typeface="Calibri" pitchFamily="34" charset="0"/>
-                <a:ea typeface="Calibri" pitchFamily="34" charset="-122"/>
-                <a:cs typeface="Calibri" pitchFamily="34" charset="-120"/>
-              </a:rPr>
-              <a:t>Next step: a live demo of the website.</a:t>
-            </a:r>
-            <a:endParaRPr lang="en-US" sz="1500" dirty="0"/>
-          </a:p>
-          <a:p>
-            <a:pPr indent="0" marL="0">
-              <a:buNone/>
-            </a:pPr>
-            <a:r>
-              <a:rPr lang="en-US" sz="1400" dirty="0">
-                <a:solidFill>
-                  <a:srgbClr val="BDE0D0"/>
-                </a:solidFill>
-                <a:latin typeface="Calibri" pitchFamily="34" charset="0"/>
-                <a:ea typeface="Calibri" pitchFamily="34" charset="-122"/>
-                <a:cs typeface="Calibri" pitchFamily="34" charset="-120"/>
-              </a:rPr>
-              <a:t>Növbəti addım: saytın canlı nümayişi.</a:t>
-            </a:r>
-            <a:endParaRPr lang="en-US" sz="1500" dirty="0"/>
-          </a:p>
-        </p:txBody>
-      </p:sp>
-      <p:sp>
-        <p:nvSpPr>
-          <p:cNvPr id="33" name="Text 23"/>
+          <p:cNvPr id="32" name="Text 22"/>
           <p:cNvSpPr txBox="1"/>
           <p:nvPr/>
         </p:nvSpPr>
